--- a/slides/ARC3133_Class10.pptx
+++ b/slides/ARC3133_Class10.pptx
@@ -17,7 +17,6 @@
     <p:sldId id="265" r:id="rId16"/>
     <p:sldId id="266" r:id="rId17"/>
     <p:sldId id="267" r:id="rId18"/>
-    <p:sldId id="268" r:id="rId19"/>
   </p:sldIdLst>
   <p:sldSz cx="12191969" cy="6858000" type="screen4x3"/>
   <p:notesSz cx="6858000" cy="9144000"/>
@@ -3307,7 +3306,7 @@
                 </a:solidFill>
                 <a:latin typeface="Arial"/>
               </a:rPr>
-              <a:t>MIDTERM REVIEW</a:t>
+              <a:t>DEADLINE WEEK</a:t>
             </a:r>
           </a:p>
           <a:p>
@@ -3534,7 +3533,7 @@
                 </a:solidFill>
                 <a:latin typeface="Arial"/>
               </a:rPr>
-              <a:t>PART 1 — PROJECTS 1–3 ON THE WALL · PART 2 — P4 BEGINS</a:t>
+              <a:t>EVERYTHING THROUGH ARRAYS IS IN · PROJECT 4 BEGINS</a:t>
             </a:r>
           </a:p>
         </p:txBody>
@@ -3569,7 +3568,7 @@
                 </a:solidFill>
                 <a:latin typeface="Arial"/>
               </a:rPr>
-              <a:t>MIDTERM — 5 DUE</a:t>
+              <a:t>GSM + P2b + P3c DUE</a:t>
             </a:r>
           </a:p>
         </p:txBody>
@@ -3604,7 +3603,7 @@
                 </a:solidFill>
                 <a:latin typeface="Arial"/>
               </a:rPr>
-              <a:t>P4a ISSUED TODAY</a:t>
+              <a:t>MID-SEMESTER DEADLINE  /  P4a ISSUED TODAY  /  P3d CHECKPOINT TODAY</a:t>
             </a:r>
           </a:p>
         </p:txBody>
@@ -3618,1163 +3617,6 @@
 </file>
 
 <file path=ppt/slides/slide10.xml><?xml version="1.0" encoding="utf-8"?>
-<p:sld xmlns:a="http://schemas.openxmlformats.org/drawingml/2006/main" xmlns:p="http://schemas.openxmlformats.org/presentationml/2006/main" xmlns:r="http://schemas.openxmlformats.org/officeDocument/2006/relationships">
-  <p:cSld>
-    <p:bg>
-      <p:bgPr>
-        <a:solidFill>
-          <a:srgbClr val="000000"/>
-        </a:solidFill>
-        <a:effectLst/>
-      </p:bgPr>
-    </p:bg>
-    <p:spTree>
-      <p:nvGrpSpPr>
-        <p:cNvPr id="1" name=""/>
-        <p:cNvGrpSpPr/>
-        <p:nvPr/>
-      </p:nvGrpSpPr>
-      <p:grpSpPr/>
-      <p:sp>
-        <p:nvSpPr>
-          <p:cNvPr id="2" name="Rectangle 1"/>
-          <p:cNvSpPr/>
-          <p:nvPr/>
-        </p:nvSpPr>
-        <p:spPr>
-          <a:xfrm>
-            <a:off x="662940" y="635508"/>
-            <a:ext cx="2194560" cy="384048"/>
-          </a:xfrm>
-          <a:prstGeom prst="rect">
-            <a:avLst/>
-          </a:prstGeom>
-          <a:solidFill>
-            <a:srgbClr val="000000"/>
-          </a:solidFill>
-          <a:ln w="6350">
-            <a:solidFill>
-              <a:srgbClr val="000000"/>
-            </a:solidFill>
-          </a:ln>
-          <a:effectLst/>
-        </p:spPr>
-        <p:style>
-          <a:lnRef idx="1">
-            <a:schemeClr val="accent1"/>
-          </a:lnRef>
-          <a:fillRef idx="3">
-            <a:schemeClr val="accent1"/>
-          </a:fillRef>
-          <a:effectRef idx="2">
-            <a:schemeClr val="accent1"/>
-          </a:effectRef>
-          <a:fontRef idx="minor">
-            <a:schemeClr val="lt1"/>
-          </a:fontRef>
-        </p:style>
-        <p:txBody>
-          <a:bodyPr rtlCol="0" anchor="ctr"/>
-          <a:lstStyle/>
-          <a:p/>
-        </p:txBody>
-      </p:sp>
-      <p:sp>
-        <p:nvSpPr>
-          <p:cNvPr id="3" name="Rectangle 2"/>
-          <p:cNvSpPr/>
-          <p:nvPr/>
-        </p:nvSpPr>
-        <p:spPr>
-          <a:xfrm>
-            <a:off x="594360" y="566928"/>
-            <a:ext cx="2194560" cy="384048"/>
-          </a:xfrm>
-          <a:prstGeom prst="rect">
-            <a:avLst/>
-          </a:prstGeom>
-          <a:solidFill>
-            <a:srgbClr val="FFE500"/>
-          </a:solidFill>
-          <a:ln w="34925">
-            <a:solidFill>
-              <a:srgbClr val="000000"/>
-            </a:solidFill>
-          </a:ln>
-          <a:effectLst/>
-        </p:spPr>
-        <p:style>
-          <a:lnRef idx="1">
-            <a:schemeClr val="accent1"/>
-          </a:lnRef>
-          <a:fillRef idx="3">
-            <a:schemeClr val="accent1"/>
-          </a:fillRef>
-          <a:effectRef idx="2">
-            <a:schemeClr val="accent1"/>
-          </a:effectRef>
-          <a:fontRef idx="minor">
-            <a:schemeClr val="lt1"/>
-          </a:fontRef>
-        </p:style>
-        <p:txBody>
-          <a:bodyPr rtlCol="0" anchor="ctr"/>
-          <a:lstStyle/>
-          <a:p/>
-        </p:txBody>
-      </p:sp>
-      <p:sp>
-        <p:nvSpPr>
-          <p:cNvPr id="4" name="TextBox 3"/>
-          <p:cNvSpPr txBox="1"/>
-          <p:nvPr/>
-        </p:nvSpPr>
-        <p:spPr>
-          <a:xfrm>
-            <a:off x="594360" y="658368"/>
-            <a:ext cx="2194560" cy="274320"/>
-          </a:xfrm>
-          <a:prstGeom prst="rect">
-            <a:avLst/>
-          </a:prstGeom>
-          <a:noFill/>
-        </p:spPr>
-        <p:txBody>
-          <a:bodyPr wrap="square" lIns="0" rIns="0" tIns="0" bIns="0" anchor="t">
-            <a:spAutoFit/>
-          </a:bodyPr>
-          <a:lstStyle/>
-          <a:p>
-            <a:pPr algn="ctr"/>
-            <a:r>
-              <a:rPr sz="1100" b="1">
-                <a:solidFill>
-                  <a:srgbClr val="000000"/>
-                </a:solidFill>
-                <a:latin typeface="Arial"/>
-              </a:rPr>
-              <a:t>ISSUED TODAY</a:t>
-            </a:r>
-          </a:p>
-        </p:txBody>
-      </p:sp>
-      <p:sp>
-        <p:nvSpPr>
-          <p:cNvPr id="5" name="TextBox 4"/>
-          <p:cNvSpPr txBox="1"/>
-          <p:nvPr/>
-        </p:nvSpPr>
-        <p:spPr>
-          <a:xfrm>
-            <a:off x="594360" y="1152144"/>
-            <a:ext cx="10972800" cy="566928"/>
-          </a:xfrm>
-          <a:prstGeom prst="rect">
-            <a:avLst/>
-          </a:prstGeom>
-          <a:noFill/>
-        </p:spPr>
-        <p:txBody>
-          <a:bodyPr wrap="square" lIns="0" rIns="0" tIns="0" bIns="0" anchor="t">
-            <a:spAutoFit/>
-          </a:bodyPr>
-          <a:lstStyle/>
-          <a:p>
-            <a:pPr algn="l"/>
-            <a:r>
-              <a:rPr sz="3200" b="1">
-                <a:solidFill>
-                  <a:srgbClr val="FFFDF7"/>
-                </a:solidFill>
-                <a:latin typeface="Arial"/>
-              </a:rPr>
-              <a:t>P4a — SDF VOLUME</a:t>
-            </a:r>
-          </a:p>
-        </p:txBody>
-      </p:sp>
-      <p:sp>
-        <p:nvSpPr>
-          <p:cNvPr id="6" name="Rectangle 5"/>
-          <p:cNvSpPr/>
-          <p:nvPr/>
-        </p:nvSpPr>
-        <p:spPr>
-          <a:xfrm>
-            <a:off x="594360" y="1810512"/>
-            <a:ext cx="10972800" cy="0"/>
-          </a:xfrm>
-          <a:prstGeom prst="rect">
-            <a:avLst/>
-          </a:prstGeom>
-          <a:noFill/>
-          <a:ln w="50800">
-            <a:solidFill>
-              <a:srgbClr val="FFFDF7"/>
-            </a:solidFill>
-          </a:ln>
-          <a:effectLst/>
-        </p:spPr>
-        <p:style>
-          <a:lnRef idx="1">
-            <a:schemeClr val="accent1"/>
-          </a:lnRef>
-          <a:fillRef idx="3">
-            <a:schemeClr val="accent1"/>
-          </a:fillRef>
-          <a:effectRef idx="2">
-            <a:schemeClr val="accent1"/>
-          </a:effectRef>
-          <a:fontRef idx="minor">
-            <a:schemeClr val="lt1"/>
-          </a:fontRef>
-        </p:style>
-        <p:txBody>
-          <a:bodyPr rtlCol="0" anchor="ctr"/>
-          <a:lstStyle/>
-          <a:p>
-            <a:pPr algn="ctr"/>
-          </a:p>
-        </p:txBody>
-      </p:sp>
-      <p:sp>
-        <p:nvSpPr>
-          <p:cNvPr id="7" name="TextBox 6"/>
-          <p:cNvSpPr txBox="1"/>
-          <p:nvPr/>
-        </p:nvSpPr>
-        <p:spPr>
-          <a:xfrm>
-            <a:off x="594360" y="1929384"/>
-            <a:ext cx="10972800" cy="329184"/>
-          </a:xfrm>
-          <a:prstGeom prst="rect">
-            <a:avLst/>
-          </a:prstGeom>
-          <a:noFill/>
-        </p:spPr>
-        <p:txBody>
-          <a:bodyPr wrap="square" lIns="0" rIns="0" tIns="0" bIns="0" anchor="t">
-            <a:spAutoFit/>
-          </a:bodyPr>
-          <a:lstStyle/>
-          <a:p>
-            <a:pPr algn="l"/>
-            <a:r>
-              <a:rPr sz="1300" b="1">
-                <a:solidFill>
-                  <a:srgbClr val="FFE500"/>
-                </a:solidFill>
-                <a:latin typeface="Arial"/>
-              </a:rPr>
-              <a:t>DUE WEEK 12 — Nov 10   /   14%</a:t>
-            </a:r>
-          </a:p>
-        </p:txBody>
-      </p:sp>
-      <p:sp>
-        <p:nvSpPr>
-          <p:cNvPr id="8" name="TextBox 7"/>
-          <p:cNvSpPr txBox="1"/>
-          <p:nvPr/>
-        </p:nvSpPr>
-        <p:spPr>
-          <a:xfrm>
-            <a:off x="594360" y="2377440"/>
-            <a:ext cx="10607040" cy="914400"/>
-          </a:xfrm>
-          <a:prstGeom prst="rect">
-            <a:avLst/>
-          </a:prstGeom>
-          <a:noFill/>
-        </p:spPr>
-        <p:txBody>
-          <a:bodyPr wrap="square" lIns="0" rIns="0" tIns="0" bIns="0" anchor="t">
-            <a:spAutoFit/>
-          </a:bodyPr>
-          <a:lstStyle/>
-          <a:p>
-            <a:pPr algn="l">
-              <a:lnSpc>
-                <a:spcPct val="130000"/>
-              </a:lnSpc>
-            </a:pPr>
-            <a:r>
-              <a:rPr sz="1500">
-                <a:solidFill>
-                  <a:srgbClr val="FFFDF7"/>
-                </a:solidFill>
-                <a:latin typeface="Calibri"/>
-              </a:rPr>
-              <a:t>Project 4 begins. Build a volume from signed distance fields — the CSG logic from P2, applied to fields instead of meshes — and choose the one you will slice and laser-cut in P4b.</a:t>
-            </a:r>
-          </a:p>
-        </p:txBody>
-      </p:sp>
-      <p:sp>
-        <p:nvSpPr>
-          <p:cNvPr id="9" name="Rectangle 8"/>
-          <p:cNvSpPr/>
-          <p:nvPr/>
-        </p:nvSpPr>
-        <p:spPr>
-          <a:xfrm>
-            <a:off x="662940" y="3680460"/>
-            <a:ext cx="3517391" cy="411480"/>
-          </a:xfrm>
-          <a:prstGeom prst="rect">
-            <a:avLst/>
-          </a:prstGeom>
-          <a:solidFill>
-            <a:srgbClr val="000000"/>
-          </a:solidFill>
-          <a:ln w="6350">
-            <a:solidFill>
-              <a:srgbClr val="000000"/>
-            </a:solidFill>
-          </a:ln>
-          <a:effectLst/>
-        </p:spPr>
-        <p:style>
-          <a:lnRef idx="1">
-            <a:schemeClr val="accent1"/>
-          </a:lnRef>
-          <a:fillRef idx="3">
-            <a:schemeClr val="accent1"/>
-          </a:fillRef>
-          <a:effectRef idx="2">
-            <a:schemeClr val="accent1"/>
-          </a:effectRef>
-          <a:fontRef idx="minor">
-            <a:schemeClr val="lt1"/>
-          </a:fontRef>
-        </p:style>
-        <p:txBody>
-          <a:bodyPr rtlCol="0" anchor="ctr"/>
-          <a:lstStyle/>
-          <a:p/>
-        </p:txBody>
-      </p:sp>
-      <p:sp>
-        <p:nvSpPr>
-          <p:cNvPr id="10" name="Rectangle 9"/>
-          <p:cNvSpPr/>
-          <p:nvPr/>
-        </p:nvSpPr>
-        <p:spPr>
-          <a:xfrm>
-            <a:off x="594360" y="3611880"/>
-            <a:ext cx="3517391" cy="411480"/>
-          </a:xfrm>
-          <a:prstGeom prst="rect">
-            <a:avLst/>
-          </a:prstGeom>
-          <a:solidFill>
-            <a:srgbClr val="00D9E1"/>
-          </a:solidFill>
-          <a:ln w="34925">
-            <a:solidFill>
-              <a:srgbClr val="000000"/>
-            </a:solidFill>
-          </a:ln>
-          <a:effectLst/>
-        </p:spPr>
-        <p:style>
-          <a:lnRef idx="1">
-            <a:schemeClr val="accent1"/>
-          </a:lnRef>
-          <a:fillRef idx="3">
-            <a:schemeClr val="accent1"/>
-          </a:fillRef>
-          <a:effectRef idx="2">
-            <a:schemeClr val="accent1"/>
-          </a:effectRef>
-          <a:fontRef idx="minor">
-            <a:schemeClr val="lt1"/>
-          </a:fontRef>
-        </p:style>
-        <p:txBody>
-          <a:bodyPr rtlCol="0" anchor="ctr"/>
-          <a:lstStyle/>
-          <a:p/>
-        </p:txBody>
-      </p:sp>
-      <p:sp>
-        <p:nvSpPr>
-          <p:cNvPr id="11" name="TextBox 10"/>
-          <p:cNvSpPr txBox="1"/>
-          <p:nvPr/>
-        </p:nvSpPr>
-        <p:spPr>
-          <a:xfrm>
-            <a:off x="594360" y="3717036"/>
-            <a:ext cx="3517391" cy="274320"/>
-          </a:xfrm>
-          <a:prstGeom prst="rect">
-            <a:avLst/>
-          </a:prstGeom>
-          <a:noFill/>
-        </p:spPr>
-        <p:txBody>
-          <a:bodyPr wrap="square" lIns="0" rIns="0" tIns="0" bIns="0" anchor="t">
-            <a:spAutoFit/>
-          </a:bodyPr>
-          <a:lstStyle/>
-          <a:p>
-            <a:pPr algn="ctr"/>
-            <a:r>
-              <a:rPr sz="1100" b="1">
-                <a:solidFill>
-                  <a:srgbClr val="000000"/>
-                </a:solidFill>
-                <a:latin typeface="Arial"/>
-              </a:rPr>
-              <a:t>COMPARE</a:t>
-            </a:r>
-          </a:p>
-        </p:txBody>
-      </p:sp>
-      <p:sp>
-        <p:nvSpPr>
-          <p:cNvPr id="12" name="Rectangle 11"/>
-          <p:cNvSpPr/>
-          <p:nvPr/>
-        </p:nvSpPr>
-        <p:spPr>
-          <a:xfrm>
-            <a:off x="662940" y="4183380"/>
-            <a:ext cx="3517391" cy="1463040"/>
-          </a:xfrm>
-          <a:prstGeom prst="rect">
-            <a:avLst/>
-          </a:prstGeom>
-          <a:solidFill>
-            <a:srgbClr val="000000"/>
-          </a:solidFill>
-          <a:ln w="6350">
-            <a:solidFill>
-              <a:srgbClr val="000000"/>
-            </a:solidFill>
-          </a:ln>
-          <a:effectLst/>
-        </p:spPr>
-        <p:style>
-          <a:lnRef idx="1">
-            <a:schemeClr val="accent1"/>
-          </a:lnRef>
-          <a:fillRef idx="3">
-            <a:schemeClr val="accent1"/>
-          </a:fillRef>
-          <a:effectRef idx="2">
-            <a:schemeClr val="accent1"/>
-          </a:effectRef>
-          <a:fontRef idx="minor">
-            <a:schemeClr val="lt1"/>
-          </a:fontRef>
-        </p:style>
-        <p:txBody>
-          <a:bodyPr rtlCol="0" anchor="ctr"/>
-          <a:lstStyle/>
-          <a:p/>
-        </p:txBody>
-      </p:sp>
-      <p:sp>
-        <p:nvSpPr>
-          <p:cNvPr id="13" name="Rectangle 12"/>
-          <p:cNvSpPr/>
-          <p:nvPr/>
-        </p:nvSpPr>
-        <p:spPr>
-          <a:xfrm>
-            <a:off x="594360" y="4114800"/>
-            <a:ext cx="3517391" cy="1463040"/>
-          </a:xfrm>
-          <a:prstGeom prst="rect">
-            <a:avLst/>
-          </a:prstGeom>
-          <a:solidFill>
-            <a:srgbClr val="FFFDF7"/>
-          </a:solidFill>
-          <a:ln w="34925">
-            <a:solidFill>
-              <a:srgbClr val="000000"/>
-            </a:solidFill>
-          </a:ln>
-          <a:effectLst/>
-        </p:spPr>
-        <p:style>
-          <a:lnRef idx="1">
-            <a:schemeClr val="accent1"/>
-          </a:lnRef>
-          <a:fillRef idx="3">
-            <a:schemeClr val="accent1"/>
-          </a:fillRef>
-          <a:effectRef idx="2">
-            <a:schemeClr val="accent1"/>
-          </a:effectRef>
-          <a:fontRef idx="minor">
-            <a:schemeClr val="lt1"/>
-          </a:fontRef>
-        </p:style>
-        <p:txBody>
-          <a:bodyPr rtlCol="0" anchor="ctr"/>
-          <a:lstStyle/>
-          <a:p/>
-        </p:txBody>
-      </p:sp>
-      <p:sp>
-        <p:nvSpPr>
-          <p:cNvPr id="14" name="TextBox 13"/>
-          <p:cNvSpPr txBox="1"/>
-          <p:nvPr/>
-        </p:nvSpPr>
-        <p:spPr>
-          <a:xfrm>
-            <a:off x="850392" y="4279392"/>
-            <a:ext cx="3005327" cy="320040"/>
-          </a:xfrm>
-          <a:prstGeom prst="rect">
-            <a:avLst/>
-          </a:prstGeom>
-          <a:noFill/>
-        </p:spPr>
-        <p:txBody>
-          <a:bodyPr wrap="square" lIns="0" rIns="0" tIns="0" bIns="0" anchor="t">
-            <a:spAutoFit/>
-          </a:bodyPr>
-          <a:lstStyle/>
-          <a:p>
-            <a:pPr algn="l"/>
-            <a:r>
-              <a:rPr sz="1400" b="1">
-                <a:solidFill>
-                  <a:srgbClr val="000000"/>
-                </a:solidFill>
-                <a:latin typeface="Arial"/>
-              </a:rPr>
-              <a:t>SAME FIELDS</a:t>
-            </a:r>
-          </a:p>
-        </p:txBody>
-      </p:sp>
-      <p:sp>
-        <p:nvSpPr>
-          <p:cNvPr id="15" name="TextBox 14"/>
-          <p:cNvSpPr txBox="1"/>
-          <p:nvPr/>
-        </p:nvSpPr>
-        <p:spPr>
-          <a:xfrm>
-            <a:off x="850392" y="4663440"/>
-            <a:ext cx="3005327" cy="822960"/>
-          </a:xfrm>
-          <a:prstGeom prst="rect">
-            <a:avLst/>
-          </a:prstGeom>
-          <a:noFill/>
-        </p:spPr>
-        <p:txBody>
-          <a:bodyPr wrap="square" lIns="0" rIns="0" tIns="0" bIns="0" anchor="t">
-            <a:spAutoFit/>
-          </a:bodyPr>
-          <a:lstStyle/>
-          <a:p>
-            <a:pPr algn="l">
-              <a:lnSpc>
-                <a:spcPct val="125000"/>
-              </a:lnSpc>
-            </a:pPr>
-            <a:r>
-              <a:rPr sz="1250">
-                <a:solidFill>
-                  <a:srgbClr val="000000"/>
-                </a:solidFill>
-                <a:latin typeface="Calibri"/>
-              </a:rPr>
-              <a:t>Union, intersection and difference of the same sources.</a:t>
-            </a:r>
-          </a:p>
-        </p:txBody>
-      </p:sp>
-      <p:sp>
-        <p:nvSpPr>
-          <p:cNvPr id="16" name="Rectangle 15"/>
-          <p:cNvSpPr/>
-          <p:nvPr/>
-        </p:nvSpPr>
-        <p:spPr>
-          <a:xfrm>
-            <a:off x="4390644" y="3680460"/>
-            <a:ext cx="3517391" cy="411480"/>
-          </a:xfrm>
-          <a:prstGeom prst="rect">
-            <a:avLst/>
-          </a:prstGeom>
-          <a:solidFill>
-            <a:srgbClr val="000000"/>
-          </a:solidFill>
-          <a:ln w="6350">
-            <a:solidFill>
-              <a:srgbClr val="000000"/>
-            </a:solidFill>
-          </a:ln>
-          <a:effectLst/>
-        </p:spPr>
-        <p:style>
-          <a:lnRef idx="1">
-            <a:schemeClr val="accent1"/>
-          </a:lnRef>
-          <a:fillRef idx="3">
-            <a:schemeClr val="accent1"/>
-          </a:fillRef>
-          <a:effectRef idx="2">
-            <a:schemeClr val="accent1"/>
-          </a:effectRef>
-          <a:fontRef idx="minor">
-            <a:schemeClr val="lt1"/>
-          </a:fontRef>
-        </p:style>
-        <p:txBody>
-          <a:bodyPr rtlCol="0" anchor="ctr"/>
-          <a:lstStyle/>
-          <a:p/>
-        </p:txBody>
-      </p:sp>
-      <p:sp>
-        <p:nvSpPr>
-          <p:cNvPr id="17" name="Rectangle 16"/>
-          <p:cNvSpPr/>
-          <p:nvPr/>
-        </p:nvSpPr>
-        <p:spPr>
-          <a:xfrm>
-            <a:off x="4322064" y="3611880"/>
-            <a:ext cx="3517391" cy="411480"/>
-          </a:xfrm>
-          <a:prstGeom prst="rect">
-            <a:avLst/>
-          </a:prstGeom>
-          <a:solidFill>
-            <a:srgbClr val="C6F035"/>
-          </a:solidFill>
-          <a:ln w="34925">
-            <a:solidFill>
-              <a:srgbClr val="000000"/>
-            </a:solidFill>
-          </a:ln>
-          <a:effectLst/>
-        </p:spPr>
-        <p:style>
-          <a:lnRef idx="1">
-            <a:schemeClr val="accent1"/>
-          </a:lnRef>
-          <a:fillRef idx="3">
-            <a:schemeClr val="accent1"/>
-          </a:fillRef>
-          <a:effectRef idx="2">
-            <a:schemeClr val="accent1"/>
-          </a:effectRef>
-          <a:fontRef idx="minor">
-            <a:schemeClr val="lt1"/>
-          </a:fontRef>
-        </p:style>
-        <p:txBody>
-          <a:bodyPr rtlCol="0" anchor="ctr"/>
-          <a:lstStyle/>
-          <a:p/>
-        </p:txBody>
-      </p:sp>
-      <p:sp>
-        <p:nvSpPr>
-          <p:cNvPr id="18" name="TextBox 17"/>
-          <p:cNvSpPr txBox="1"/>
-          <p:nvPr/>
-        </p:nvSpPr>
-        <p:spPr>
-          <a:xfrm>
-            <a:off x="4322064" y="3717036"/>
-            <a:ext cx="3517391" cy="274320"/>
-          </a:xfrm>
-          <a:prstGeom prst="rect">
-            <a:avLst/>
-          </a:prstGeom>
-          <a:noFill/>
-        </p:spPr>
-        <p:txBody>
-          <a:bodyPr wrap="square" lIns="0" rIns="0" tIns="0" bIns="0" anchor="t">
-            <a:spAutoFit/>
-          </a:bodyPr>
-          <a:lstStyle/>
-          <a:p>
-            <a:pPr algn="ctr"/>
-            <a:r>
-              <a:rPr sz="1100" b="1">
-                <a:solidFill>
-                  <a:srgbClr val="000000"/>
-                </a:solidFill>
-                <a:latin typeface="Arial"/>
-              </a:rPr>
-              <a:t>VARY</a:t>
-            </a:r>
-          </a:p>
-        </p:txBody>
-      </p:sp>
-      <p:sp>
-        <p:nvSpPr>
-          <p:cNvPr id="19" name="Rectangle 18"/>
-          <p:cNvSpPr/>
-          <p:nvPr/>
-        </p:nvSpPr>
-        <p:spPr>
-          <a:xfrm>
-            <a:off x="4390644" y="4183380"/>
-            <a:ext cx="3517391" cy="1463040"/>
-          </a:xfrm>
-          <a:prstGeom prst="rect">
-            <a:avLst/>
-          </a:prstGeom>
-          <a:solidFill>
-            <a:srgbClr val="000000"/>
-          </a:solidFill>
-          <a:ln w="6350">
-            <a:solidFill>
-              <a:srgbClr val="000000"/>
-            </a:solidFill>
-          </a:ln>
-          <a:effectLst/>
-        </p:spPr>
-        <p:style>
-          <a:lnRef idx="1">
-            <a:schemeClr val="accent1"/>
-          </a:lnRef>
-          <a:fillRef idx="3">
-            <a:schemeClr val="accent1"/>
-          </a:fillRef>
-          <a:effectRef idx="2">
-            <a:schemeClr val="accent1"/>
-          </a:effectRef>
-          <a:fontRef idx="minor">
-            <a:schemeClr val="lt1"/>
-          </a:fontRef>
-        </p:style>
-        <p:txBody>
-          <a:bodyPr rtlCol="0" anchor="ctr"/>
-          <a:lstStyle/>
-          <a:p/>
-        </p:txBody>
-      </p:sp>
-      <p:sp>
-        <p:nvSpPr>
-          <p:cNvPr id="20" name="Rectangle 19"/>
-          <p:cNvSpPr/>
-          <p:nvPr/>
-        </p:nvSpPr>
-        <p:spPr>
-          <a:xfrm>
-            <a:off x="4322064" y="4114800"/>
-            <a:ext cx="3517391" cy="1463040"/>
-          </a:xfrm>
-          <a:prstGeom prst="rect">
-            <a:avLst/>
-          </a:prstGeom>
-          <a:solidFill>
-            <a:srgbClr val="FFFDF7"/>
-          </a:solidFill>
-          <a:ln w="34925">
-            <a:solidFill>
-              <a:srgbClr val="000000"/>
-            </a:solidFill>
-          </a:ln>
-          <a:effectLst/>
-        </p:spPr>
-        <p:style>
-          <a:lnRef idx="1">
-            <a:schemeClr val="accent1"/>
-          </a:lnRef>
-          <a:fillRef idx="3">
-            <a:schemeClr val="accent1"/>
-          </a:fillRef>
-          <a:effectRef idx="2">
-            <a:schemeClr val="accent1"/>
-          </a:effectRef>
-          <a:fontRef idx="minor">
-            <a:schemeClr val="lt1"/>
-          </a:fontRef>
-        </p:style>
-        <p:txBody>
-          <a:bodyPr rtlCol="0" anchor="ctr"/>
-          <a:lstStyle/>
-          <a:p/>
-        </p:txBody>
-      </p:sp>
-      <p:sp>
-        <p:nvSpPr>
-          <p:cNvPr id="21" name="TextBox 20"/>
-          <p:cNvSpPr txBox="1"/>
-          <p:nvPr/>
-        </p:nvSpPr>
-        <p:spPr>
-          <a:xfrm>
-            <a:off x="4578096" y="4279392"/>
-            <a:ext cx="3005327" cy="320040"/>
-          </a:xfrm>
-          <a:prstGeom prst="rect">
-            <a:avLst/>
-          </a:prstGeom>
-          <a:noFill/>
-        </p:spPr>
-        <p:txBody>
-          <a:bodyPr wrap="square" lIns="0" rIns="0" tIns="0" bIns="0" anchor="t">
-            <a:spAutoFit/>
-          </a:bodyPr>
-          <a:lstStyle/>
-          <a:p>
-            <a:pPr algn="l"/>
-            <a:r>
-              <a:rPr sz="1400" b="1">
-                <a:solidFill>
-                  <a:srgbClr val="000000"/>
-                </a:solidFill>
-                <a:latin typeface="Arial"/>
-              </a:rPr>
-              <a:t>THREE VARIANTS</a:t>
-            </a:r>
-          </a:p>
-        </p:txBody>
-      </p:sp>
-      <p:sp>
-        <p:nvSpPr>
-          <p:cNvPr id="22" name="TextBox 21"/>
-          <p:cNvSpPr txBox="1"/>
-          <p:nvPr/>
-        </p:nvSpPr>
-        <p:spPr>
-          <a:xfrm>
-            <a:off x="4578096" y="4663440"/>
-            <a:ext cx="3005327" cy="822960"/>
-          </a:xfrm>
-          <a:prstGeom prst="rect">
-            <a:avLst/>
-          </a:prstGeom>
-          <a:noFill/>
-        </p:spPr>
-        <p:txBody>
-          <a:bodyPr wrap="square" lIns="0" rIns="0" tIns="0" bIns="0" anchor="t">
-            <a:spAutoFit/>
-          </a:bodyPr>
-          <a:lstStyle/>
-          <a:p>
-            <a:pPr algn="l">
-              <a:lnSpc>
-                <a:spcPct val="125000"/>
-              </a:lnSpc>
-            </a:pPr>
-            <a:r>
-              <a:rPr sz="1250">
-                <a:solidFill>
-                  <a:srgbClr val="000000"/>
-                </a:solidFill>
-                <a:latin typeface="Calibri"/>
-              </a:rPr>
-              <a:t>Three controlled parameter changes on the chosen result.</a:t>
-            </a:r>
-          </a:p>
-        </p:txBody>
-      </p:sp>
-      <p:sp>
-        <p:nvSpPr>
-          <p:cNvPr id="23" name="Rectangle 22"/>
-          <p:cNvSpPr/>
-          <p:nvPr/>
-        </p:nvSpPr>
-        <p:spPr>
-          <a:xfrm>
-            <a:off x="8118347" y="3680460"/>
-            <a:ext cx="3517391" cy="411480"/>
-          </a:xfrm>
-          <a:prstGeom prst="rect">
-            <a:avLst/>
-          </a:prstGeom>
-          <a:solidFill>
-            <a:srgbClr val="000000"/>
-          </a:solidFill>
-          <a:ln w="6350">
-            <a:solidFill>
-              <a:srgbClr val="000000"/>
-            </a:solidFill>
-          </a:ln>
-          <a:effectLst/>
-        </p:spPr>
-        <p:style>
-          <a:lnRef idx="1">
-            <a:schemeClr val="accent1"/>
-          </a:lnRef>
-          <a:fillRef idx="3">
-            <a:schemeClr val="accent1"/>
-          </a:fillRef>
-          <a:effectRef idx="2">
-            <a:schemeClr val="accent1"/>
-          </a:effectRef>
-          <a:fontRef idx="minor">
-            <a:schemeClr val="lt1"/>
-          </a:fontRef>
-        </p:style>
-        <p:txBody>
-          <a:bodyPr rtlCol="0" anchor="ctr"/>
-          <a:lstStyle/>
-          <a:p/>
-        </p:txBody>
-      </p:sp>
-      <p:sp>
-        <p:nvSpPr>
-          <p:cNvPr id="24" name="Rectangle 23"/>
-          <p:cNvSpPr/>
-          <p:nvPr/>
-        </p:nvSpPr>
-        <p:spPr>
-          <a:xfrm>
-            <a:off x="8049767" y="3611880"/>
-            <a:ext cx="3517391" cy="411480"/>
-          </a:xfrm>
-          <a:prstGeom prst="rect">
-            <a:avLst/>
-          </a:prstGeom>
-          <a:solidFill>
-            <a:srgbClr val="FFE500"/>
-          </a:solidFill>
-          <a:ln w="34925">
-            <a:solidFill>
-              <a:srgbClr val="000000"/>
-            </a:solidFill>
-          </a:ln>
-          <a:effectLst/>
-        </p:spPr>
-        <p:style>
-          <a:lnRef idx="1">
-            <a:schemeClr val="accent1"/>
-          </a:lnRef>
-          <a:fillRef idx="3">
-            <a:schemeClr val="accent1"/>
-          </a:fillRef>
-          <a:effectRef idx="2">
-            <a:schemeClr val="accent1"/>
-          </a:effectRef>
-          <a:fontRef idx="minor">
-            <a:schemeClr val="lt1"/>
-          </a:fontRef>
-        </p:style>
-        <p:txBody>
-          <a:bodyPr rtlCol="0" anchor="ctr"/>
-          <a:lstStyle/>
-          <a:p/>
-        </p:txBody>
-      </p:sp>
-      <p:sp>
-        <p:nvSpPr>
-          <p:cNvPr id="25" name="TextBox 24"/>
-          <p:cNvSpPr txBox="1"/>
-          <p:nvPr/>
-        </p:nvSpPr>
-        <p:spPr>
-          <a:xfrm>
-            <a:off x="8049767" y="3717036"/>
-            <a:ext cx="3517391" cy="274320"/>
-          </a:xfrm>
-          <a:prstGeom prst="rect">
-            <a:avLst/>
-          </a:prstGeom>
-          <a:noFill/>
-        </p:spPr>
-        <p:txBody>
-          <a:bodyPr wrap="square" lIns="0" rIns="0" tIns="0" bIns="0" anchor="t">
-            <a:spAutoFit/>
-          </a:bodyPr>
-          <a:lstStyle/>
-          <a:p>
-            <a:pPr algn="ctr"/>
-            <a:r>
-              <a:rPr sz="1100" b="1">
-                <a:solidFill>
-                  <a:srgbClr val="000000"/>
-                </a:solidFill>
-                <a:latin typeface="Arial"/>
-              </a:rPr>
-              <a:t>STATE</a:t>
-            </a:r>
-          </a:p>
-        </p:txBody>
-      </p:sp>
-      <p:sp>
-        <p:nvSpPr>
-          <p:cNvPr id="26" name="Rectangle 25"/>
-          <p:cNvSpPr/>
-          <p:nvPr/>
-        </p:nvSpPr>
-        <p:spPr>
-          <a:xfrm>
-            <a:off x="8118347" y="4183380"/>
-            <a:ext cx="3517391" cy="1463040"/>
-          </a:xfrm>
-          <a:prstGeom prst="rect">
-            <a:avLst/>
-          </a:prstGeom>
-          <a:solidFill>
-            <a:srgbClr val="000000"/>
-          </a:solidFill>
-          <a:ln w="6350">
-            <a:solidFill>
-              <a:srgbClr val="000000"/>
-            </a:solidFill>
-          </a:ln>
-          <a:effectLst/>
-        </p:spPr>
-        <p:style>
-          <a:lnRef idx="1">
-            <a:schemeClr val="accent1"/>
-          </a:lnRef>
-          <a:fillRef idx="3">
-            <a:schemeClr val="accent1"/>
-          </a:fillRef>
-          <a:effectRef idx="2">
-            <a:schemeClr val="accent1"/>
-          </a:effectRef>
-          <a:fontRef idx="minor">
-            <a:schemeClr val="lt1"/>
-          </a:fontRef>
-        </p:style>
-        <p:txBody>
-          <a:bodyPr rtlCol="0" anchor="ctr"/>
-          <a:lstStyle/>
-          <a:p/>
-        </p:txBody>
-      </p:sp>
-      <p:sp>
-        <p:nvSpPr>
-          <p:cNvPr id="27" name="Rectangle 26"/>
-          <p:cNvSpPr/>
-          <p:nvPr/>
-        </p:nvSpPr>
-        <p:spPr>
-          <a:xfrm>
-            <a:off x="8049767" y="4114800"/>
-            <a:ext cx="3517391" cy="1463040"/>
-          </a:xfrm>
-          <a:prstGeom prst="rect">
-            <a:avLst/>
-          </a:prstGeom>
-          <a:solidFill>
-            <a:srgbClr val="FFFDF7"/>
-          </a:solidFill>
-          <a:ln w="34925">
-            <a:solidFill>
-              <a:srgbClr val="000000"/>
-            </a:solidFill>
-          </a:ln>
-          <a:effectLst/>
-        </p:spPr>
-        <p:style>
-          <a:lnRef idx="1">
-            <a:schemeClr val="accent1"/>
-          </a:lnRef>
-          <a:fillRef idx="3">
-            <a:schemeClr val="accent1"/>
-          </a:fillRef>
-          <a:effectRef idx="2">
-            <a:schemeClr val="accent1"/>
-          </a:effectRef>
-          <a:fontRef idx="minor">
-            <a:schemeClr val="lt1"/>
-          </a:fontRef>
-        </p:style>
-        <p:txBody>
-          <a:bodyPr rtlCol="0" anchor="ctr"/>
-          <a:lstStyle/>
-          <a:p/>
-        </p:txBody>
-      </p:sp>
-      <p:sp>
-        <p:nvSpPr>
-          <p:cNvPr id="28" name="TextBox 27"/>
-          <p:cNvSpPr txBox="1"/>
-          <p:nvPr/>
-        </p:nvSpPr>
-        <p:spPr>
-          <a:xfrm>
-            <a:off x="8305799" y="4279392"/>
-            <a:ext cx="3005327" cy="320040"/>
-          </a:xfrm>
-          <a:prstGeom prst="rect">
-            <a:avLst/>
-          </a:prstGeom>
-          <a:noFill/>
-        </p:spPr>
-        <p:txBody>
-          <a:bodyPr wrap="square" lIns="0" rIns="0" tIns="0" bIns="0" anchor="t">
-            <a:spAutoFit/>
-          </a:bodyPr>
-          <a:lstStyle/>
-          <a:p>
-            <a:pPr algn="l"/>
-            <a:r>
-              <a:rPr sz="1400" b="1">
-                <a:solidFill>
-                  <a:srgbClr val="000000"/>
-                </a:solidFill>
-                <a:latin typeface="Arial"/>
-              </a:rPr>
-              <a:t>HOW IT WAS READ</a:t>
-            </a:r>
-          </a:p>
-        </p:txBody>
-      </p:sp>
-      <p:sp>
-        <p:nvSpPr>
-          <p:cNvPr id="29" name="TextBox 28"/>
-          <p:cNvSpPr txBox="1"/>
-          <p:nvPr/>
-        </p:nvSpPr>
-        <p:spPr>
-          <a:xfrm>
-            <a:off x="8305799" y="4663440"/>
-            <a:ext cx="3005327" cy="822960"/>
-          </a:xfrm>
-          <a:prstGeom prst="rect">
-            <a:avLst/>
-          </a:prstGeom>
-          <a:noFill/>
-        </p:spPr>
-        <p:txBody>
-          <a:bodyPr wrap="square" lIns="0" rIns="0" tIns="0" bIns="0" anchor="t">
-            <a:spAutoFit/>
-          </a:bodyPr>
-          <a:lstStyle/>
-          <a:p>
-            <a:pPr algn="l">
-              <a:lnSpc>
-                <a:spcPct val="125000"/>
-              </a:lnSpc>
-            </a:pPr>
-            <a:r>
-              <a:rPr sz="1250">
-                <a:solidFill>
-                  <a:srgbClr val="000000"/>
-                </a:solidFill>
-                <a:latin typeface="Calibri"/>
-              </a:rPr>
-              <a:t>Resolution, extraction settings, and the spatial intention.</a:t>
-            </a:r>
-          </a:p>
-        </p:txBody>
-      </p:sp>
-    </p:spTree>
-  </p:cSld>
-  <p:clrMapOvr>
-    <a:masterClrMapping/>
-  </p:clrMapOvr>
-</p:sld>
-</file>
-
-<file path=ppt/slides/slide11.xml><?xml version="1.0" encoding="utf-8"?>
 <p:sld xmlns:a="http://schemas.openxmlformats.org/drawingml/2006/main" xmlns:p="http://schemas.openxmlformats.org/presentationml/2006/main" xmlns:r="http://schemas.openxmlformats.org/officeDocument/2006/relationships">
   <p:cSld>
     <p:bg>
@@ -6037,7 +4879,7 @@
 </p:sld>
 </file>
 
-<file path=ppt/slides/slide12.xml><?xml version="1.0" encoding="utf-8"?>
+<file path=ppt/slides/slide11.xml><?xml version="1.0" encoding="utf-8"?>
 <p:sld xmlns:a="http://schemas.openxmlformats.org/drawingml/2006/main" xmlns:p="http://schemas.openxmlformats.org/presentationml/2006/main" xmlns:r="http://schemas.openxmlformats.org/officeDocument/2006/relationships">
   <p:cSld>
     <p:bg>
@@ -6164,7 +5006,7 @@
                 </a:solidFill>
                 <a:latin typeface="Calibri"/>
               </a:rPr>
-              <a:t>After the review: two primitives, three Booleans, one surface.</a:t>
+              <a:t>Rest of the class: two primitives, three Booleans, one surface.</a:t>
             </a:r>
           </a:p>
         </p:txBody>
@@ -7530,7 +6372,7 @@
 </p:sld>
 </file>
 
-<file path=ppt/slides/slide13.xml><?xml version="1.0" encoding="utf-8"?>
+<file path=ppt/slides/slide12.xml><?xml version="1.0" encoding="utf-8"?>
 <p:sld xmlns:a="http://schemas.openxmlformats.org/drawingml/2006/main" xmlns:p="http://schemas.openxmlformats.org/presentationml/2006/main" xmlns:r="http://schemas.openxmlformats.org/officeDocument/2006/relationships">
   <p:cSld>
     <p:bg>
@@ -7995,6 +6837,256 @@
                 </a:solidFill>
                 <a:latin typeface="Arial"/>
               </a:rPr>
+              <a:t>P3d</a:t>
+            </a:r>
+          </a:p>
+        </p:txBody>
+      </p:sp>
+      <p:sp>
+        <p:nvSpPr>
+          <p:cNvPr id="13" name="Rectangle 12"/>
+          <p:cNvSpPr/>
+          <p:nvPr/>
+        </p:nvSpPr>
+        <p:spPr>
+          <a:xfrm>
+            <a:off x="2446020" y="2912364"/>
+            <a:ext cx="9189720" cy="804672"/>
+          </a:xfrm>
+          <a:prstGeom prst="rect">
+            <a:avLst/>
+          </a:prstGeom>
+          <a:solidFill>
+            <a:srgbClr val="000000"/>
+          </a:solidFill>
+          <a:ln w="6350">
+            <a:solidFill>
+              <a:srgbClr val="000000"/>
+            </a:solidFill>
+          </a:ln>
+          <a:effectLst/>
+        </p:spPr>
+        <p:style>
+          <a:lnRef idx="1">
+            <a:schemeClr val="accent1"/>
+          </a:lnRef>
+          <a:fillRef idx="3">
+            <a:schemeClr val="accent1"/>
+          </a:fillRef>
+          <a:effectRef idx="2">
+            <a:schemeClr val="accent1"/>
+          </a:effectRef>
+          <a:fontRef idx="minor">
+            <a:schemeClr val="lt1"/>
+          </a:fontRef>
+        </p:style>
+        <p:txBody>
+          <a:bodyPr rtlCol="0" anchor="ctr"/>
+          <a:lstStyle/>
+          <a:p/>
+        </p:txBody>
+      </p:sp>
+      <p:sp>
+        <p:nvSpPr>
+          <p:cNvPr id="14" name="Rectangle 13"/>
+          <p:cNvSpPr/>
+          <p:nvPr/>
+        </p:nvSpPr>
+        <p:spPr>
+          <a:xfrm>
+            <a:off x="2377440" y="2843784"/>
+            <a:ext cx="9189720" cy="804672"/>
+          </a:xfrm>
+          <a:prstGeom prst="rect">
+            <a:avLst/>
+          </a:prstGeom>
+          <a:solidFill>
+            <a:srgbClr val="FFFDF7"/>
+          </a:solidFill>
+          <a:ln w="34925">
+            <a:solidFill>
+              <a:srgbClr val="000000"/>
+            </a:solidFill>
+          </a:ln>
+          <a:effectLst/>
+        </p:spPr>
+        <p:style>
+          <a:lnRef idx="1">
+            <a:schemeClr val="accent1"/>
+          </a:lnRef>
+          <a:fillRef idx="3">
+            <a:schemeClr val="accent1"/>
+          </a:fillRef>
+          <a:effectRef idx="2">
+            <a:schemeClr val="accent1"/>
+          </a:effectRef>
+          <a:fontRef idx="minor">
+            <a:schemeClr val="lt1"/>
+          </a:fontRef>
+        </p:style>
+        <p:txBody>
+          <a:bodyPr rtlCol="0" anchor="ctr"/>
+          <a:lstStyle/>
+          <a:p/>
+        </p:txBody>
+      </p:sp>
+      <p:sp>
+        <p:nvSpPr>
+          <p:cNvPr id="15" name="TextBox 14"/>
+          <p:cNvSpPr txBox="1"/>
+          <p:nvPr/>
+        </p:nvSpPr>
+        <p:spPr>
+          <a:xfrm>
+            <a:off x="2651760" y="2962656"/>
+            <a:ext cx="8641080" cy="566928"/>
+          </a:xfrm>
+          <a:prstGeom prst="rect">
+            <a:avLst/>
+          </a:prstGeom>
+          <a:noFill/>
+        </p:spPr>
+        <p:txBody>
+          <a:bodyPr wrap="square" lIns="0" rIns="0" tIns="0" bIns="0" anchor="t">
+            <a:spAutoFit/>
+          </a:bodyPr>
+          <a:lstStyle/>
+          <a:p>
+            <a:pPr algn="l">
+              <a:lnSpc>
+                <a:spcPct val="120000"/>
+              </a:lnSpc>
+            </a:pPr>
+            <a:r>
+              <a:rPr sz="1350">
+                <a:solidFill>
+                  <a:srgbClr val="000000"/>
+                </a:solidFill>
+                <a:latin typeface="Calibri"/>
+              </a:rPr>
+              <a:t>Due next class, Week 11 — Nov 3: one sheet with each layer small, with its legend, beside the combined view, and the working file.</a:t>
+            </a:r>
+          </a:p>
+        </p:txBody>
+      </p:sp>
+      <p:sp>
+        <p:nvSpPr>
+          <p:cNvPr id="16" name="Rectangle 15"/>
+          <p:cNvSpPr/>
+          <p:nvPr/>
+        </p:nvSpPr>
+        <p:spPr>
+          <a:xfrm>
+            <a:off x="662940" y="3973068"/>
+            <a:ext cx="1508760" cy="804672"/>
+          </a:xfrm>
+          <a:prstGeom prst="rect">
+            <a:avLst/>
+          </a:prstGeom>
+          <a:solidFill>
+            <a:srgbClr val="000000"/>
+          </a:solidFill>
+          <a:ln w="6350">
+            <a:solidFill>
+              <a:srgbClr val="000000"/>
+            </a:solidFill>
+          </a:ln>
+          <a:effectLst/>
+        </p:spPr>
+        <p:style>
+          <a:lnRef idx="1">
+            <a:schemeClr val="accent1"/>
+          </a:lnRef>
+          <a:fillRef idx="3">
+            <a:schemeClr val="accent1"/>
+          </a:fillRef>
+          <a:effectRef idx="2">
+            <a:schemeClr val="accent1"/>
+          </a:effectRef>
+          <a:fontRef idx="minor">
+            <a:schemeClr val="lt1"/>
+          </a:fontRef>
+        </p:style>
+        <p:txBody>
+          <a:bodyPr rtlCol="0" anchor="ctr"/>
+          <a:lstStyle/>
+          <a:p/>
+        </p:txBody>
+      </p:sp>
+      <p:sp>
+        <p:nvSpPr>
+          <p:cNvPr id="17" name="Rectangle 16"/>
+          <p:cNvSpPr/>
+          <p:nvPr/>
+        </p:nvSpPr>
+        <p:spPr>
+          <a:xfrm>
+            <a:off x="594360" y="3904487"/>
+            <a:ext cx="1508760" cy="804672"/>
+          </a:xfrm>
+          <a:prstGeom prst="rect">
+            <a:avLst/>
+          </a:prstGeom>
+          <a:solidFill>
+            <a:srgbClr val="FFE500"/>
+          </a:solidFill>
+          <a:ln w="34925">
+            <a:solidFill>
+              <a:srgbClr val="000000"/>
+            </a:solidFill>
+          </a:ln>
+          <a:effectLst/>
+        </p:spPr>
+        <p:style>
+          <a:lnRef idx="1">
+            <a:schemeClr val="accent1"/>
+          </a:lnRef>
+          <a:fillRef idx="3">
+            <a:schemeClr val="accent1"/>
+          </a:fillRef>
+          <a:effectRef idx="2">
+            <a:schemeClr val="accent1"/>
+          </a:effectRef>
+          <a:fontRef idx="minor">
+            <a:schemeClr val="lt1"/>
+          </a:fontRef>
+        </p:style>
+        <p:txBody>
+          <a:bodyPr rtlCol="0" anchor="ctr"/>
+          <a:lstStyle/>
+          <a:p/>
+        </p:txBody>
+      </p:sp>
+      <p:sp>
+        <p:nvSpPr>
+          <p:cNvPr id="18" name="TextBox 17"/>
+          <p:cNvSpPr txBox="1"/>
+          <p:nvPr/>
+        </p:nvSpPr>
+        <p:spPr>
+          <a:xfrm>
+            <a:off x="594360" y="4206240"/>
+            <a:ext cx="1508760" cy="274320"/>
+          </a:xfrm>
+          <a:prstGeom prst="rect">
+            <a:avLst/>
+          </a:prstGeom>
+          <a:noFill/>
+        </p:spPr>
+        <p:txBody>
+          <a:bodyPr wrap="square" lIns="0" rIns="0" tIns="0" bIns="0" anchor="t">
+            <a:spAutoFit/>
+          </a:bodyPr>
+          <a:lstStyle/>
+          <a:p>
+            <a:pPr algn="ctr"/>
+            <a:r>
+              <a:rPr sz="1400" b="1">
+                <a:solidFill>
+                  <a:srgbClr val="000000"/>
+                </a:solidFill>
+                <a:latin typeface="Arial"/>
+              </a:rPr>
               <a:t>P4a</a:t>
             </a:r>
           </a:p>
@@ -8002,13 +7094,13 @@
       </p:sp>
       <p:sp>
         <p:nvSpPr>
-          <p:cNvPr id="13" name="Rectangle 12"/>
-          <p:cNvSpPr/>
-          <p:nvPr/>
-        </p:nvSpPr>
-        <p:spPr>
-          <a:xfrm>
-            <a:off x="2446020" y="2912364"/>
+          <p:cNvPr id="19" name="Rectangle 18"/>
+          <p:cNvSpPr/>
+          <p:nvPr/>
+        </p:nvSpPr>
+        <p:spPr>
+          <a:xfrm>
+            <a:off x="2446020" y="3973068"/>
             <a:ext cx="9189720" cy="804672"/>
           </a:xfrm>
           <a:prstGeom prst="rect">
@@ -8046,13 +7138,13 @@
       </p:sp>
       <p:sp>
         <p:nvSpPr>
-          <p:cNvPr id="14" name="Rectangle 13"/>
-          <p:cNvSpPr/>
-          <p:nvPr/>
-        </p:nvSpPr>
-        <p:spPr>
-          <a:xfrm>
-            <a:off x="2377440" y="2843784"/>
+          <p:cNvPr id="20" name="Rectangle 19"/>
+          <p:cNvSpPr/>
+          <p:nvPr/>
+        </p:nvSpPr>
+        <p:spPr>
+          <a:xfrm>
+            <a:off x="2377440" y="3904487"/>
             <a:ext cx="9189720" cy="804672"/>
           </a:xfrm>
           <a:prstGeom prst="rect">
@@ -8090,13 +7182,13 @@
       </p:sp>
       <p:sp>
         <p:nvSpPr>
-          <p:cNvPr id="15" name="TextBox 14"/>
+          <p:cNvPr id="21" name="TextBox 20"/>
           <p:cNvSpPr txBox="1"/>
           <p:nvPr/>
         </p:nvSpPr>
         <p:spPr>
           <a:xfrm>
-            <a:off x="2651760" y="2962656"/>
+            <a:off x="2651760" y="4023359"/>
             <a:ext cx="8641080" cy="566928"/>
           </a:xfrm>
           <a:prstGeom prst="rect">
@@ -8129,13 +7221,13 @@
       </p:sp>
       <p:sp>
         <p:nvSpPr>
-          <p:cNvPr id="16" name="Rectangle 15"/>
-          <p:cNvSpPr/>
-          <p:nvPr/>
-        </p:nvSpPr>
-        <p:spPr>
-          <a:xfrm>
-            <a:off x="662940" y="3973068"/>
+          <p:cNvPr id="22" name="Rectangle 21"/>
+          <p:cNvSpPr/>
+          <p:nvPr/>
+        </p:nvSpPr>
+        <p:spPr>
+          <a:xfrm>
+            <a:off x="662940" y="5033772"/>
             <a:ext cx="1508760" cy="804672"/>
           </a:xfrm>
           <a:prstGeom prst="rect">
@@ -8173,20 +7265,20 @@
       </p:sp>
       <p:sp>
         <p:nvSpPr>
-          <p:cNvPr id="17" name="Rectangle 16"/>
-          <p:cNvSpPr/>
-          <p:nvPr/>
-        </p:nvSpPr>
-        <p:spPr>
-          <a:xfrm>
-            <a:off x="594360" y="3904487"/>
+          <p:cNvPr id="23" name="Rectangle 22"/>
+          <p:cNvSpPr/>
+          <p:nvPr/>
+        </p:nvSpPr>
+        <p:spPr>
+          <a:xfrm>
+            <a:off x="594360" y="4965192"/>
             <a:ext cx="1508760" cy="804672"/>
           </a:xfrm>
           <a:prstGeom prst="rect">
             <a:avLst/>
           </a:prstGeom>
           <a:solidFill>
-            <a:srgbClr val="FFE500"/>
+            <a:srgbClr val="FF4D8D"/>
           </a:solidFill>
           <a:ln w="34925">
             <a:solidFill>
@@ -8217,13 +7309,13 @@
       </p:sp>
       <p:sp>
         <p:nvSpPr>
-          <p:cNvPr id="18" name="TextBox 17"/>
+          <p:cNvPr id="24" name="TextBox 23"/>
           <p:cNvSpPr txBox="1"/>
           <p:nvPr/>
         </p:nvSpPr>
         <p:spPr>
           <a:xfrm>
-            <a:off x="594360" y="4206240"/>
+            <a:off x="594360" y="5266944"/>
             <a:ext cx="1508760" cy="274320"/>
           </a:xfrm>
           <a:prstGeom prst="rect">
@@ -8252,13 +7344,13 @@
       </p:sp>
       <p:sp>
         <p:nvSpPr>
-          <p:cNvPr id="19" name="Rectangle 18"/>
-          <p:cNvSpPr/>
-          <p:nvPr/>
-        </p:nvSpPr>
-        <p:spPr>
-          <a:xfrm>
-            <a:off x="2446020" y="3973068"/>
+          <p:cNvPr id="25" name="Rectangle 24"/>
+          <p:cNvSpPr/>
+          <p:nvPr/>
+        </p:nvSpPr>
+        <p:spPr>
+          <a:xfrm>
+            <a:off x="2446020" y="5033772"/>
             <a:ext cx="9189720" cy="804672"/>
           </a:xfrm>
           <a:prstGeom prst="rect">
@@ -8296,13 +7388,13 @@
       </p:sp>
       <p:sp>
         <p:nvSpPr>
-          <p:cNvPr id="20" name="Rectangle 19"/>
-          <p:cNvSpPr/>
-          <p:nvPr/>
-        </p:nvSpPr>
-        <p:spPr>
-          <a:xfrm>
-            <a:off x="2377440" y="3904487"/>
+          <p:cNvPr id="26" name="Rectangle 25"/>
+          <p:cNvSpPr/>
+          <p:nvPr/>
+        </p:nvSpPr>
+        <p:spPr>
+          <a:xfrm>
+            <a:off x="2377440" y="4965192"/>
             <a:ext cx="9189720" cy="804672"/>
           </a:xfrm>
           <a:prstGeom prst="rect">
@@ -8340,13 +7432,13 @@
       </p:sp>
       <p:sp>
         <p:nvSpPr>
-          <p:cNvPr id="21" name="TextBox 20"/>
+          <p:cNvPr id="27" name="TextBox 26"/>
           <p:cNvSpPr txBox="1"/>
           <p:nvPr/>
         </p:nvSpPr>
         <p:spPr>
           <a:xfrm>
-            <a:off x="2651760" y="4023359"/>
+            <a:off x="2651760" y="5084064"/>
             <a:ext cx="8641080" cy="566928"/>
           </a:xfrm>
           <a:prstGeom prst="rect">
@@ -8372,257 +7464,7 @@
                 </a:solidFill>
                 <a:latin typeface="Calibri"/>
               </a:rPr>
-              <a:t>P4a is due Week 12 — Nov 10 (14%): two sheets, the editable graph and the source fields.</a:t>
-            </a:r>
-          </a:p>
-        </p:txBody>
-      </p:sp>
-      <p:sp>
-        <p:nvSpPr>
-          <p:cNvPr id="22" name="Rectangle 21"/>
-          <p:cNvSpPr/>
-          <p:nvPr/>
-        </p:nvSpPr>
-        <p:spPr>
-          <a:xfrm>
-            <a:off x="662940" y="5033772"/>
-            <a:ext cx="1508760" cy="804672"/>
-          </a:xfrm>
-          <a:prstGeom prst="rect">
-            <a:avLst/>
-          </a:prstGeom>
-          <a:solidFill>
-            <a:srgbClr val="000000"/>
-          </a:solidFill>
-          <a:ln w="6350">
-            <a:solidFill>
-              <a:srgbClr val="000000"/>
-            </a:solidFill>
-          </a:ln>
-          <a:effectLst/>
-        </p:spPr>
-        <p:style>
-          <a:lnRef idx="1">
-            <a:schemeClr val="accent1"/>
-          </a:lnRef>
-          <a:fillRef idx="3">
-            <a:schemeClr val="accent1"/>
-          </a:fillRef>
-          <a:effectRef idx="2">
-            <a:schemeClr val="accent1"/>
-          </a:effectRef>
-          <a:fontRef idx="minor">
-            <a:schemeClr val="lt1"/>
-          </a:fontRef>
-        </p:style>
-        <p:txBody>
-          <a:bodyPr rtlCol="0" anchor="ctr"/>
-          <a:lstStyle/>
-          <a:p/>
-        </p:txBody>
-      </p:sp>
-      <p:sp>
-        <p:nvSpPr>
-          <p:cNvPr id="23" name="Rectangle 22"/>
-          <p:cNvSpPr/>
-          <p:nvPr/>
-        </p:nvSpPr>
-        <p:spPr>
-          <a:xfrm>
-            <a:off x="594360" y="4965192"/>
-            <a:ext cx="1508760" cy="804672"/>
-          </a:xfrm>
-          <a:prstGeom prst="rect">
-            <a:avLst/>
-          </a:prstGeom>
-          <a:solidFill>
-            <a:srgbClr val="FF4D8D"/>
-          </a:solidFill>
-          <a:ln w="34925">
-            <a:solidFill>
-              <a:srgbClr val="000000"/>
-            </a:solidFill>
-          </a:ln>
-          <a:effectLst/>
-        </p:spPr>
-        <p:style>
-          <a:lnRef idx="1">
-            <a:schemeClr val="accent1"/>
-          </a:lnRef>
-          <a:fillRef idx="3">
-            <a:schemeClr val="accent1"/>
-          </a:fillRef>
-          <a:effectRef idx="2">
-            <a:schemeClr val="accent1"/>
-          </a:effectRef>
-          <a:fontRef idx="minor">
-            <a:schemeClr val="lt1"/>
-          </a:fontRef>
-        </p:style>
-        <p:txBody>
-          <a:bodyPr rtlCol="0" anchor="ctr"/>
-          <a:lstStyle/>
-          <a:p/>
-        </p:txBody>
-      </p:sp>
-      <p:sp>
-        <p:nvSpPr>
-          <p:cNvPr id="24" name="TextBox 23"/>
-          <p:cNvSpPr txBox="1"/>
-          <p:nvPr/>
-        </p:nvSpPr>
-        <p:spPr>
-          <a:xfrm>
-            <a:off x="594360" y="5266944"/>
-            <a:ext cx="1508760" cy="274320"/>
-          </a:xfrm>
-          <a:prstGeom prst="rect">
-            <a:avLst/>
-          </a:prstGeom>
-          <a:noFill/>
-        </p:spPr>
-        <p:txBody>
-          <a:bodyPr wrap="square" lIns="0" rIns="0" tIns="0" bIns="0" anchor="t">
-            <a:spAutoFit/>
-          </a:bodyPr>
-          <a:lstStyle/>
-          <a:p>
-            <a:pPr algn="ctr"/>
-            <a:r>
-              <a:rPr sz="1400" b="1">
-                <a:solidFill>
-                  <a:srgbClr val="000000"/>
-                </a:solidFill>
-                <a:latin typeface="Arial"/>
-              </a:rPr>
-              <a:t>NOTE</a:t>
-            </a:r>
-          </a:p>
-        </p:txBody>
-      </p:sp>
-      <p:sp>
-        <p:nvSpPr>
-          <p:cNvPr id="25" name="Rectangle 24"/>
-          <p:cNvSpPr/>
-          <p:nvPr/>
-        </p:nvSpPr>
-        <p:spPr>
-          <a:xfrm>
-            <a:off x="2446020" y="5033772"/>
-            <a:ext cx="9189720" cy="804672"/>
-          </a:xfrm>
-          <a:prstGeom prst="rect">
-            <a:avLst/>
-          </a:prstGeom>
-          <a:solidFill>
-            <a:srgbClr val="000000"/>
-          </a:solidFill>
-          <a:ln w="6350">
-            <a:solidFill>
-              <a:srgbClr val="000000"/>
-            </a:solidFill>
-          </a:ln>
-          <a:effectLst/>
-        </p:spPr>
-        <p:style>
-          <a:lnRef idx="1">
-            <a:schemeClr val="accent1"/>
-          </a:lnRef>
-          <a:fillRef idx="3">
-            <a:schemeClr val="accent1"/>
-          </a:fillRef>
-          <a:effectRef idx="2">
-            <a:schemeClr val="accent1"/>
-          </a:effectRef>
-          <a:fontRef idx="minor">
-            <a:schemeClr val="lt1"/>
-          </a:fontRef>
-        </p:style>
-        <p:txBody>
-          <a:bodyPr rtlCol="0" anchor="ctr"/>
-          <a:lstStyle/>
-          <a:p/>
-        </p:txBody>
-      </p:sp>
-      <p:sp>
-        <p:nvSpPr>
-          <p:cNvPr id="26" name="Rectangle 25"/>
-          <p:cNvSpPr/>
-          <p:nvPr/>
-        </p:nvSpPr>
-        <p:spPr>
-          <a:xfrm>
-            <a:off x="2377440" y="4965192"/>
-            <a:ext cx="9189720" cy="804672"/>
-          </a:xfrm>
-          <a:prstGeom prst="rect">
-            <a:avLst/>
-          </a:prstGeom>
-          <a:solidFill>
-            <a:srgbClr val="FFFDF7"/>
-          </a:solidFill>
-          <a:ln w="34925">
-            <a:solidFill>
-              <a:srgbClr val="000000"/>
-            </a:solidFill>
-          </a:ln>
-          <a:effectLst/>
-        </p:spPr>
-        <p:style>
-          <a:lnRef idx="1">
-            <a:schemeClr val="accent1"/>
-          </a:lnRef>
-          <a:fillRef idx="3">
-            <a:schemeClr val="accent1"/>
-          </a:fillRef>
-          <a:effectRef idx="2">
-            <a:schemeClr val="accent1"/>
-          </a:effectRef>
-          <a:fontRef idx="minor">
-            <a:schemeClr val="lt1"/>
-          </a:fontRef>
-        </p:style>
-        <p:txBody>
-          <a:bodyPr rtlCol="0" anchor="ctr"/>
-          <a:lstStyle/>
-          <a:p/>
-        </p:txBody>
-      </p:sp>
-      <p:sp>
-        <p:nvSpPr>
-          <p:cNvPr id="27" name="TextBox 26"/>
-          <p:cNvSpPr txBox="1"/>
-          <p:nvPr/>
-        </p:nvSpPr>
-        <p:spPr>
-          <a:xfrm>
-            <a:off x="2651760" y="5084064"/>
-            <a:ext cx="8641080" cy="566928"/>
-          </a:xfrm>
-          <a:prstGeom prst="rect">
-            <a:avLst/>
-          </a:prstGeom>
-          <a:noFill/>
-        </p:spPr>
-        <p:txBody>
-          <a:bodyPr wrap="square" lIns="0" rIns="0" tIns="0" bIns="0" anchor="t">
-            <a:spAutoFit/>
-          </a:bodyPr>
-          <a:lstStyle/>
-          <a:p>
-            <a:pPr algn="l">
-              <a:lnSpc>
-                <a:spcPct val="120000"/>
-              </a:lnSpc>
-            </a:pPr>
-            <a:r>
-              <a:rPr sz="1350">
-                <a:solidFill>
-                  <a:srgbClr val="000000"/>
-                </a:solidFill>
-                <a:latin typeface="Calibri"/>
-              </a:rPr>
-              <a:t>Dates after the midterm are provisional. Check the course site each week.</a:t>
+              <a:t>P4a is due Week 12 — Nov 10 (14%): two sheets, the editable graph and the source fields. Later dates are provisional.</a:t>
             </a:r>
           </a:p>
         </p:txBody>
@@ -8727,7 +7569,7 @@
                 </a:solidFill>
                 <a:latin typeface="Arial"/>
               </a:rPr>
-              <a:t>PART 1 — RUNNING ORDER</a:t>
+              <a:t>DUE TODAY — THE MID-SEMESTER DEADLINE</a:t>
             </a:r>
           </a:p>
         </p:txBody>
@@ -8762,7 +7604,7 @@
                 </a:solidFill>
                 <a:latin typeface="Calibri"/>
               </a:rPr>
-              <a:t>Due today: GSM · MID · P2b · P3c · P3d. Everything is on the wall before the first presentation.</a:t>
+              <a:t>Everything through Arrays must be in today. This is a regular class after that.</a:t>
             </a:r>
           </a:p>
         </p:txBody>
@@ -8775,8 +7617,8 @@
         </p:nvSpPr>
         <p:spPr>
           <a:xfrm>
-            <a:off x="662940" y="1897380"/>
-            <a:ext cx="640080" cy="530352"/>
+            <a:off x="662940" y="1851660"/>
+            <a:ext cx="1005840" cy="868680"/>
           </a:xfrm>
           <a:prstGeom prst="rect">
             <a:avLst/>
@@ -8819,8 +7661,8 @@
         </p:nvSpPr>
         <p:spPr>
           <a:xfrm>
-            <a:off x="594360" y="1828800"/>
-            <a:ext cx="640080" cy="530352"/>
+            <a:off x="594360" y="1783080"/>
+            <a:ext cx="1005840" cy="868680"/>
           </a:xfrm>
           <a:prstGeom prst="rect">
             <a:avLst/>
@@ -8863,8 +7705,8 @@
         </p:nvSpPr>
         <p:spPr>
           <a:xfrm>
-            <a:off x="594360" y="1993392"/>
-            <a:ext cx="640080" cy="274320"/>
+            <a:off x="594360" y="2116836"/>
+            <a:ext cx="1005840" cy="274320"/>
           </a:xfrm>
           <a:prstGeom prst="rect">
             <a:avLst/>
@@ -8878,6 +7720,129 @@
           <a:lstStyle/>
           <a:p>
             <a:pPr algn="ctr"/>
+            <a:r>
+              <a:rPr sz="1600" b="1">
+                <a:solidFill>
+                  <a:srgbClr val="000000"/>
+                </a:solidFill>
+                <a:latin typeface="Arial"/>
+              </a:rPr>
+              <a:t>GSM</a:t>
+            </a:r>
+          </a:p>
+        </p:txBody>
+      </p:sp>
+      <p:sp>
+        <p:nvSpPr>
+          <p:cNvPr id="8" name="Rectangle 7"/>
+          <p:cNvSpPr/>
+          <p:nvPr/>
+        </p:nvSpPr>
+        <p:spPr>
+          <a:xfrm>
+            <a:off x="1897380" y="1851660"/>
+            <a:ext cx="9738360" cy="868680"/>
+          </a:xfrm>
+          <a:prstGeom prst="rect">
+            <a:avLst/>
+          </a:prstGeom>
+          <a:solidFill>
+            <a:srgbClr val="000000"/>
+          </a:solidFill>
+          <a:ln w="6350">
+            <a:solidFill>
+              <a:srgbClr val="000000"/>
+            </a:solidFill>
+          </a:ln>
+          <a:effectLst/>
+        </p:spPr>
+        <p:style>
+          <a:lnRef idx="1">
+            <a:schemeClr val="accent1"/>
+          </a:lnRef>
+          <a:fillRef idx="3">
+            <a:schemeClr val="accent1"/>
+          </a:fillRef>
+          <a:effectRef idx="2">
+            <a:schemeClr val="accent1"/>
+          </a:effectRef>
+          <a:fontRef idx="minor">
+            <a:schemeClr val="lt1"/>
+          </a:fontRef>
+        </p:style>
+        <p:txBody>
+          <a:bodyPr rtlCol="0" anchor="ctr"/>
+          <a:lstStyle/>
+          <a:p/>
+        </p:txBody>
+      </p:sp>
+      <p:sp>
+        <p:nvSpPr>
+          <p:cNvPr id="9" name="Rectangle 8"/>
+          <p:cNvSpPr/>
+          <p:nvPr/>
+        </p:nvSpPr>
+        <p:spPr>
+          <a:xfrm>
+            <a:off x="1828800" y="1783080"/>
+            <a:ext cx="9738360" cy="868680"/>
+          </a:xfrm>
+          <a:prstGeom prst="rect">
+            <a:avLst/>
+          </a:prstGeom>
+          <a:solidFill>
+            <a:srgbClr val="FFFDF7"/>
+          </a:solidFill>
+          <a:ln w="34925">
+            <a:solidFill>
+              <a:srgbClr val="000000"/>
+            </a:solidFill>
+          </a:ln>
+          <a:effectLst/>
+        </p:spPr>
+        <p:style>
+          <a:lnRef idx="1">
+            <a:schemeClr val="accent1"/>
+          </a:lnRef>
+          <a:fillRef idx="3">
+            <a:schemeClr val="accent1"/>
+          </a:fillRef>
+          <a:effectRef idx="2">
+            <a:schemeClr val="accent1"/>
+          </a:effectRef>
+          <a:fontRef idx="minor">
+            <a:schemeClr val="lt1"/>
+          </a:fontRef>
+        </p:style>
+        <p:txBody>
+          <a:bodyPr rtlCol="0" anchor="ctr"/>
+          <a:lstStyle/>
+          <a:p/>
+        </p:txBody>
+      </p:sp>
+      <p:sp>
+        <p:nvSpPr>
+          <p:cNvPr id="10" name="TextBox 9"/>
+          <p:cNvSpPr txBox="1"/>
+          <p:nvPr/>
+        </p:nvSpPr>
+        <p:spPr>
+          <a:xfrm>
+            <a:off x="2057400" y="1874519"/>
+            <a:ext cx="5943600" cy="320040"/>
+          </a:xfrm>
+          <a:prstGeom prst="rect">
+            <a:avLst/>
+          </a:prstGeom>
+          <a:noFill/>
+        </p:spPr>
+        <p:txBody>
+          <a:bodyPr wrap="square" lIns="0" rIns="0" tIns="0" bIns="0" anchor="t">
+            <a:spAutoFit/>
+          </a:bodyPr>
+          <a:lstStyle/>
+          <a:p>
+            <a:pPr algn="l"/>
             <a:r>
               <a:rPr sz="1300" b="1">
                 <a:solidFill>
@@ -8885,21 +7850,21 @@
                 </a:solidFill>
                 <a:latin typeface="Arial"/>
               </a:rPr>
-              <a:t>01</a:t>
+              <a:t>GRAPHIC STANDARDS MANUAL</a:t>
             </a:r>
           </a:p>
         </p:txBody>
       </p:sp>
       <p:sp>
         <p:nvSpPr>
-          <p:cNvPr id="8" name="TextBox 7"/>
+          <p:cNvPr id="11" name="TextBox 10"/>
           <p:cNvSpPr txBox="1"/>
           <p:nvPr/>
         </p:nvSpPr>
         <p:spPr>
           <a:xfrm>
-            <a:off x="1463040" y="1828800"/>
-            <a:ext cx="1737360" cy="530352"/>
+            <a:off x="7955279" y="1874519"/>
+            <a:ext cx="3474720" cy="320040"/>
           </a:xfrm>
           <a:prstGeom prst="rect">
             <a:avLst/>
@@ -8907,161 +7872,280 @@
           <a:noFill/>
         </p:spPr>
         <p:txBody>
-          <a:bodyPr wrap="square" lIns="0" rIns="0" tIns="0" bIns="0" anchor="ctr">
+          <a:bodyPr wrap="square" lIns="0" rIns="0" tIns="0" bIns="0" anchor="t">
+            <a:spAutoFit/>
+          </a:bodyPr>
+          <a:lstStyle/>
+          <a:p>
+            <a:pPr algn="r"/>
+            <a:r>
+              <a:rPr sz="1050" b="1">
+                <a:solidFill>
+                  <a:srgbClr val="6B6B6B"/>
+                </a:solidFill>
+                <a:latin typeface="Arial"/>
+              </a:rPr>
+              <a:t>DUE WEEK 10 — Oct 27   /   7%</a:t>
+            </a:r>
+          </a:p>
+        </p:txBody>
+      </p:sp>
+      <p:sp>
+        <p:nvSpPr>
+          <p:cNvPr id="12" name="TextBox 11"/>
+          <p:cNvSpPr txBox="1"/>
+          <p:nvPr/>
+        </p:nvSpPr>
+        <p:spPr>
+          <a:xfrm>
+            <a:off x="2057400" y="2221991"/>
+            <a:ext cx="9235440" cy="365760"/>
+          </a:xfrm>
+          <a:prstGeom prst="rect">
+            <a:avLst/>
+          </a:prstGeom>
+          <a:noFill/>
+        </p:spPr>
+        <p:txBody>
+          <a:bodyPr wrap="square" lIns="0" rIns="0" tIns="0" bIns="0" anchor="t">
             <a:spAutoFit/>
           </a:bodyPr>
           <a:lstStyle/>
           <a:p>
             <a:pPr algn="l"/>
             <a:r>
-              <a:rPr sz="1300" b="1">
+              <a:rPr sz="1250">
                 <a:solidFill>
-                  <a:srgbClr val="FFFDF7"/>
+                  <a:srgbClr val="000000"/>
+                </a:solidFill>
+                <a:latin typeface="Calibri"/>
+              </a:rPr>
+              <a:t>Four pages, each rule beside a tested application. Revised again for the booklet.</a:t>
+            </a:r>
+          </a:p>
+        </p:txBody>
+      </p:sp>
+      <p:sp>
+        <p:nvSpPr>
+          <p:cNvPr id="13" name="Rectangle 12"/>
+          <p:cNvSpPr/>
+          <p:nvPr/>
+        </p:nvSpPr>
+        <p:spPr>
+          <a:xfrm>
+            <a:off x="662940" y="2857500"/>
+            <a:ext cx="1005840" cy="868680"/>
+          </a:xfrm>
+          <a:prstGeom prst="rect">
+            <a:avLst/>
+          </a:prstGeom>
+          <a:solidFill>
+            <a:srgbClr val="000000"/>
+          </a:solidFill>
+          <a:ln w="6350">
+            <a:solidFill>
+              <a:srgbClr val="000000"/>
+            </a:solidFill>
+          </a:ln>
+          <a:effectLst/>
+        </p:spPr>
+        <p:style>
+          <a:lnRef idx="1">
+            <a:schemeClr val="accent1"/>
+          </a:lnRef>
+          <a:fillRef idx="3">
+            <a:schemeClr val="accent1"/>
+          </a:fillRef>
+          <a:effectRef idx="2">
+            <a:schemeClr val="accent1"/>
+          </a:effectRef>
+          <a:fontRef idx="minor">
+            <a:schemeClr val="lt1"/>
+          </a:fontRef>
+        </p:style>
+        <p:txBody>
+          <a:bodyPr rtlCol="0" anchor="ctr"/>
+          <a:lstStyle/>
+          <a:p/>
+        </p:txBody>
+      </p:sp>
+      <p:sp>
+        <p:nvSpPr>
+          <p:cNvPr id="14" name="Rectangle 13"/>
+          <p:cNvSpPr/>
+          <p:nvPr/>
+        </p:nvSpPr>
+        <p:spPr>
+          <a:xfrm>
+            <a:off x="594360" y="2788920"/>
+            <a:ext cx="1005840" cy="868680"/>
+          </a:xfrm>
+          <a:prstGeom prst="rect">
+            <a:avLst/>
+          </a:prstGeom>
+          <a:solidFill>
+            <a:srgbClr val="C6F035"/>
+          </a:solidFill>
+          <a:ln w="34925">
+            <a:solidFill>
+              <a:srgbClr val="000000"/>
+            </a:solidFill>
+          </a:ln>
+          <a:effectLst/>
+        </p:spPr>
+        <p:style>
+          <a:lnRef idx="1">
+            <a:schemeClr val="accent1"/>
+          </a:lnRef>
+          <a:fillRef idx="3">
+            <a:schemeClr val="accent1"/>
+          </a:fillRef>
+          <a:effectRef idx="2">
+            <a:schemeClr val="accent1"/>
+          </a:effectRef>
+          <a:fontRef idx="minor">
+            <a:schemeClr val="lt1"/>
+          </a:fontRef>
+        </p:style>
+        <p:txBody>
+          <a:bodyPr rtlCol="0" anchor="ctr"/>
+          <a:lstStyle/>
+          <a:p/>
+        </p:txBody>
+      </p:sp>
+      <p:sp>
+        <p:nvSpPr>
+          <p:cNvPr id="15" name="TextBox 14"/>
+          <p:cNvSpPr txBox="1"/>
+          <p:nvPr/>
+        </p:nvSpPr>
+        <p:spPr>
+          <a:xfrm>
+            <a:off x="594360" y="3122676"/>
+            <a:ext cx="1005840" cy="274320"/>
+          </a:xfrm>
+          <a:prstGeom prst="rect">
+            <a:avLst/>
+          </a:prstGeom>
+          <a:noFill/>
+        </p:spPr>
+        <p:txBody>
+          <a:bodyPr wrap="square" lIns="0" rIns="0" tIns="0" bIns="0" anchor="t">
+            <a:spAutoFit/>
+          </a:bodyPr>
+          <a:lstStyle/>
+          <a:p>
+            <a:pPr algn="ctr"/>
+            <a:r>
+              <a:rPr sz="1600" b="1">
+                <a:solidFill>
+                  <a:srgbClr val="000000"/>
                 </a:solidFill>
                 <a:latin typeface="Arial"/>
               </a:rPr>
-              <a:t>PIN UP</a:t>
+              <a:t>P2b</a:t>
             </a:r>
           </a:p>
         </p:txBody>
       </p:sp>
       <p:sp>
         <p:nvSpPr>
-          <p:cNvPr id="9" name="TextBox 8"/>
+          <p:cNvPr id="16" name="Rectangle 15"/>
+          <p:cNvSpPr/>
+          <p:nvPr/>
+        </p:nvSpPr>
+        <p:spPr>
+          <a:xfrm>
+            <a:off x="1897380" y="2857500"/>
+            <a:ext cx="9738360" cy="868680"/>
+          </a:xfrm>
+          <a:prstGeom prst="rect">
+            <a:avLst/>
+          </a:prstGeom>
+          <a:solidFill>
+            <a:srgbClr val="000000"/>
+          </a:solidFill>
+          <a:ln w="6350">
+            <a:solidFill>
+              <a:srgbClr val="000000"/>
+            </a:solidFill>
+          </a:ln>
+          <a:effectLst/>
+        </p:spPr>
+        <p:style>
+          <a:lnRef idx="1">
+            <a:schemeClr val="accent1"/>
+          </a:lnRef>
+          <a:fillRef idx="3">
+            <a:schemeClr val="accent1"/>
+          </a:fillRef>
+          <a:effectRef idx="2">
+            <a:schemeClr val="accent1"/>
+          </a:effectRef>
+          <a:fontRef idx="minor">
+            <a:schemeClr val="lt1"/>
+          </a:fontRef>
+        </p:style>
+        <p:txBody>
+          <a:bodyPr rtlCol="0" anchor="ctr"/>
+          <a:lstStyle/>
+          <a:p/>
+        </p:txBody>
+      </p:sp>
+      <p:sp>
+        <p:nvSpPr>
+          <p:cNvPr id="17" name="Rectangle 16"/>
+          <p:cNvSpPr/>
+          <p:nvPr/>
+        </p:nvSpPr>
+        <p:spPr>
+          <a:xfrm>
+            <a:off x="1828800" y="2788920"/>
+            <a:ext cx="9738360" cy="868680"/>
+          </a:xfrm>
+          <a:prstGeom prst="rect">
+            <a:avLst/>
+          </a:prstGeom>
+          <a:solidFill>
+            <a:srgbClr val="FFFDF7"/>
+          </a:solidFill>
+          <a:ln w="34925">
+            <a:solidFill>
+              <a:srgbClr val="000000"/>
+            </a:solidFill>
+          </a:ln>
+          <a:effectLst/>
+        </p:spPr>
+        <p:style>
+          <a:lnRef idx="1">
+            <a:schemeClr val="accent1"/>
+          </a:lnRef>
+          <a:fillRef idx="3">
+            <a:schemeClr val="accent1"/>
+          </a:fillRef>
+          <a:effectRef idx="2">
+            <a:schemeClr val="accent1"/>
+          </a:effectRef>
+          <a:fontRef idx="minor">
+            <a:schemeClr val="lt1"/>
+          </a:fontRef>
+        </p:style>
+        <p:txBody>
+          <a:bodyPr rtlCol="0" anchor="ctr"/>
+          <a:lstStyle/>
+          <a:p/>
+        </p:txBody>
+      </p:sp>
+      <p:sp>
+        <p:nvSpPr>
+          <p:cNvPr id="18" name="TextBox 17"/>
           <p:cNvSpPr txBox="1"/>
           <p:nvPr/>
         </p:nvSpPr>
         <p:spPr>
           <a:xfrm>
-            <a:off x="3200400" y="1828800"/>
-            <a:ext cx="3566160" cy="530352"/>
-          </a:xfrm>
-          <a:prstGeom prst="rect">
-            <a:avLst/>
-          </a:prstGeom>
-          <a:noFill/>
-        </p:spPr>
-        <p:txBody>
-          <a:bodyPr wrap="square" lIns="0" rIns="0" tIns="0" bIns="0" anchor="ctr">
-            <a:spAutoFit/>
-          </a:bodyPr>
-          <a:lstStyle/>
-          <a:p>
-            <a:pPr algn="l">
-              <a:lnSpc>
-                <a:spcPct val="115000"/>
-              </a:lnSpc>
-            </a:pPr>
-            <a:r>
-              <a:rPr sz="1250">
-                <a:solidFill>
-                  <a:srgbClr val="FFFDF7"/>
-                </a:solidFill>
-                <a:latin typeface="Calibri"/>
-              </a:rPr>
-              <a:t>Prints, the plotted drawing and the 3D print, in project order.</a:t>
-            </a:r>
-          </a:p>
-        </p:txBody>
-      </p:sp>
-      <p:sp>
-        <p:nvSpPr>
-          <p:cNvPr id="10" name="Rectangle 9"/>
-          <p:cNvSpPr/>
-          <p:nvPr/>
-        </p:nvSpPr>
-        <p:spPr>
-          <a:xfrm>
-            <a:off x="662940" y="2628900"/>
-            <a:ext cx="640080" cy="530352"/>
-          </a:xfrm>
-          <a:prstGeom prst="rect">
-            <a:avLst/>
-          </a:prstGeom>
-          <a:solidFill>
-            <a:srgbClr val="000000"/>
-          </a:solidFill>
-          <a:ln w="6350">
-            <a:solidFill>
-              <a:srgbClr val="000000"/>
-            </a:solidFill>
-          </a:ln>
-          <a:effectLst/>
-        </p:spPr>
-        <p:style>
-          <a:lnRef idx="1">
-            <a:schemeClr val="accent1"/>
-          </a:lnRef>
-          <a:fillRef idx="3">
-            <a:schemeClr val="accent1"/>
-          </a:fillRef>
-          <a:effectRef idx="2">
-            <a:schemeClr val="accent1"/>
-          </a:effectRef>
-          <a:fontRef idx="minor">
-            <a:schemeClr val="lt1"/>
-          </a:fontRef>
-        </p:style>
-        <p:txBody>
-          <a:bodyPr rtlCol="0" anchor="ctr"/>
-          <a:lstStyle/>
-          <a:p/>
-        </p:txBody>
-      </p:sp>
-      <p:sp>
-        <p:nvSpPr>
-          <p:cNvPr id="11" name="Rectangle 10"/>
-          <p:cNvSpPr/>
-          <p:nvPr/>
-        </p:nvSpPr>
-        <p:spPr>
-          <a:xfrm>
-            <a:off x="594360" y="2560320"/>
-            <a:ext cx="640080" cy="530352"/>
-          </a:xfrm>
-          <a:prstGeom prst="rect">
-            <a:avLst/>
-          </a:prstGeom>
-          <a:solidFill>
-            <a:srgbClr val="C6F035"/>
-          </a:solidFill>
-          <a:ln w="34925">
-            <a:solidFill>
-              <a:srgbClr val="000000"/>
-            </a:solidFill>
-          </a:ln>
-          <a:effectLst/>
-        </p:spPr>
-        <p:style>
-          <a:lnRef idx="1">
-            <a:schemeClr val="accent1"/>
-          </a:lnRef>
-          <a:fillRef idx="3">
-            <a:schemeClr val="accent1"/>
-          </a:fillRef>
-          <a:effectRef idx="2">
-            <a:schemeClr val="accent1"/>
-          </a:effectRef>
-          <a:fontRef idx="minor">
-            <a:schemeClr val="lt1"/>
-          </a:fontRef>
-        </p:style>
-        <p:txBody>
-          <a:bodyPr rtlCol="0" anchor="ctr"/>
-          <a:lstStyle/>
-          <a:p/>
-        </p:txBody>
-      </p:sp>
-      <p:sp>
-        <p:nvSpPr>
-          <p:cNvPr id="12" name="TextBox 11"/>
-          <p:cNvSpPr txBox="1"/>
-          <p:nvPr/>
-        </p:nvSpPr>
-        <p:spPr>
-          <a:xfrm>
-            <a:off x="594360" y="2724912"/>
-            <a:ext cx="640080" cy="274320"/>
+            <a:off x="2057400" y="2880360"/>
+            <a:ext cx="5943600" cy="320040"/>
           </a:xfrm>
           <a:prstGeom prst="rect">
             <a:avLst/>
@@ -9074,7 +8158,7 @@
           </a:bodyPr>
           <a:lstStyle/>
           <a:p>
-            <a:pPr algn="ctr"/>
+            <a:pPr algn="l"/>
             <a:r>
               <a:rPr sz="1300" b="1">
                 <a:solidFill>
@@ -9082,21 +8166,21 @@
                 </a:solidFill>
                 <a:latin typeface="Arial"/>
               </a:rPr>
-              <a:t>02</a:t>
+              <a:t>CSG 3D PRINTED OBJECT</a:t>
             </a:r>
           </a:p>
         </p:txBody>
       </p:sp>
       <p:sp>
         <p:nvSpPr>
-          <p:cNvPr id="13" name="TextBox 12"/>
+          <p:cNvPr id="19" name="TextBox 18"/>
           <p:cNvSpPr txBox="1"/>
           <p:nvPr/>
         </p:nvSpPr>
         <p:spPr>
           <a:xfrm>
-            <a:off x="1463040" y="2560320"/>
-            <a:ext cx="1737360" cy="530352"/>
+            <a:off x="7955279" y="2880360"/>
+            <a:ext cx="3474720" cy="320040"/>
           </a:xfrm>
           <a:prstGeom prst="rect">
             <a:avLst/>
@@ -9104,161 +8188,280 @@
           <a:noFill/>
         </p:spPr>
         <p:txBody>
-          <a:bodyPr wrap="square" lIns="0" rIns="0" tIns="0" bIns="0" anchor="ctr">
+          <a:bodyPr wrap="square" lIns="0" rIns="0" tIns="0" bIns="0" anchor="t">
+            <a:spAutoFit/>
+          </a:bodyPr>
+          <a:lstStyle/>
+          <a:p>
+            <a:pPr algn="r"/>
+            <a:r>
+              <a:rPr sz="1050" b="1">
+                <a:solidFill>
+                  <a:srgbClr val="6B6B6B"/>
+                </a:solidFill>
+                <a:latin typeface="Arial"/>
+              </a:rPr>
+              <a:t>DUE WEEK 10 — Oct 27   /   7%</a:t>
+            </a:r>
+          </a:p>
+        </p:txBody>
+      </p:sp>
+      <p:sp>
+        <p:nvSpPr>
+          <p:cNvPr id="20" name="TextBox 19"/>
+          <p:cNvSpPr txBox="1"/>
+          <p:nvPr/>
+        </p:nvSpPr>
+        <p:spPr>
+          <a:xfrm>
+            <a:off x="2057400" y="3227832"/>
+            <a:ext cx="9235440" cy="365760"/>
+          </a:xfrm>
+          <a:prstGeom prst="rect">
+            <a:avLst/>
+          </a:prstGeom>
+          <a:noFill/>
+        </p:spPr>
+        <p:txBody>
+          <a:bodyPr wrap="square" lIns="0" rIns="0" tIns="0" bIns="0" anchor="t">
             <a:spAutoFit/>
           </a:bodyPr>
           <a:lstStyle/>
           <a:p>
             <a:pPr algn="l"/>
             <a:r>
-              <a:rPr sz="1300" b="1">
+              <a:rPr sz="1250">
                 <a:solidFill>
-                  <a:srgbClr val="FFFDF7"/>
+                  <a:srgbClr val="000000"/>
+                </a:solidFill>
+                <a:latin typeface="Calibri"/>
+              </a:rPr>
+              <a:t>The print and its process sheet, handed in, with the source, mesh and slicer files.</a:t>
+            </a:r>
+          </a:p>
+        </p:txBody>
+      </p:sp>
+      <p:sp>
+        <p:nvSpPr>
+          <p:cNvPr id="21" name="Rectangle 20"/>
+          <p:cNvSpPr/>
+          <p:nvPr/>
+        </p:nvSpPr>
+        <p:spPr>
+          <a:xfrm>
+            <a:off x="662940" y="3863340"/>
+            <a:ext cx="1005840" cy="868680"/>
+          </a:xfrm>
+          <a:prstGeom prst="rect">
+            <a:avLst/>
+          </a:prstGeom>
+          <a:solidFill>
+            <a:srgbClr val="000000"/>
+          </a:solidFill>
+          <a:ln w="6350">
+            <a:solidFill>
+              <a:srgbClr val="000000"/>
+            </a:solidFill>
+          </a:ln>
+          <a:effectLst/>
+        </p:spPr>
+        <p:style>
+          <a:lnRef idx="1">
+            <a:schemeClr val="accent1"/>
+          </a:lnRef>
+          <a:fillRef idx="3">
+            <a:schemeClr val="accent1"/>
+          </a:fillRef>
+          <a:effectRef idx="2">
+            <a:schemeClr val="accent1"/>
+          </a:effectRef>
+          <a:fontRef idx="minor">
+            <a:schemeClr val="lt1"/>
+          </a:fontRef>
+        </p:style>
+        <p:txBody>
+          <a:bodyPr rtlCol="0" anchor="ctr"/>
+          <a:lstStyle/>
+          <a:p/>
+        </p:txBody>
+      </p:sp>
+      <p:sp>
+        <p:nvSpPr>
+          <p:cNvPr id="22" name="Rectangle 21"/>
+          <p:cNvSpPr/>
+          <p:nvPr/>
+        </p:nvSpPr>
+        <p:spPr>
+          <a:xfrm>
+            <a:off x="594360" y="3794760"/>
+            <a:ext cx="1005840" cy="868680"/>
+          </a:xfrm>
+          <a:prstGeom prst="rect">
+            <a:avLst/>
+          </a:prstGeom>
+          <a:solidFill>
+            <a:srgbClr val="FFE500"/>
+          </a:solidFill>
+          <a:ln w="34925">
+            <a:solidFill>
+              <a:srgbClr val="000000"/>
+            </a:solidFill>
+          </a:ln>
+          <a:effectLst/>
+        </p:spPr>
+        <p:style>
+          <a:lnRef idx="1">
+            <a:schemeClr val="accent1"/>
+          </a:lnRef>
+          <a:fillRef idx="3">
+            <a:schemeClr val="accent1"/>
+          </a:fillRef>
+          <a:effectRef idx="2">
+            <a:schemeClr val="accent1"/>
+          </a:effectRef>
+          <a:fontRef idx="minor">
+            <a:schemeClr val="lt1"/>
+          </a:fontRef>
+        </p:style>
+        <p:txBody>
+          <a:bodyPr rtlCol="0" anchor="ctr"/>
+          <a:lstStyle/>
+          <a:p/>
+        </p:txBody>
+      </p:sp>
+      <p:sp>
+        <p:nvSpPr>
+          <p:cNvPr id="23" name="TextBox 22"/>
+          <p:cNvSpPr txBox="1"/>
+          <p:nvPr/>
+        </p:nvSpPr>
+        <p:spPr>
+          <a:xfrm>
+            <a:off x="594360" y="4128516"/>
+            <a:ext cx="1005840" cy="274320"/>
+          </a:xfrm>
+          <a:prstGeom prst="rect">
+            <a:avLst/>
+          </a:prstGeom>
+          <a:noFill/>
+        </p:spPr>
+        <p:txBody>
+          <a:bodyPr wrap="square" lIns="0" rIns="0" tIns="0" bIns="0" anchor="t">
+            <a:spAutoFit/>
+          </a:bodyPr>
+          <a:lstStyle/>
+          <a:p>
+            <a:pPr algn="ctr"/>
+            <a:r>
+              <a:rPr sz="1600" b="1">
+                <a:solidFill>
+                  <a:srgbClr val="000000"/>
                 </a:solidFill>
                 <a:latin typeface="Arial"/>
               </a:rPr>
-              <a:t>PROJECT 1</a:t>
+              <a:t>P3c</a:t>
             </a:r>
           </a:p>
         </p:txBody>
       </p:sp>
       <p:sp>
         <p:nvSpPr>
-          <p:cNvPr id="14" name="TextBox 13"/>
+          <p:cNvPr id="24" name="Rectangle 23"/>
+          <p:cNvSpPr/>
+          <p:nvPr/>
+        </p:nvSpPr>
+        <p:spPr>
+          <a:xfrm>
+            <a:off x="1897380" y="3863340"/>
+            <a:ext cx="9738360" cy="868680"/>
+          </a:xfrm>
+          <a:prstGeom prst="rect">
+            <a:avLst/>
+          </a:prstGeom>
+          <a:solidFill>
+            <a:srgbClr val="000000"/>
+          </a:solidFill>
+          <a:ln w="6350">
+            <a:solidFill>
+              <a:srgbClr val="000000"/>
+            </a:solidFill>
+          </a:ln>
+          <a:effectLst/>
+        </p:spPr>
+        <p:style>
+          <a:lnRef idx="1">
+            <a:schemeClr val="accent1"/>
+          </a:lnRef>
+          <a:fillRef idx="3">
+            <a:schemeClr val="accent1"/>
+          </a:fillRef>
+          <a:effectRef idx="2">
+            <a:schemeClr val="accent1"/>
+          </a:effectRef>
+          <a:fontRef idx="minor">
+            <a:schemeClr val="lt1"/>
+          </a:fontRef>
+        </p:style>
+        <p:txBody>
+          <a:bodyPr rtlCol="0" anchor="ctr"/>
+          <a:lstStyle/>
+          <a:p/>
+        </p:txBody>
+      </p:sp>
+      <p:sp>
+        <p:nvSpPr>
+          <p:cNvPr id="25" name="Rectangle 24"/>
+          <p:cNvSpPr/>
+          <p:nvPr/>
+        </p:nvSpPr>
+        <p:spPr>
+          <a:xfrm>
+            <a:off x="1828800" y="3794760"/>
+            <a:ext cx="9738360" cy="868680"/>
+          </a:xfrm>
+          <a:prstGeom prst="rect">
+            <a:avLst/>
+          </a:prstGeom>
+          <a:solidFill>
+            <a:srgbClr val="FFFDF7"/>
+          </a:solidFill>
+          <a:ln w="34925">
+            <a:solidFill>
+              <a:srgbClr val="000000"/>
+            </a:solidFill>
+          </a:ln>
+          <a:effectLst/>
+        </p:spPr>
+        <p:style>
+          <a:lnRef idx="1">
+            <a:schemeClr val="accent1"/>
+          </a:lnRef>
+          <a:fillRef idx="3">
+            <a:schemeClr val="accent1"/>
+          </a:fillRef>
+          <a:effectRef idx="2">
+            <a:schemeClr val="accent1"/>
+          </a:effectRef>
+          <a:fontRef idx="minor">
+            <a:schemeClr val="lt1"/>
+          </a:fontRef>
+        </p:style>
+        <p:txBody>
+          <a:bodyPr rtlCol="0" anchor="ctr"/>
+          <a:lstStyle/>
+          <a:p/>
+        </p:txBody>
+      </p:sp>
+      <p:sp>
+        <p:nvSpPr>
+          <p:cNvPr id="26" name="TextBox 25"/>
           <p:cNvSpPr txBox="1"/>
           <p:nvPr/>
         </p:nvSpPr>
         <p:spPr>
           <a:xfrm>
-            <a:off x="3200400" y="2560320"/>
-            <a:ext cx="3566160" cy="530352"/>
-          </a:xfrm>
-          <a:prstGeom prst="rect">
-            <a:avLst/>
-          </a:prstGeom>
-          <a:noFill/>
-        </p:spPr>
-        <p:txBody>
-          <a:bodyPr wrap="square" lIns="0" rIns="0" tIns="0" bIns="0" anchor="ctr">
-            <a:spAutoFit/>
-          </a:bodyPr>
-          <a:lstStyle/>
-          <a:p>
-            <a:pPr algn="l">
-              <a:lnSpc>
-                <a:spcPct val="115000"/>
-              </a:lnSpc>
-            </a:pPr>
-            <a:r>
-              <a:rPr sz="1250">
-                <a:solidFill>
-                  <a:srgbClr val="FFFDF7"/>
-                </a:solidFill>
-                <a:latin typeface="Calibri"/>
-              </a:rPr>
-              <a:t>The manual, and one rule you can point to on every other sheet.</a:t>
-            </a:r>
-          </a:p>
-        </p:txBody>
-      </p:sp>
-      <p:sp>
-        <p:nvSpPr>
-          <p:cNvPr id="15" name="Rectangle 14"/>
-          <p:cNvSpPr/>
-          <p:nvPr/>
-        </p:nvSpPr>
-        <p:spPr>
-          <a:xfrm>
-            <a:off x="662940" y="3360420"/>
-            <a:ext cx="640080" cy="530352"/>
-          </a:xfrm>
-          <a:prstGeom prst="rect">
-            <a:avLst/>
-          </a:prstGeom>
-          <a:solidFill>
-            <a:srgbClr val="000000"/>
-          </a:solidFill>
-          <a:ln w="6350">
-            <a:solidFill>
-              <a:srgbClr val="000000"/>
-            </a:solidFill>
-          </a:ln>
-          <a:effectLst/>
-        </p:spPr>
-        <p:style>
-          <a:lnRef idx="1">
-            <a:schemeClr val="accent1"/>
-          </a:lnRef>
-          <a:fillRef idx="3">
-            <a:schemeClr val="accent1"/>
-          </a:fillRef>
-          <a:effectRef idx="2">
-            <a:schemeClr val="accent1"/>
-          </a:effectRef>
-          <a:fontRef idx="minor">
-            <a:schemeClr val="lt1"/>
-          </a:fontRef>
-        </p:style>
-        <p:txBody>
-          <a:bodyPr rtlCol="0" anchor="ctr"/>
-          <a:lstStyle/>
-          <a:p/>
-        </p:txBody>
-      </p:sp>
-      <p:sp>
-        <p:nvSpPr>
-          <p:cNvPr id="16" name="Rectangle 15"/>
-          <p:cNvSpPr/>
-          <p:nvPr/>
-        </p:nvSpPr>
-        <p:spPr>
-          <a:xfrm>
-            <a:off x="594360" y="3291839"/>
-            <a:ext cx="640080" cy="530352"/>
-          </a:xfrm>
-          <a:prstGeom prst="rect">
-            <a:avLst/>
-          </a:prstGeom>
-          <a:solidFill>
-            <a:srgbClr val="FFE500"/>
-          </a:solidFill>
-          <a:ln w="34925">
-            <a:solidFill>
-              <a:srgbClr val="000000"/>
-            </a:solidFill>
-          </a:ln>
-          <a:effectLst/>
-        </p:spPr>
-        <p:style>
-          <a:lnRef idx="1">
-            <a:schemeClr val="accent1"/>
-          </a:lnRef>
-          <a:fillRef idx="3">
-            <a:schemeClr val="accent1"/>
-          </a:fillRef>
-          <a:effectRef idx="2">
-            <a:schemeClr val="accent1"/>
-          </a:effectRef>
-          <a:fontRef idx="minor">
-            <a:schemeClr val="lt1"/>
-          </a:fontRef>
-        </p:style>
-        <p:txBody>
-          <a:bodyPr rtlCol="0" anchor="ctr"/>
-          <a:lstStyle/>
-          <a:p/>
-        </p:txBody>
-      </p:sp>
-      <p:sp>
-        <p:nvSpPr>
-          <p:cNvPr id="17" name="TextBox 16"/>
-          <p:cNvSpPr txBox="1"/>
-          <p:nvPr/>
-        </p:nvSpPr>
-        <p:spPr>
-          <a:xfrm>
-            <a:off x="594360" y="3456432"/>
-            <a:ext cx="640080" cy="274320"/>
+            <a:off x="2057400" y="3886200"/>
+            <a:ext cx="5943600" cy="320040"/>
           </a:xfrm>
           <a:prstGeom prst="rect">
             <a:avLst/>
@@ -9271,7 +8474,7 @@
           </a:bodyPr>
           <a:lstStyle/>
           <a:p>
-            <a:pPr algn="ctr"/>
+            <a:pPr algn="l"/>
             <a:r>
               <a:rPr sz="1300" b="1">
                 <a:solidFill>
@@ -9279,21 +8482,214 @@
                 </a:solidFill>
                 <a:latin typeface="Arial"/>
               </a:rPr>
-              <a:t>03</a:t>
+              <a:t>ATTRACTOR: 2D FIELD DRAWING</a:t>
             </a:r>
           </a:p>
         </p:txBody>
       </p:sp>
       <p:sp>
         <p:nvSpPr>
-          <p:cNvPr id="18" name="TextBox 17"/>
+          <p:cNvPr id="27" name="TextBox 26"/>
           <p:cNvSpPr txBox="1"/>
           <p:nvPr/>
         </p:nvSpPr>
         <p:spPr>
           <a:xfrm>
-            <a:off x="1463040" y="3291839"/>
-            <a:ext cx="1737360" cy="530352"/>
+            <a:off x="7955279" y="3886200"/>
+            <a:ext cx="3474720" cy="320040"/>
+          </a:xfrm>
+          <a:prstGeom prst="rect">
+            <a:avLst/>
+          </a:prstGeom>
+          <a:noFill/>
+        </p:spPr>
+        <p:txBody>
+          <a:bodyPr wrap="square" lIns="0" rIns="0" tIns="0" bIns="0" anchor="t">
+            <a:spAutoFit/>
+          </a:bodyPr>
+          <a:lstStyle/>
+          <a:p>
+            <a:pPr algn="r"/>
+            <a:r>
+              <a:rPr sz="1050" b="1">
+                <a:solidFill>
+                  <a:srgbClr val="6B6B6B"/>
+                </a:solidFill>
+                <a:latin typeface="Arial"/>
+              </a:rPr>
+              <a:t>DUE WEEK 10 — Oct 27   /   7%</a:t>
+            </a:r>
+          </a:p>
+        </p:txBody>
+      </p:sp>
+      <p:sp>
+        <p:nvSpPr>
+          <p:cNvPr id="28" name="TextBox 27"/>
+          <p:cNvSpPr txBox="1"/>
+          <p:nvPr/>
+        </p:nvSpPr>
+        <p:spPr>
+          <a:xfrm>
+            <a:off x="2057400" y="4233672"/>
+            <a:ext cx="9235440" cy="365760"/>
+          </a:xfrm>
+          <a:prstGeom prst="rect">
+            <a:avLst/>
+          </a:prstGeom>
+          <a:noFill/>
+        </p:spPr>
+        <p:txBody>
+          <a:bodyPr wrap="square" lIns="0" rIns="0" tIns="0" bIns="0" anchor="t">
+            <a:spAutoFit/>
+          </a:bodyPr>
+          <a:lstStyle/>
+          <a:p>
+            <a:pPr algn="l"/>
+            <a:r>
+              <a:rPr sz="1250">
+                <a:solidFill>
+                  <a:srgbClr val="000000"/>
+                </a:solidFill>
+                <a:latin typeface="Calibri"/>
+              </a:rPr>
+              <a:t>One 17 × 11 sheet: line drawing, grayscale field and legend. SVG, PDF and graph.</a:t>
+            </a:r>
+          </a:p>
+        </p:txBody>
+      </p:sp>
+      <p:sp>
+        <p:nvSpPr>
+          <p:cNvPr id="29" name="TextBox 28"/>
+          <p:cNvSpPr txBox="1"/>
+          <p:nvPr/>
+        </p:nvSpPr>
+        <p:spPr>
+          <a:xfrm>
+            <a:off x="594360" y="4818888"/>
+            <a:ext cx="10972800" cy="320040"/>
+          </a:xfrm>
+          <a:prstGeom prst="rect">
+            <a:avLst/>
+          </a:prstGeom>
+          <a:noFill/>
+        </p:spPr>
+        <p:txBody>
+          <a:bodyPr wrap="square" lIns="0" rIns="0" tIns="0" bIns="0" anchor="t">
+            <a:spAutoFit/>
+          </a:bodyPr>
+          <a:lstStyle/>
+          <a:p>
+            <a:pPr algn="l"/>
+            <a:r>
+              <a:rPr sz="1300">
+                <a:solidFill>
+                  <a:srgbClr val="B4B4AC"/>
+                </a:solidFill>
+                <a:latin typeface="Calibri"/>
+              </a:rPr>
+              <a:t>Already due and expected in: P2a, P3a, P3b.</a:t>
+            </a:r>
+          </a:p>
+        </p:txBody>
+      </p:sp>
+      <p:sp>
+        <p:nvSpPr>
+          <p:cNvPr id="30" name="Rectangle 29"/>
+          <p:cNvSpPr/>
+          <p:nvPr/>
+        </p:nvSpPr>
+        <p:spPr>
+          <a:xfrm>
+            <a:off x="662940" y="5143500"/>
+            <a:ext cx="10972800" cy="566928"/>
+          </a:xfrm>
+          <a:prstGeom prst="rect">
+            <a:avLst/>
+          </a:prstGeom>
+          <a:solidFill>
+            <a:srgbClr val="000000"/>
+          </a:solidFill>
+          <a:ln w="6350">
+            <a:solidFill>
+              <a:srgbClr val="000000"/>
+            </a:solidFill>
+          </a:ln>
+          <a:effectLst/>
+        </p:spPr>
+        <p:style>
+          <a:lnRef idx="1">
+            <a:schemeClr val="accent1"/>
+          </a:lnRef>
+          <a:fillRef idx="3">
+            <a:schemeClr val="accent1"/>
+          </a:fillRef>
+          <a:effectRef idx="2">
+            <a:schemeClr val="accent1"/>
+          </a:effectRef>
+          <a:fontRef idx="minor">
+            <a:schemeClr val="lt1"/>
+          </a:fontRef>
+        </p:style>
+        <p:txBody>
+          <a:bodyPr rtlCol="0" anchor="ctr"/>
+          <a:lstStyle/>
+          <a:p/>
+        </p:txBody>
+      </p:sp>
+      <p:sp>
+        <p:nvSpPr>
+          <p:cNvPr id="31" name="Rectangle 30"/>
+          <p:cNvSpPr/>
+          <p:nvPr/>
+        </p:nvSpPr>
+        <p:spPr>
+          <a:xfrm>
+            <a:off x="594360" y="5074920"/>
+            <a:ext cx="10972800" cy="566928"/>
+          </a:xfrm>
+          <a:prstGeom prst="rect">
+            <a:avLst/>
+          </a:prstGeom>
+          <a:solidFill>
+            <a:srgbClr val="FFE500"/>
+          </a:solidFill>
+          <a:ln w="34925">
+            <a:solidFill>
+              <a:srgbClr val="000000"/>
+            </a:solidFill>
+          </a:ln>
+          <a:effectLst/>
+        </p:spPr>
+        <p:style>
+          <a:lnRef idx="1">
+            <a:schemeClr val="accent1"/>
+          </a:lnRef>
+          <a:fillRef idx="3">
+            <a:schemeClr val="accent1"/>
+          </a:fillRef>
+          <a:effectRef idx="2">
+            <a:schemeClr val="accent1"/>
+          </a:effectRef>
+          <a:fontRef idx="minor">
+            <a:schemeClr val="lt1"/>
+          </a:fontRef>
+        </p:style>
+        <p:txBody>
+          <a:bodyPr rtlCol="0" anchor="ctr"/>
+          <a:lstStyle/>
+          <a:p/>
+        </p:txBody>
+      </p:sp>
+      <p:sp>
+        <p:nvSpPr>
+          <p:cNvPr id="32" name="TextBox 31"/>
+          <p:cNvSpPr txBox="1"/>
+          <p:nvPr/>
+        </p:nvSpPr>
+        <p:spPr>
+          <a:xfrm>
+            <a:off x="777240" y="5074920"/>
+            <a:ext cx="10607040" cy="566928"/>
           </a:xfrm>
           <a:prstGeom prst="rect">
             <a:avLst/>
@@ -9306,191 +8702,29 @@
           </a:bodyPr>
           <a:lstStyle/>
           <a:p>
-            <a:pPr algn="l"/>
-            <a:r>
-              <a:rPr sz="1300" b="1">
-                <a:solidFill>
-                  <a:srgbClr val="FFFDF7"/>
-                </a:solidFill>
-                <a:latin typeface="Arial"/>
-              </a:rPr>
-              <a:t>PROJECT 2</a:t>
-            </a:r>
-          </a:p>
-        </p:txBody>
-      </p:sp>
-      <p:sp>
-        <p:nvSpPr>
-          <p:cNvPr id="19" name="TextBox 18"/>
-          <p:cNvSpPr txBox="1"/>
-          <p:nvPr/>
-        </p:nvSpPr>
-        <p:spPr>
-          <a:xfrm>
-            <a:off x="3200400" y="3291839"/>
-            <a:ext cx="3566160" cy="530352"/>
-          </a:xfrm>
-          <a:prstGeom prst="rect">
-            <a:avLst/>
-          </a:prstGeom>
-          <a:noFill/>
-        </p:spPr>
-        <p:txBody>
-          <a:bodyPr wrap="square" lIns="0" rIns="0" tIns="0" bIns="0" anchor="ctr">
-            <a:spAutoFit/>
-          </a:bodyPr>
-          <a:lstStyle/>
-          <a:p>
-            <a:pPr algn="l">
-              <a:lnSpc>
-                <a:spcPct val="115000"/>
-              </a:lnSpc>
-            </a:pPr>
-            <a:r>
-              <a:rPr sz="1250">
-                <a:solidFill>
-                  <a:srgbClr val="FFFDF7"/>
-                </a:solidFill>
-                <a:latin typeface="Calibri"/>
-              </a:rPr>
-              <a:t>The process sheet, the print, and what changed for printability.</a:t>
-            </a:r>
-          </a:p>
-        </p:txBody>
-      </p:sp>
-      <p:sp>
-        <p:nvSpPr>
-          <p:cNvPr id="20" name="Rectangle 19"/>
-          <p:cNvSpPr/>
-          <p:nvPr/>
-        </p:nvSpPr>
-        <p:spPr>
-          <a:xfrm>
-            <a:off x="662940" y="4091939"/>
-            <a:ext cx="640080" cy="530352"/>
-          </a:xfrm>
-          <a:prstGeom prst="rect">
-            <a:avLst/>
-          </a:prstGeom>
-          <a:solidFill>
-            <a:srgbClr val="000000"/>
-          </a:solidFill>
-          <a:ln w="6350">
-            <a:solidFill>
-              <a:srgbClr val="000000"/>
-            </a:solidFill>
-          </a:ln>
-          <a:effectLst/>
-        </p:spPr>
-        <p:style>
-          <a:lnRef idx="1">
-            <a:schemeClr val="accent1"/>
-          </a:lnRef>
-          <a:fillRef idx="3">
-            <a:schemeClr val="accent1"/>
-          </a:fillRef>
-          <a:effectRef idx="2">
-            <a:schemeClr val="accent1"/>
-          </a:effectRef>
-          <a:fontRef idx="minor">
-            <a:schemeClr val="lt1"/>
-          </a:fontRef>
-        </p:style>
-        <p:txBody>
-          <a:bodyPr rtlCol="0" anchor="ctr"/>
-          <a:lstStyle/>
-          <a:p/>
-        </p:txBody>
-      </p:sp>
-      <p:sp>
-        <p:nvSpPr>
-          <p:cNvPr id="21" name="Rectangle 20"/>
-          <p:cNvSpPr/>
-          <p:nvPr/>
-        </p:nvSpPr>
-        <p:spPr>
-          <a:xfrm>
-            <a:off x="594360" y="4023359"/>
-            <a:ext cx="640080" cy="530352"/>
-          </a:xfrm>
-          <a:prstGeom prst="rect">
-            <a:avLst/>
-          </a:prstGeom>
-          <a:solidFill>
-            <a:srgbClr val="FF4D8D"/>
-          </a:solidFill>
-          <a:ln w="34925">
-            <a:solidFill>
-              <a:srgbClr val="000000"/>
-            </a:solidFill>
-          </a:ln>
-          <a:effectLst/>
-        </p:spPr>
-        <p:style>
-          <a:lnRef idx="1">
-            <a:schemeClr val="accent1"/>
-          </a:lnRef>
-          <a:fillRef idx="3">
-            <a:schemeClr val="accent1"/>
-          </a:fillRef>
-          <a:effectRef idx="2">
-            <a:schemeClr val="accent1"/>
-          </a:effectRef>
-          <a:fontRef idx="minor">
-            <a:schemeClr val="lt1"/>
-          </a:fontRef>
-        </p:style>
-        <p:txBody>
-          <a:bodyPr rtlCol="0" anchor="ctr"/>
-          <a:lstStyle/>
-          <a:p/>
-        </p:txBody>
-      </p:sp>
-      <p:sp>
-        <p:nvSpPr>
-          <p:cNvPr id="22" name="TextBox 21"/>
-          <p:cNvSpPr txBox="1"/>
-          <p:nvPr/>
-        </p:nvSpPr>
-        <p:spPr>
-          <a:xfrm>
-            <a:off x="594360" y="4187951"/>
-            <a:ext cx="640080" cy="274320"/>
-          </a:xfrm>
-          <a:prstGeom prst="rect">
-            <a:avLst/>
-          </a:prstGeom>
-          <a:noFill/>
-        </p:spPr>
-        <p:txBody>
-          <a:bodyPr wrap="square" lIns="0" rIns="0" tIns="0" bIns="0" anchor="t">
-            <a:spAutoFit/>
-          </a:bodyPr>
-          <a:lstStyle/>
-          <a:p>
             <a:pPr algn="ctr"/>
             <a:r>
-              <a:rPr sz="1300" b="1">
+              <a:rPr sz="1200" b="1">
                 <a:solidFill>
                   <a:srgbClr val="000000"/>
                 </a:solidFill>
                 <a:latin typeface="Arial"/>
               </a:rPr>
-              <a:t>04</a:t>
+              <a:t>P3d CHECKPOINT TODAY · BRING YOUR SITE'S POINT CLOUD AND AT LEAST TWO MAPPED LAYERS WITH LEGENDS.</a:t>
             </a:r>
           </a:p>
         </p:txBody>
       </p:sp>
       <p:sp>
         <p:nvSpPr>
-          <p:cNvPr id="23" name="TextBox 22"/>
+          <p:cNvPr id="33" name="TextBox 32"/>
           <p:cNvSpPr txBox="1"/>
           <p:nvPr/>
         </p:nvSpPr>
         <p:spPr>
           <a:xfrm>
-            <a:off x="1463040" y="4023359"/>
-            <a:ext cx="1737360" cy="530352"/>
+            <a:off x="594360" y="5852160"/>
+            <a:ext cx="10972800" cy="365760"/>
           </a:xfrm>
           <a:prstGeom prst="rect">
             <a:avLst/>
@@ -9498,665 +8732,20 @@
           <a:noFill/>
         </p:spPr>
         <p:txBody>
-          <a:bodyPr wrap="square" lIns="0" rIns="0" tIns="0" bIns="0" anchor="ctr">
+          <a:bodyPr wrap="square" lIns="0" rIns="0" tIns="0" bIns="0" anchor="t">
             <a:spAutoFit/>
           </a:bodyPr>
           <a:lstStyle/>
           <a:p>
             <a:pPr algn="l"/>
             <a:r>
-              <a:rPr sz="1300" b="1">
+              <a:rPr sz="1300">
                 <a:solidFill>
-                  <a:srgbClr val="FFFDF7"/>
-                </a:solidFill>
-                <a:latin typeface="Arial"/>
-              </a:rPr>
-              <a:t>PROJECT 3</a:t>
-            </a:r>
-          </a:p>
-        </p:txBody>
-      </p:sp>
-      <p:sp>
-        <p:nvSpPr>
-          <p:cNvPr id="24" name="TextBox 23"/>
-          <p:cNvSpPr txBox="1"/>
-          <p:nvPr/>
-        </p:nvSpPr>
-        <p:spPr>
-          <a:xfrm>
-            <a:off x="3200400" y="4023359"/>
-            <a:ext cx="3566160" cy="530352"/>
-          </a:xfrm>
-          <a:prstGeom prst="rect">
-            <a:avLst/>
-          </a:prstGeom>
-          <a:noFill/>
-        </p:spPr>
-        <p:txBody>
-          <a:bodyPr wrap="square" lIns="0" rIns="0" tIns="0" bIns="0" anchor="ctr">
-            <a:spAutoFit/>
-          </a:bodyPr>
-          <a:lstStyle/>
-          <a:p>
-            <a:pPr algn="l">
-              <a:lnSpc>
-                <a:spcPct val="115000"/>
-              </a:lnSpc>
-            </a:pPr>
-            <a:r>
-              <a:rPr sz="1250">
-                <a:solidFill>
-                  <a:srgbClr val="FFFDF7"/>
+                  <a:srgbClr val="B4B4AC"/>
                 </a:solidFill>
                 <a:latin typeface="Calibri"/>
               </a:rPr>
-              <a:t>Module, arrays, plotted field, site analysis — as one sequence.</a:t>
-            </a:r>
-          </a:p>
-        </p:txBody>
-      </p:sp>
-      <p:sp>
-        <p:nvSpPr>
-          <p:cNvPr id="25" name="Rectangle 24"/>
-          <p:cNvSpPr/>
-          <p:nvPr/>
-        </p:nvSpPr>
-        <p:spPr>
-          <a:xfrm>
-            <a:off x="662940" y="4823459"/>
-            <a:ext cx="640080" cy="530352"/>
-          </a:xfrm>
-          <a:prstGeom prst="rect">
-            <a:avLst/>
-          </a:prstGeom>
-          <a:solidFill>
-            <a:srgbClr val="000000"/>
-          </a:solidFill>
-          <a:ln w="6350">
-            <a:solidFill>
-              <a:srgbClr val="000000"/>
-            </a:solidFill>
-          </a:ln>
-          <a:effectLst/>
-        </p:spPr>
-        <p:style>
-          <a:lnRef idx="1">
-            <a:schemeClr val="accent1"/>
-          </a:lnRef>
-          <a:fillRef idx="3">
-            <a:schemeClr val="accent1"/>
-          </a:fillRef>
-          <a:effectRef idx="2">
-            <a:schemeClr val="accent1"/>
-          </a:effectRef>
-          <a:fontRef idx="minor">
-            <a:schemeClr val="lt1"/>
-          </a:fontRef>
-        </p:style>
-        <p:txBody>
-          <a:bodyPr rtlCol="0" anchor="ctr"/>
-          <a:lstStyle/>
-          <a:p/>
-        </p:txBody>
-      </p:sp>
-      <p:sp>
-        <p:nvSpPr>
-          <p:cNvPr id="26" name="Rectangle 25"/>
-          <p:cNvSpPr/>
-          <p:nvPr/>
-        </p:nvSpPr>
-        <p:spPr>
-          <a:xfrm>
-            <a:off x="594360" y="4754879"/>
-            <a:ext cx="640080" cy="530352"/>
-          </a:xfrm>
-          <a:prstGeom prst="rect">
-            <a:avLst/>
-          </a:prstGeom>
-          <a:solidFill>
-            <a:srgbClr val="00D9E1"/>
-          </a:solidFill>
-          <a:ln w="34925">
-            <a:solidFill>
-              <a:srgbClr val="000000"/>
-            </a:solidFill>
-          </a:ln>
-          <a:effectLst/>
-        </p:spPr>
-        <p:style>
-          <a:lnRef idx="1">
-            <a:schemeClr val="accent1"/>
-          </a:lnRef>
-          <a:fillRef idx="3">
-            <a:schemeClr val="accent1"/>
-          </a:fillRef>
-          <a:effectRef idx="2">
-            <a:schemeClr val="accent1"/>
-          </a:effectRef>
-          <a:fontRef idx="minor">
-            <a:schemeClr val="lt1"/>
-          </a:fontRef>
-        </p:style>
-        <p:txBody>
-          <a:bodyPr rtlCol="0" anchor="ctr"/>
-          <a:lstStyle/>
-          <a:p/>
-        </p:txBody>
-      </p:sp>
-      <p:sp>
-        <p:nvSpPr>
-          <p:cNvPr id="27" name="TextBox 26"/>
-          <p:cNvSpPr txBox="1"/>
-          <p:nvPr/>
-        </p:nvSpPr>
-        <p:spPr>
-          <a:xfrm>
-            <a:off x="594360" y="4919471"/>
-            <a:ext cx="640080" cy="274320"/>
-          </a:xfrm>
-          <a:prstGeom prst="rect">
-            <a:avLst/>
-          </a:prstGeom>
-          <a:noFill/>
-        </p:spPr>
-        <p:txBody>
-          <a:bodyPr wrap="square" lIns="0" rIns="0" tIns="0" bIns="0" anchor="t">
-            <a:spAutoFit/>
-          </a:bodyPr>
-          <a:lstStyle/>
-          <a:p>
-            <a:pPr algn="ctr"/>
-            <a:r>
-              <a:rPr sz="1300" b="1">
-                <a:solidFill>
-                  <a:srgbClr val="000000"/>
-                </a:solidFill>
-                <a:latin typeface="Arial"/>
-              </a:rPr>
-              <a:t>05</a:t>
-            </a:r>
-          </a:p>
-        </p:txBody>
-      </p:sp>
-      <p:sp>
-        <p:nvSpPr>
-          <p:cNvPr id="28" name="TextBox 27"/>
-          <p:cNvSpPr txBox="1"/>
-          <p:nvPr/>
-        </p:nvSpPr>
-        <p:spPr>
-          <a:xfrm>
-            <a:off x="1463040" y="4754879"/>
-            <a:ext cx="1737360" cy="530352"/>
-          </a:xfrm>
-          <a:prstGeom prst="rect">
-            <a:avLst/>
-          </a:prstGeom>
-          <a:noFill/>
-        </p:spPr>
-        <p:txBody>
-          <a:bodyPr wrap="square" lIns="0" rIns="0" tIns="0" bIns="0" anchor="ctr">
-            <a:spAutoFit/>
-          </a:bodyPr>
-          <a:lstStyle/>
-          <a:p>
-            <a:pPr algn="l"/>
-            <a:r>
-              <a:rPr sz="1300" b="1">
-                <a:solidFill>
-                  <a:srgbClr val="FFFDF7"/>
-                </a:solidFill>
-                <a:latin typeface="Arial"/>
-              </a:rPr>
-              <a:t>LIVE</a:t>
-            </a:r>
-          </a:p>
-        </p:txBody>
-      </p:sp>
-      <p:sp>
-        <p:nvSpPr>
-          <p:cNvPr id="29" name="TextBox 28"/>
-          <p:cNvSpPr txBox="1"/>
-          <p:nvPr/>
-        </p:nvSpPr>
-        <p:spPr>
-          <a:xfrm>
-            <a:off x="3200400" y="4754879"/>
-            <a:ext cx="3566160" cy="530352"/>
-          </a:xfrm>
-          <a:prstGeom prst="rect">
-            <a:avLst/>
-          </a:prstGeom>
-          <a:noFill/>
-        </p:spPr>
-        <p:txBody>
-          <a:bodyPr wrap="square" lIns="0" rIns="0" tIns="0" bIns="0" anchor="ctr">
-            <a:spAutoFit/>
-          </a:bodyPr>
-          <a:lstStyle/>
-          <a:p>
-            <a:pPr algn="l">
-              <a:lnSpc>
-                <a:spcPct val="115000"/>
-              </a:lnSpc>
-            </a:pPr>
-            <a:r>
-              <a:rPr sz="1250">
-                <a:solidFill>
-                  <a:srgbClr val="FFFDF7"/>
-                </a:solidFill>
-                <a:latin typeface="Calibri"/>
-              </a:rPr>
-              <a:t>Open the file. Change one thing in front of the room.</a:t>
-            </a:r>
-          </a:p>
-        </p:txBody>
-      </p:sp>
-      <p:sp>
-        <p:nvSpPr>
-          <p:cNvPr id="30" name="Rectangle 29"/>
-          <p:cNvSpPr/>
-          <p:nvPr/>
-        </p:nvSpPr>
-        <p:spPr>
-          <a:xfrm>
-            <a:off x="7338060" y="1897380"/>
-            <a:ext cx="4297680" cy="3566160"/>
-          </a:xfrm>
-          <a:prstGeom prst="rect">
-            <a:avLst/>
-          </a:prstGeom>
-          <a:solidFill>
-            <a:srgbClr val="000000"/>
-          </a:solidFill>
-          <a:ln w="6350">
-            <a:solidFill>
-              <a:srgbClr val="000000"/>
-            </a:solidFill>
-          </a:ln>
-          <a:effectLst/>
-        </p:spPr>
-        <p:style>
-          <a:lnRef idx="1">
-            <a:schemeClr val="accent1"/>
-          </a:lnRef>
-          <a:fillRef idx="3">
-            <a:schemeClr val="accent1"/>
-          </a:fillRef>
-          <a:effectRef idx="2">
-            <a:schemeClr val="accent1"/>
-          </a:effectRef>
-          <a:fontRef idx="minor">
-            <a:schemeClr val="lt1"/>
-          </a:fontRef>
-        </p:style>
-        <p:txBody>
-          <a:bodyPr rtlCol="0" anchor="ctr"/>
-          <a:lstStyle/>
-          <a:p/>
-        </p:txBody>
-      </p:sp>
-      <p:sp>
-        <p:nvSpPr>
-          <p:cNvPr id="31" name="Rectangle 30"/>
-          <p:cNvSpPr/>
-          <p:nvPr/>
-        </p:nvSpPr>
-        <p:spPr>
-          <a:xfrm>
-            <a:off x="7269480" y="1828800"/>
-            <a:ext cx="4297680" cy="3566160"/>
-          </a:xfrm>
-          <a:prstGeom prst="rect">
-            <a:avLst/>
-          </a:prstGeom>
-          <a:solidFill>
-            <a:srgbClr val="FFFDF7"/>
-          </a:solidFill>
-          <a:ln w="34925">
-            <a:solidFill>
-              <a:srgbClr val="000000"/>
-            </a:solidFill>
-          </a:ln>
-          <a:effectLst/>
-        </p:spPr>
-        <p:style>
-          <a:lnRef idx="1">
-            <a:schemeClr val="accent1"/>
-          </a:lnRef>
-          <a:fillRef idx="3">
-            <a:schemeClr val="accent1"/>
-          </a:fillRef>
-          <a:effectRef idx="2">
-            <a:schemeClr val="accent1"/>
-          </a:effectRef>
-          <a:fontRef idx="minor">
-            <a:schemeClr val="lt1"/>
-          </a:fontRef>
-        </p:style>
-        <p:txBody>
-          <a:bodyPr rtlCol="0" anchor="ctr"/>
-          <a:lstStyle/>
-          <a:p/>
-        </p:txBody>
-      </p:sp>
-      <p:sp>
-        <p:nvSpPr>
-          <p:cNvPr id="32" name="Rectangle 31"/>
-          <p:cNvSpPr/>
-          <p:nvPr/>
-        </p:nvSpPr>
-        <p:spPr>
-          <a:xfrm>
-            <a:off x="7269480" y="1828800"/>
-            <a:ext cx="4297680" cy="502920"/>
-          </a:xfrm>
-          <a:prstGeom prst="rect">
-            <a:avLst/>
-          </a:prstGeom>
-          <a:solidFill>
-            <a:srgbClr val="FFE500"/>
-          </a:solidFill>
-          <a:ln w="34925">
-            <a:solidFill>
-              <a:srgbClr val="000000"/>
-            </a:solidFill>
-          </a:ln>
-          <a:effectLst/>
-        </p:spPr>
-        <p:style>
-          <a:lnRef idx="1">
-            <a:schemeClr val="accent1"/>
-          </a:lnRef>
-          <a:fillRef idx="3">
-            <a:schemeClr val="accent1"/>
-          </a:fillRef>
-          <a:effectRef idx="2">
-            <a:schemeClr val="accent1"/>
-          </a:effectRef>
-          <a:fontRef idx="minor">
-            <a:schemeClr val="lt1"/>
-          </a:fontRef>
-        </p:style>
-        <p:txBody>
-          <a:bodyPr rtlCol="0" anchor="ctr"/>
-          <a:lstStyle/>
-          <a:p/>
-        </p:txBody>
-      </p:sp>
-      <p:sp>
-        <p:nvSpPr>
-          <p:cNvPr id="33" name="TextBox 32"/>
-          <p:cNvSpPr txBox="1"/>
-          <p:nvPr/>
-        </p:nvSpPr>
-        <p:spPr>
-          <a:xfrm>
-            <a:off x="7498079" y="1828800"/>
-            <a:ext cx="3840480" cy="502920"/>
-          </a:xfrm>
-          <a:prstGeom prst="rect">
-            <a:avLst/>
-          </a:prstGeom>
-          <a:noFill/>
-        </p:spPr>
-        <p:txBody>
-          <a:bodyPr wrap="square" lIns="0" rIns="0" tIns="0" bIns="0" anchor="ctr">
-            <a:spAutoFit/>
-          </a:bodyPr>
-          <a:lstStyle/>
-          <a:p>
-            <a:pPr algn="l"/>
-            <a:r>
-              <a:rPr sz="1400" b="1">
-                <a:solidFill>
-                  <a:srgbClr val="000000"/>
-                </a:solidFill>
-                <a:latin typeface="Arial"/>
-              </a:rPr>
-              <a:t>THE LIVE CHANGE</a:t>
-            </a:r>
-          </a:p>
-        </p:txBody>
-      </p:sp>
-      <p:sp>
-        <p:nvSpPr>
-          <p:cNvPr id="34" name="TextBox 33"/>
-          <p:cNvSpPr txBox="1"/>
-          <p:nvPr/>
-        </p:nvSpPr>
-        <p:spPr>
-          <a:xfrm>
-            <a:off x="7543800" y="2514600"/>
-            <a:ext cx="3749039" cy="2743200"/>
-          </a:xfrm>
-          <a:prstGeom prst="rect">
-            <a:avLst/>
-          </a:prstGeom>
-          <a:noFill/>
-        </p:spPr>
-        <p:txBody>
-          <a:bodyPr wrap="square" lIns="0" rIns="0" tIns="0" bIns="0" anchor="t">
-            <a:spAutoFit/>
-          </a:bodyPr>
-          <a:lstStyle/>
-          <a:p>
-            <a:pPr algn="l">
-              <a:lnSpc>
-                <a:spcPct val="120000"/>
-              </a:lnSpc>
-            </a:pPr>
-            <a:r>
-              <a:rPr sz="1350" b="1">
-                <a:solidFill>
-                  <a:srgbClr val="000000"/>
-                </a:solidFill>
-                <a:latin typeface="Calibri"/>
-              </a:rPr>
-              <a:t>CHOOSE</a:t>
-            </a:r>
-          </a:p>
-          <a:p>
-            <a:pPr algn="l">
-              <a:lnSpc>
-                <a:spcPct val="120000"/>
-              </a:lnSpc>
-            </a:pPr>
-            <a:r>
-              <a:rPr sz="1350">
-                <a:solidFill>
-                  <a:srgbClr val="000000"/>
-                </a:solidFill>
-                <a:latin typeface="Calibri"/>
-              </a:rPr>
-              <a:t>One parameter: an attractor position, a count, a radius, a setting.</a:t>
-            </a:r>
-          </a:p>
-          <a:p>
-            <a:pPr algn="l">
-              <a:lnSpc>
-                <a:spcPct val="120000"/>
-              </a:lnSpc>
-            </a:pPr>
-            <a:r>
-              <a:rPr sz="1350" b="1">
-                <a:solidFill>
-                  <a:srgbClr val="000000"/>
-                </a:solidFill>
-                <a:latin typeface="Calibri"/>
-              </a:rPr>
-              <a:t>PREDICT</a:t>
-            </a:r>
-          </a:p>
-          <a:p>
-            <a:pPr algn="l">
-              <a:lnSpc>
-                <a:spcPct val="120000"/>
-              </a:lnSpc>
-            </a:pPr>
-            <a:r>
-              <a:rPr sz="1350">
-                <a:solidFill>
-                  <a:srgbClr val="000000"/>
-                </a:solidFill>
-                <a:latin typeface="Calibri"/>
-              </a:rPr>
-              <a:t>Say what will happen before you touch it.</a:t>
-            </a:r>
-          </a:p>
-          <a:p>
-            <a:pPr algn="l">
-              <a:lnSpc>
-                <a:spcPct val="120000"/>
-              </a:lnSpc>
-            </a:pPr>
-            <a:r>
-              <a:rPr sz="1350" b="1">
-                <a:solidFill>
-                  <a:srgbClr val="000000"/>
-                </a:solidFill>
-                <a:latin typeface="Calibri"/>
-              </a:rPr>
-              <a:t>CHANGE AND EXPLAIN</a:t>
-            </a:r>
-          </a:p>
-          <a:p>
-            <a:pPr algn="l">
-              <a:lnSpc>
-                <a:spcPct val="120000"/>
-              </a:lnSpc>
-            </a:pPr>
-            <a:r>
-              <a:rPr sz="1350">
-                <a:solidFill>
-                  <a:srgbClr val="000000"/>
-                </a:solidFill>
-                <a:latin typeface="Calibri"/>
-              </a:rPr>
-              <a:t>Name the nodes, or the analysis settings, that made it happen.</a:t>
-            </a:r>
-          </a:p>
-        </p:txBody>
-      </p:sp>
-      <p:sp>
-        <p:nvSpPr>
-          <p:cNvPr id="35" name="Rectangle 34"/>
-          <p:cNvSpPr/>
-          <p:nvPr/>
-        </p:nvSpPr>
-        <p:spPr>
-          <a:xfrm>
-            <a:off x="662940" y="5737860"/>
-            <a:ext cx="10972800" cy="566928"/>
-          </a:xfrm>
-          <a:prstGeom prst="rect">
-            <a:avLst/>
-          </a:prstGeom>
-          <a:solidFill>
-            <a:srgbClr val="000000"/>
-          </a:solidFill>
-          <a:ln w="6350">
-            <a:solidFill>
-              <a:srgbClr val="000000"/>
-            </a:solidFill>
-          </a:ln>
-          <a:effectLst/>
-        </p:spPr>
-        <p:style>
-          <a:lnRef idx="1">
-            <a:schemeClr val="accent1"/>
-          </a:lnRef>
-          <a:fillRef idx="3">
-            <a:schemeClr val="accent1"/>
-          </a:fillRef>
-          <a:effectRef idx="2">
-            <a:schemeClr val="accent1"/>
-          </a:effectRef>
-          <a:fontRef idx="minor">
-            <a:schemeClr val="lt1"/>
-          </a:fontRef>
-        </p:style>
-        <p:txBody>
-          <a:bodyPr rtlCol="0" anchor="ctr"/>
-          <a:lstStyle/>
-          <a:p/>
-        </p:txBody>
-      </p:sp>
-      <p:sp>
-        <p:nvSpPr>
-          <p:cNvPr id="36" name="Rectangle 35"/>
-          <p:cNvSpPr/>
-          <p:nvPr/>
-        </p:nvSpPr>
-        <p:spPr>
-          <a:xfrm>
-            <a:off x="594360" y="5669280"/>
-            <a:ext cx="10972800" cy="566928"/>
-          </a:xfrm>
-          <a:prstGeom prst="rect">
-            <a:avLst/>
-          </a:prstGeom>
-          <a:solidFill>
-            <a:srgbClr val="00D9E1"/>
-          </a:solidFill>
-          <a:ln w="34925">
-            <a:solidFill>
-              <a:srgbClr val="000000"/>
-            </a:solidFill>
-          </a:ln>
-          <a:effectLst/>
-        </p:spPr>
-        <p:style>
-          <a:lnRef idx="1">
-            <a:schemeClr val="accent1"/>
-          </a:lnRef>
-          <a:fillRef idx="3">
-            <a:schemeClr val="accent1"/>
-          </a:fillRef>
-          <a:effectRef idx="2">
-            <a:schemeClr val="accent1"/>
-          </a:effectRef>
-          <a:fontRef idx="minor">
-            <a:schemeClr val="lt1"/>
-          </a:fontRef>
-        </p:style>
-        <p:txBody>
-          <a:bodyPr rtlCol="0" anchor="ctr"/>
-          <a:lstStyle/>
-          <a:p/>
-        </p:txBody>
-      </p:sp>
-      <p:sp>
-        <p:nvSpPr>
-          <p:cNvPr id="37" name="TextBox 36"/>
-          <p:cNvSpPr txBox="1"/>
-          <p:nvPr/>
-        </p:nvSpPr>
-        <p:spPr>
-          <a:xfrm>
-            <a:off x="777240" y="5669280"/>
-            <a:ext cx="10607040" cy="566928"/>
-          </a:xfrm>
-          <a:prstGeom prst="rect">
-            <a:avLst/>
-          </a:prstGeom>
-          <a:noFill/>
-        </p:spPr>
-        <p:txBody>
-          <a:bodyPr wrap="square" lIns="0" rIns="0" tIns="0" bIns="0" anchor="ctr">
-            <a:spAutoFit/>
-          </a:bodyPr>
-          <a:lstStyle/>
-          <a:p>
-            <a:pPr algn="ctr"/>
-            <a:r>
-              <a:rPr sz="1250" b="1">
-                <a:solidFill>
-                  <a:srgbClr val="000000"/>
-                </a:solidFill>
-                <a:latin typeface="Arial"/>
-              </a:rPr>
-              <a:t>IF THE PREDICTION WAS WRONG, SAY WHY. THAT IS ALSO UNDERSTANDING.</a:t>
+              <a:t>P3d is due next class, Week 11 — Nov 3. P4a is issued today.</a:t>
             </a:r>
           </a:p>
         </p:txBody>
@@ -10261,1397 +8850,7 @@
                 </a:solidFill>
                 <a:latin typeface="Arial"/>
               </a:rPr>
-              <a:t>PART 1 — WHAT IS ASSESSED</a:t>
-            </a:r>
-          </a:p>
-        </p:txBody>
-      </p:sp>
-      <p:sp>
-        <p:nvSpPr>
-          <p:cNvPr id="4" name="TextBox 3"/>
-          <p:cNvSpPr txBox="1"/>
-          <p:nvPr/>
-        </p:nvSpPr>
-        <p:spPr>
-          <a:xfrm>
-            <a:off x="594360" y="1261872"/>
-            <a:ext cx="10972800" cy="310896"/>
-          </a:xfrm>
-          <a:prstGeom prst="rect">
-            <a:avLst/>
-          </a:prstGeom>
-          <a:noFill/>
-        </p:spPr>
-        <p:txBody>
-          <a:bodyPr wrap="square" lIns="0" rIns="0" tIns="0" bIns="0" anchor="t">
-            <a:spAutoFit/>
-          </a:bodyPr>
-          <a:lstStyle/>
-          <a:p>
-            <a:pPr algn="l"/>
-            <a:r>
-              <a:rPr sz="1350">
-                <a:solidFill>
-                  <a:srgbClr val="6B6B6B"/>
-                </a:solidFill>
-                <a:latin typeface="Calibri"/>
-              </a:rPr>
-              <a:t>Revision and coherence across Projects 1–3, presented and changed live.</a:t>
-            </a:r>
-          </a:p>
-        </p:txBody>
-      </p:sp>
-      <p:sp>
-        <p:nvSpPr>
-          <p:cNvPr id="5" name="Rectangle 4"/>
-          <p:cNvSpPr/>
-          <p:nvPr/>
-        </p:nvSpPr>
-        <p:spPr>
-          <a:xfrm>
-            <a:off x="662940" y="1851660"/>
-            <a:ext cx="777240" cy="724204"/>
-          </a:xfrm>
-          <a:prstGeom prst="rect">
-            <a:avLst/>
-          </a:prstGeom>
-          <a:solidFill>
-            <a:srgbClr val="000000"/>
-          </a:solidFill>
-          <a:ln w="6350">
-            <a:solidFill>
-              <a:srgbClr val="000000"/>
-            </a:solidFill>
-          </a:ln>
-          <a:effectLst/>
-        </p:spPr>
-        <p:style>
-          <a:lnRef idx="1">
-            <a:schemeClr val="accent1"/>
-          </a:lnRef>
-          <a:fillRef idx="3">
-            <a:schemeClr val="accent1"/>
-          </a:fillRef>
-          <a:effectRef idx="2">
-            <a:schemeClr val="accent1"/>
-          </a:effectRef>
-          <a:fontRef idx="minor">
-            <a:schemeClr val="lt1"/>
-          </a:fontRef>
-        </p:style>
-        <p:txBody>
-          <a:bodyPr rtlCol="0" anchor="ctr"/>
-          <a:lstStyle/>
-          <a:p/>
-        </p:txBody>
-      </p:sp>
-      <p:sp>
-        <p:nvSpPr>
-          <p:cNvPr id="6" name="Rectangle 5"/>
-          <p:cNvSpPr/>
-          <p:nvPr/>
-        </p:nvSpPr>
-        <p:spPr>
-          <a:xfrm>
-            <a:off x="594360" y="1783080"/>
-            <a:ext cx="777240" cy="724204"/>
-          </a:xfrm>
-          <a:prstGeom prst="rect">
-            <a:avLst/>
-          </a:prstGeom>
-          <a:solidFill>
-            <a:srgbClr val="00D9E1"/>
-          </a:solidFill>
-          <a:ln w="34925">
-            <a:solidFill>
-              <a:srgbClr val="000000"/>
-            </a:solidFill>
-          </a:ln>
-          <a:effectLst/>
-        </p:spPr>
-        <p:style>
-          <a:lnRef idx="1">
-            <a:schemeClr val="accent1"/>
-          </a:lnRef>
-          <a:fillRef idx="3">
-            <a:schemeClr val="accent1"/>
-          </a:fillRef>
-          <a:effectRef idx="2">
-            <a:schemeClr val="accent1"/>
-          </a:effectRef>
-          <a:fontRef idx="minor">
-            <a:schemeClr val="lt1"/>
-          </a:fontRef>
-        </p:style>
-        <p:txBody>
-          <a:bodyPr rtlCol="0" anchor="ctr"/>
-          <a:lstStyle/>
-          <a:p/>
-        </p:txBody>
-      </p:sp>
-      <p:sp>
-        <p:nvSpPr>
-          <p:cNvPr id="7" name="TextBox 6"/>
-          <p:cNvSpPr txBox="1"/>
-          <p:nvPr/>
-        </p:nvSpPr>
-        <p:spPr>
-          <a:xfrm>
-            <a:off x="594360" y="2044598"/>
-            <a:ext cx="777240" cy="274320"/>
-          </a:xfrm>
-          <a:prstGeom prst="rect">
-            <a:avLst/>
-          </a:prstGeom>
-          <a:noFill/>
-        </p:spPr>
-        <p:txBody>
-          <a:bodyPr wrap="square" lIns="0" rIns="0" tIns="0" bIns="0" anchor="t">
-            <a:spAutoFit/>
-          </a:bodyPr>
-          <a:lstStyle/>
-          <a:p>
-            <a:pPr algn="ctr"/>
-            <a:r>
-              <a:rPr sz="1500" b="1">
-                <a:solidFill>
-                  <a:srgbClr val="000000"/>
-                </a:solidFill>
-                <a:latin typeface="Arial"/>
-              </a:rPr>
-              <a:t>01</a:t>
-            </a:r>
-          </a:p>
-        </p:txBody>
-      </p:sp>
-      <p:sp>
-        <p:nvSpPr>
-          <p:cNvPr id="8" name="Rectangle 7"/>
-          <p:cNvSpPr/>
-          <p:nvPr/>
-        </p:nvSpPr>
-        <p:spPr>
-          <a:xfrm>
-            <a:off x="1714499" y="1851660"/>
-            <a:ext cx="9921240" cy="724204"/>
-          </a:xfrm>
-          <a:prstGeom prst="rect">
-            <a:avLst/>
-          </a:prstGeom>
-          <a:solidFill>
-            <a:srgbClr val="000000"/>
-          </a:solidFill>
-          <a:ln w="6350">
-            <a:solidFill>
-              <a:srgbClr val="000000"/>
-            </a:solidFill>
-          </a:ln>
-          <a:effectLst/>
-        </p:spPr>
-        <p:style>
-          <a:lnRef idx="1">
-            <a:schemeClr val="accent1"/>
-          </a:lnRef>
-          <a:fillRef idx="3">
-            <a:schemeClr val="accent1"/>
-          </a:fillRef>
-          <a:effectRef idx="2">
-            <a:schemeClr val="accent1"/>
-          </a:effectRef>
-          <a:fontRef idx="minor">
-            <a:schemeClr val="lt1"/>
-          </a:fontRef>
-        </p:style>
-        <p:txBody>
-          <a:bodyPr rtlCol="0" anchor="ctr"/>
-          <a:lstStyle/>
-          <a:p/>
-        </p:txBody>
-      </p:sp>
-      <p:sp>
-        <p:nvSpPr>
-          <p:cNvPr id="9" name="Rectangle 8"/>
-          <p:cNvSpPr/>
-          <p:nvPr/>
-        </p:nvSpPr>
-        <p:spPr>
-          <a:xfrm>
-            <a:off x="1645919" y="1783080"/>
-            <a:ext cx="9921240" cy="724204"/>
-          </a:xfrm>
-          <a:prstGeom prst="rect">
-            <a:avLst/>
-          </a:prstGeom>
-          <a:solidFill>
-            <a:srgbClr val="FFFDF7"/>
-          </a:solidFill>
-          <a:ln w="34925">
-            <a:solidFill>
-              <a:srgbClr val="000000"/>
-            </a:solidFill>
-          </a:ln>
-          <a:effectLst/>
-        </p:spPr>
-        <p:style>
-          <a:lnRef idx="1">
-            <a:schemeClr val="accent1"/>
-          </a:lnRef>
-          <a:fillRef idx="3">
-            <a:schemeClr val="accent1"/>
-          </a:fillRef>
-          <a:effectRef idx="2">
-            <a:schemeClr val="accent1"/>
-          </a:effectRef>
-          <a:fontRef idx="minor">
-            <a:schemeClr val="lt1"/>
-          </a:fontRef>
-        </p:style>
-        <p:txBody>
-          <a:bodyPr rtlCol="0" anchor="ctr"/>
-          <a:lstStyle/>
-          <a:p/>
-        </p:txBody>
-      </p:sp>
-      <p:sp>
-        <p:nvSpPr>
-          <p:cNvPr id="10" name="TextBox 9"/>
-          <p:cNvSpPr txBox="1"/>
-          <p:nvPr/>
-        </p:nvSpPr>
-        <p:spPr>
-          <a:xfrm>
-            <a:off x="1920240" y="1874519"/>
-            <a:ext cx="9372600" cy="541324"/>
-          </a:xfrm>
-          <a:prstGeom prst="rect">
-            <a:avLst/>
-          </a:prstGeom>
-          <a:noFill/>
-        </p:spPr>
-        <p:txBody>
-          <a:bodyPr wrap="square" lIns="0" rIns="0" tIns="0" bIns="0" anchor="ctr">
-            <a:spAutoFit/>
-          </a:bodyPr>
-          <a:lstStyle/>
-          <a:p>
-            <a:pPr algn="l">
-              <a:lnSpc>
-                <a:spcPct val="125000"/>
-              </a:lnSpc>
-            </a:pPr>
-            <a:r>
-              <a:rPr sz="1300">
-                <a:solidFill>
-                  <a:srgbClr val="000000"/>
-                </a:solidFill>
-                <a:latin typeface="Calibri"/>
-              </a:rPr>
-              <a:t>Print and present Project 1: the four-page Graphic Standards Manual.</a:t>
-            </a:r>
-          </a:p>
-        </p:txBody>
-      </p:sp>
-      <p:sp>
-        <p:nvSpPr>
-          <p:cNvPr id="11" name="Rectangle 10"/>
-          <p:cNvSpPr/>
-          <p:nvPr/>
-        </p:nvSpPr>
-        <p:spPr>
-          <a:xfrm>
-            <a:off x="662940" y="2722168"/>
-            <a:ext cx="777240" cy="724204"/>
-          </a:xfrm>
-          <a:prstGeom prst="rect">
-            <a:avLst/>
-          </a:prstGeom>
-          <a:solidFill>
-            <a:srgbClr val="000000"/>
-          </a:solidFill>
-          <a:ln w="6350">
-            <a:solidFill>
-              <a:srgbClr val="000000"/>
-            </a:solidFill>
-          </a:ln>
-          <a:effectLst/>
-        </p:spPr>
-        <p:style>
-          <a:lnRef idx="1">
-            <a:schemeClr val="accent1"/>
-          </a:lnRef>
-          <a:fillRef idx="3">
-            <a:schemeClr val="accent1"/>
-          </a:fillRef>
-          <a:effectRef idx="2">
-            <a:schemeClr val="accent1"/>
-          </a:effectRef>
-          <a:fontRef idx="minor">
-            <a:schemeClr val="lt1"/>
-          </a:fontRef>
-        </p:style>
-        <p:txBody>
-          <a:bodyPr rtlCol="0" anchor="ctr"/>
-          <a:lstStyle/>
-          <a:p/>
-        </p:txBody>
-      </p:sp>
-      <p:sp>
-        <p:nvSpPr>
-          <p:cNvPr id="12" name="Rectangle 11"/>
-          <p:cNvSpPr/>
-          <p:nvPr/>
-        </p:nvSpPr>
-        <p:spPr>
-          <a:xfrm>
-            <a:off x="594360" y="2653588"/>
-            <a:ext cx="777240" cy="724204"/>
-          </a:xfrm>
-          <a:prstGeom prst="rect">
-            <a:avLst/>
-          </a:prstGeom>
-          <a:solidFill>
-            <a:srgbClr val="C6F035"/>
-          </a:solidFill>
-          <a:ln w="34925">
-            <a:solidFill>
-              <a:srgbClr val="000000"/>
-            </a:solidFill>
-          </a:ln>
-          <a:effectLst/>
-        </p:spPr>
-        <p:style>
-          <a:lnRef idx="1">
-            <a:schemeClr val="accent1"/>
-          </a:lnRef>
-          <a:fillRef idx="3">
-            <a:schemeClr val="accent1"/>
-          </a:fillRef>
-          <a:effectRef idx="2">
-            <a:schemeClr val="accent1"/>
-          </a:effectRef>
-          <a:fontRef idx="minor">
-            <a:schemeClr val="lt1"/>
-          </a:fontRef>
-        </p:style>
-        <p:txBody>
-          <a:bodyPr rtlCol="0" anchor="ctr"/>
-          <a:lstStyle/>
-          <a:p/>
-        </p:txBody>
-      </p:sp>
-      <p:sp>
-        <p:nvSpPr>
-          <p:cNvPr id="13" name="TextBox 12"/>
-          <p:cNvSpPr txBox="1"/>
-          <p:nvPr/>
-        </p:nvSpPr>
-        <p:spPr>
-          <a:xfrm>
-            <a:off x="594360" y="2915107"/>
-            <a:ext cx="777240" cy="274320"/>
-          </a:xfrm>
-          <a:prstGeom prst="rect">
-            <a:avLst/>
-          </a:prstGeom>
-          <a:noFill/>
-        </p:spPr>
-        <p:txBody>
-          <a:bodyPr wrap="square" lIns="0" rIns="0" tIns="0" bIns="0" anchor="t">
-            <a:spAutoFit/>
-          </a:bodyPr>
-          <a:lstStyle/>
-          <a:p>
-            <a:pPr algn="ctr"/>
-            <a:r>
-              <a:rPr sz="1500" b="1">
-                <a:solidFill>
-                  <a:srgbClr val="000000"/>
-                </a:solidFill>
-                <a:latin typeface="Arial"/>
-              </a:rPr>
-              <a:t>02</a:t>
-            </a:r>
-          </a:p>
-        </p:txBody>
-      </p:sp>
-      <p:sp>
-        <p:nvSpPr>
-          <p:cNvPr id="14" name="Rectangle 13"/>
-          <p:cNvSpPr/>
-          <p:nvPr/>
-        </p:nvSpPr>
-        <p:spPr>
-          <a:xfrm>
-            <a:off x="1714499" y="2722168"/>
-            <a:ext cx="9921240" cy="724204"/>
-          </a:xfrm>
-          <a:prstGeom prst="rect">
-            <a:avLst/>
-          </a:prstGeom>
-          <a:solidFill>
-            <a:srgbClr val="000000"/>
-          </a:solidFill>
-          <a:ln w="6350">
-            <a:solidFill>
-              <a:srgbClr val="000000"/>
-            </a:solidFill>
-          </a:ln>
-          <a:effectLst/>
-        </p:spPr>
-        <p:style>
-          <a:lnRef idx="1">
-            <a:schemeClr val="accent1"/>
-          </a:lnRef>
-          <a:fillRef idx="3">
-            <a:schemeClr val="accent1"/>
-          </a:fillRef>
-          <a:effectRef idx="2">
-            <a:schemeClr val="accent1"/>
-          </a:effectRef>
-          <a:fontRef idx="minor">
-            <a:schemeClr val="lt1"/>
-          </a:fontRef>
-        </p:style>
-        <p:txBody>
-          <a:bodyPr rtlCol="0" anchor="ctr"/>
-          <a:lstStyle/>
-          <a:p/>
-        </p:txBody>
-      </p:sp>
-      <p:sp>
-        <p:nvSpPr>
-          <p:cNvPr id="15" name="Rectangle 14"/>
-          <p:cNvSpPr/>
-          <p:nvPr/>
-        </p:nvSpPr>
-        <p:spPr>
-          <a:xfrm>
-            <a:off x="1645919" y="2653588"/>
-            <a:ext cx="9921240" cy="724204"/>
-          </a:xfrm>
-          <a:prstGeom prst="rect">
-            <a:avLst/>
-          </a:prstGeom>
-          <a:solidFill>
-            <a:srgbClr val="FFFDF7"/>
-          </a:solidFill>
-          <a:ln w="34925">
-            <a:solidFill>
-              <a:srgbClr val="000000"/>
-            </a:solidFill>
-          </a:ln>
-          <a:effectLst/>
-        </p:spPr>
-        <p:style>
-          <a:lnRef idx="1">
-            <a:schemeClr val="accent1"/>
-          </a:lnRef>
-          <a:fillRef idx="3">
-            <a:schemeClr val="accent1"/>
-          </a:fillRef>
-          <a:effectRef idx="2">
-            <a:schemeClr val="accent1"/>
-          </a:effectRef>
-          <a:fontRef idx="minor">
-            <a:schemeClr val="lt1"/>
-          </a:fontRef>
-        </p:style>
-        <p:txBody>
-          <a:bodyPr rtlCol="0" anchor="ctr"/>
-          <a:lstStyle/>
-          <a:p/>
-        </p:txBody>
-      </p:sp>
-      <p:sp>
-        <p:nvSpPr>
-          <p:cNvPr id="16" name="TextBox 15"/>
-          <p:cNvSpPr txBox="1"/>
-          <p:nvPr/>
-        </p:nvSpPr>
-        <p:spPr>
-          <a:xfrm>
-            <a:off x="1920240" y="2745028"/>
-            <a:ext cx="9372600" cy="541324"/>
-          </a:xfrm>
-          <a:prstGeom prst="rect">
-            <a:avLst/>
-          </a:prstGeom>
-          <a:noFill/>
-        </p:spPr>
-        <p:txBody>
-          <a:bodyPr wrap="square" lIns="0" rIns="0" tIns="0" bIns="0" anchor="ctr">
-            <a:spAutoFit/>
-          </a:bodyPr>
-          <a:lstStyle/>
-          <a:p>
-            <a:pPr algn="l">
-              <a:lnSpc>
-                <a:spcPct val="125000"/>
-              </a:lnSpc>
-            </a:pPr>
-            <a:r>
-              <a:rPr sz="1300">
-                <a:solidFill>
-                  <a:srgbClr val="000000"/>
-                </a:solidFill>
-                <a:latin typeface="Calibri"/>
-              </a:rPr>
-              <a:t>Present Project 2: the CSG process sheet, the 3D printed CSG object and its process sheet.</a:t>
-            </a:r>
-          </a:p>
-        </p:txBody>
-      </p:sp>
-      <p:sp>
-        <p:nvSpPr>
-          <p:cNvPr id="17" name="Rectangle 16"/>
-          <p:cNvSpPr/>
-          <p:nvPr/>
-        </p:nvSpPr>
-        <p:spPr>
-          <a:xfrm>
-            <a:off x="662940" y="3592677"/>
-            <a:ext cx="777240" cy="724204"/>
-          </a:xfrm>
-          <a:prstGeom prst="rect">
-            <a:avLst/>
-          </a:prstGeom>
-          <a:solidFill>
-            <a:srgbClr val="000000"/>
-          </a:solidFill>
-          <a:ln w="6350">
-            <a:solidFill>
-              <a:srgbClr val="000000"/>
-            </a:solidFill>
-          </a:ln>
-          <a:effectLst/>
-        </p:spPr>
-        <p:style>
-          <a:lnRef idx="1">
-            <a:schemeClr val="accent1"/>
-          </a:lnRef>
-          <a:fillRef idx="3">
-            <a:schemeClr val="accent1"/>
-          </a:fillRef>
-          <a:effectRef idx="2">
-            <a:schemeClr val="accent1"/>
-          </a:effectRef>
-          <a:fontRef idx="minor">
-            <a:schemeClr val="lt1"/>
-          </a:fontRef>
-        </p:style>
-        <p:txBody>
-          <a:bodyPr rtlCol="0" anchor="ctr"/>
-          <a:lstStyle/>
-          <a:p/>
-        </p:txBody>
-      </p:sp>
-      <p:sp>
-        <p:nvSpPr>
-          <p:cNvPr id="18" name="Rectangle 17"/>
-          <p:cNvSpPr/>
-          <p:nvPr/>
-        </p:nvSpPr>
-        <p:spPr>
-          <a:xfrm>
-            <a:off x="594360" y="3524097"/>
-            <a:ext cx="777240" cy="724204"/>
-          </a:xfrm>
-          <a:prstGeom prst="rect">
-            <a:avLst/>
-          </a:prstGeom>
-          <a:solidFill>
-            <a:srgbClr val="FFE500"/>
-          </a:solidFill>
-          <a:ln w="34925">
-            <a:solidFill>
-              <a:srgbClr val="000000"/>
-            </a:solidFill>
-          </a:ln>
-          <a:effectLst/>
-        </p:spPr>
-        <p:style>
-          <a:lnRef idx="1">
-            <a:schemeClr val="accent1"/>
-          </a:lnRef>
-          <a:fillRef idx="3">
-            <a:schemeClr val="accent1"/>
-          </a:fillRef>
-          <a:effectRef idx="2">
-            <a:schemeClr val="accent1"/>
-          </a:effectRef>
-          <a:fontRef idx="minor">
-            <a:schemeClr val="lt1"/>
-          </a:fontRef>
-        </p:style>
-        <p:txBody>
-          <a:bodyPr rtlCol="0" anchor="ctr"/>
-          <a:lstStyle/>
-          <a:p/>
-        </p:txBody>
-      </p:sp>
-      <p:sp>
-        <p:nvSpPr>
-          <p:cNvPr id="19" name="TextBox 18"/>
-          <p:cNvSpPr txBox="1"/>
-          <p:nvPr/>
-        </p:nvSpPr>
-        <p:spPr>
-          <a:xfrm>
-            <a:off x="594360" y="3785615"/>
-            <a:ext cx="777240" cy="274320"/>
-          </a:xfrm>
-          <a:prstGeom prst="rect">
-            <a:avLst/>
-          </a:prstGeom>
-          <a:noFill/>
-        </p:spPr>
-        <p:txBody>
-          <a:bodyPr wrap="square" lIns="0" rIns="0" tIns="0" bIns="0" anchor="t">
-            <a:spAutoFit/>
-          </a:bodyPr>
-          <a:lstStyle/>
-          <a:p>
-            <a:pPr algn="ctr"/>
-            <a:r>
-              <a:rPr sz="1500" b="1">
-                <a:solidFill>
-                  <a:srgbClr val="000000"/>
-                </a:solidFill>
-                <a:latin typeface="Arial"/>
-              </a:rPr>
-              <a:t>03</a:t>
-            </a:r>
-          </a:p>
-        </p:txBody>
-      </p:sp>
-      <p:sp>
-        <p:nvSpPr>
-          <p:cNvPr id="20" name="Rectangle 19"/>
-          <p:cNvSpPr/>
-          <p:nvPr/>
-        </p:nvSpPr>
-        <p:spPr>
-          <a:xfrm>
-            <a:off x="1714499" y="3592677"/>
-            <a:ext cx="9921240" cy="724204"/>
-          </a:xfrm>
-          <a:prstGeom prst="rect">
-            <a:avLst/>
-          </a:prstGeom>
-          <a:solidFill>
-            <a:srgbClr val="000000"/>
-          </a:solidFill>
-          <a:ln w="6350">
-            <a:solidFill>
-              <a:srgbClr val="000000"/>
-            </a:solidFill>
-          </a:ln>
-          <a:effectLst/>
-        </p:spPr>
-        <p:style>
-          <a:lnRef idx="1">
-            <a:schemeClr val="accent1"/>
-          </a:lnRef>
-          <a:fillRef idx="3">
-            <a:schemeClr val="accent1"/>
-          </a:fillRef>
-          <a:effectRef idx="2">
-            <a:schemeClr val="accent1"/>
-          </a:effectRef>
-          <a:fontRef idx="minor">
-            <a:schemeClr val="lt1"/>
-          </a:fontRef>
-        </p:style>
-        <p:txBody>
-          <a:bodyPr rtlCol="0" anchor="ctr"/>
-          <a:lstStyle/>
-          <a:p/>
-        </p:txBody>
-      </p:sp>
-      <p:sp>
-        <p:nvSpPr>
-          <p:cNvPr id="21" name="Rectangle 20"/>
-          <p:cNvSpPr/>
-          <p:nvPr/>
-        </p:nvSpPr>
-        <p:spPr>
-          <a:xfrm>
-            <a:off x="1645919" y="3524097"/>
-            <a:ext cx="9921240" cy="724204"/>
-          </a:xfrm>
-          <a:prstGeom prst="rect">
-            <a:avLst/>
-          </a:prstGeom>
-          <a:solidFill>
-            <a:srgbClr val="FFFDF7"/>
-          </a:solidFill>
-          <a:ln w="34925">
-            <a:solidFill>
-              <a:srgbClr val="000000"/>
-            </a:solidFill>
-          </a:ln>
-          <a:effectLst/>
-        </p:spPr>
-        <p:style>
-          <a:lnRef idx="1">
-            <a:schemeClr val="accent1"/>
-          </a:lnRef>
-          <a:fillRef idx="3">
-            <a:schemeClr val="accent1"/>
-          </a:fillRef>
-          <a:effectRef idx="2">
-            <a:schemeClr val="accent1"/>
-          </a:effectRef>
-          <a:fontRef idx="minor">
-            <a:schemeClr val="lt1"/>
-          </a:fontRef>
-        </p:style>
-        <p:txBody>
-          <a:bodyPr rtlCol="0" anchor="ctr"/>
-          <a:lstStyle/>
-          <a:p/>
-        </p:txBody>
-      </p:sp>
-      <p:sp>
-        <p:nvSpPr>
-          <p:cNvPr id="22" name="TextBox 21"/>
-          <p:cNvSpPr txBox="1"/>
-          <p:nvPr/>
-        </p:nvSpPr>
-        <p:spPr>
-          <a:xfrm>
-            <a:off x="1920240" y="3615537"/>
-            <a:ext cx="9372600" cy="541324"/>
-          </a:xfrm>
-          <a:prstGeom prst="rect">
-            <a:avLst/>
-          </a:prstGeom>
-          <a:noFill/>
-        </p:spPr>
-        <p:txBody>
-          <a:bodyPr wrap="square" lIns="0" rIns="0" tIns="0" bIns="0" anchor="ctr">
-            <a:spAutoFit/>
-          </a:bodyPr>
-          <a:lstStyle/>
-          <a:p>
-            <a:pPr algn="l">
-              <a:lnSpc>
-                <a:spcPct val="125000"/>
-              </a:lnSpc>
-            </a:pPr>
-            <a:r>
-              <a:rPr sz="1300">
-                <a:solidFill>
-                  <a:srgbClr val="000000"/>
-                </a:solidFill>
-                <a:latin typeface="Calibri"/>
-              </a:rPr>
-              <a:t>Present Project 3: one module sheet, two array sheets, the plotted attractor field drawing and one Mixtli site-analysis sheet.</a:t>
-            </a:r>
-          </a:p>
-        </p:txBody>
-      </p:sp>
-      <p:sp>
-        <p:nvSpPr>
-          <p:cNvPr id="23" name="Rectangle 22"/>
-          <p:cNvSpPr/>
-          <p:nvPr/>
-        </p:nvSpPr>
-        <p:spPr>
-          <a:xfrm>
-            <a:off x="662940" y="4463186"/>
-            <a:ext cx="777240" cy="724204"/>
-          </a:xfrm>
-          <a:prstGeom prst="rect">
-            <a:avLst/>
-          </a:prstGeom>
-          <a:solidFill>
-            <a:srgbClr val="000000"/>
-          </a:solidFill>
-          <a:ln w="6350">
-            <a:solidFill>
-              <a:srgbClr val="000000"/>
-            </a:solidFill>
-          </a:ln>
-          <a:effectLst/>
-        </p:spPr>
-        <p:style>
-          <a:lnRef idx="1">
-            <a:schemeClr val="accent1"/>
-          </a:lnRef>
-          <a:fillRef idx="3">
-            <a:schemeClr val="accent1"/>
-          </a:fillRef>
-          <a:effectRef idx="2">
-            <a:schemeClr val="accent1"/>
-          </a:effectRef>
-          <a:fontRef idx="minor">
-            <a:schemeClr val="lt1"/>
-          </a:fontRef>
-        </p:style>
-        <p:txBody>
-          <a:bodyPr rtlCol="0" anchor="ctr"/>
-          <a:lstStyle/>
-          <a:p/>
-        </p:txBody>
-      </p:sp>
-      <p:sp>
-        <p:nvSpPr>
-          <p:cNvPr id="24" name="Rectangle 23"/>
-          <p:cNvSpPr/>
-          <p:nvPr/>
-        </p:nvSpPr>
-        <p:spPr>
-          <a:xfrm>
-            <a:off x="594360" y="4394606"/>
-            <a:ext cx="777240" cy="724204"/>
-          </a:xfrm>
-          <a:prstGeom prst="rect">
-            <a:avLst/>
-          </a:prstGeom>
-          <a:solidFill>
-            <a:srgbClr val="FF4D8D"/>
-          </a:solidFill>
-          <a:ln w="34925">
-            <a:solidFill>
-              <a:srgbClr val="000000"/>
-            </a:solidFill>
-          </a:ln>
-          <a:effectLst/>
-        </p:spPr>
-        <p:style>
-          <a:lnRef idx="1">
-            <a:schemeClr val="accent1"/>
-          </a:lnRef>
-          <a:fillRef idx="3">
-            <a:schemeClr val="accent1"/>
-          </a:fillRef>
-          <a:effectRef idx="2">
-            <a:schemeClr val="accent1"/>
-          </a:effectRef>
-          <a:fontRef idx="minor">
-            <a:schemeClr val="lt1"/>
-          </a:fontRef>
-        </p:style>
-        <p:txBody>
-          <a:bodyPr rtlCol="0" anchor="ctr"/>
-          <a:lstStyle/>
-          <a:p/>
-        </p:txBody>
-      </p:sp>
-      <p:sp>
-        <p:nvSpPr>
-          <p:cNvPr id="25" name="TextBox 24"/>
-          <p:cNvSpPr txBox="1"/>
-          <p:nvPr/>
-        </p:nvSpPr>
-        <p:spPr>
-          <a:xfrm>
-            <a:off x="594360" y="4656124"/>
-            <a:ext cx="777240" cy="274320"/>
-          </a:xfrm>
-          <a:prstGeom prst="rect">
-            <a:avLst/>
-          </a:prstGeom>
-          <a:noFill/>
-        </p:spPr>
-        <p:txBody>
-          <a:bodyPr wrap="square" lIns="0" rIns="0" tIns="0" bIns="0" anchor="t">
-            <a:spAutoFit/>
-          </a:bodyPr>
-          <a:lstStyle/>
-          <a:p>
-            <a:pPr algn="ctr"/>
-            <a:r>
-              <a:rPr sz="1500" b="1">
-                <a:solidFill>
-                  <a:srgbClr val="000000"/>
-                </a:solidFill>
-                <a:latin typeface="Arial"/>
-              </a:rPr>
-              <a:t>04</a:t>
-            </a:r>
-          </a:p>
-        </p:txBody>
-      </p:sp>
-      <p:sp>
-        <p:nvSpPr>
-          <p:cNvPr id="26" name="Rectangle 25"/>
-          <p:cNvSpPr/>
-          <p:nvPr/>
-        </p:nvSpPr>
-        <p:spPr>
-          <a:xfrm>
-            <a:off x="1714499" y="4463186"/>
-            <a:ext cx="9921240" cy="724204"/>
-          </a:xfrm>
-          <a:prstGeom prst="rect">
-            <a:avLst/>
-          </a:prstGeom>
-          <a:solidFill>
-            <a:srgbClr val="000000"/>
-          </a:solidFill>
-          <a:ln w="6350">
-            <a:solidFill>
-              <a:srgbClr val="000000"/>
-            </a:solidFill>
-          </a:ln>
-          <a:effectLst/>
-        </p:spPr>
-        <p:style>
-          <a:lnRef idx="1">
-            <a:schemeClr val="accent1"/>
-          </a:lnRef>
-          <a:fillRef idx="3">
-            <a:schemeClr val="accent1"/>
-          </a:fillRef>
-          <a:effectRef idx="2">
-            <a:schemeClr val="accent1"/>
-          </a:effectRef>
-          <a:fontRef idx="minor">
-            <a:schemeClr val="lt1"/>
-          </a:fontRef>
-        </p:style>
-        <p:txBody>
-          <a:bodyPr rtlCol="0" anchor="ctr"/>
-          <a:lstStyle/>
-          <a:p/>
-        </p:txBody>
-      </p:sp>
-      <p:sp>
-        <p:nvSpPr>
-          <p:cNvPr id="27" name="Rectangle 26"/>
-          <p:cNvSpPr/>
-          <p:nvPr/>
-        </p:nvSpPr>
-        <p:spPr>
-          <a:xfrm>
-            <a:off x="1645919" y="4394606"/>
-            <a:ext cx="9921240" cy="724204"/>
-          </a:xfrm>
-          <a:prstGeom prst="rect">
-            <a:avLst/>
-          </a:prstGeom>
-          <a:solidFill>
-            <a:srgbClr val="FFFDF7"/>
-          </a:solidFill>
-          <a:ln w="34925">
-            <a:solidFill>
-              <a:srgbClr val="000000"/>
-            </a:solidFill>
-          </a:ln>
-          <a:effectLst/>
-        </p:spPr>
-        <p:style>
-          <a:lnRef idx="1">
-            <a:schemeClr val="accent1"/>
-          </a:lnRef>
-          <a:fillRef idx="3">
-            <a:schemeClr val="accent1"/>
-          </a:fillRef>
-          <a:effectRef idx="2">
-            <a:schemeClr val="accent1"/>
-          </a:effectRef>
-          <a:fontRef idx="minor">
-            <a:schemeClr val="lt1"/>
-          </a:fontRef>
-        </p:style>
-        <p:txBody>
-          <a:bodyPr rtlCol="0" anchor="ctr"/>
-          <a:lstStyle/>
-          <a:p/>
-        </p:txBody>
-      </p:sp>
-      <p:sp>
-        <p:nvSpPr>
-          <p:cNvPr id="28" name="TextBox 27"/>
-          <p:cNvSpPr txBox="1"/>
-          <p:nvPr/>
-        </p:nvSpPr>
-        <p:spPr>
-          <a:xfrm>
-            <a:off x="1920240" y="4486046"/>
-            <a:ext cx="9372600" cy="541324"/>
-          </a:xfrm>
-          <a:prstGeom prst="rect">
-            <a:avLst/>
-          </a:prstGeom>
-          <a:noFill/>
-        </p:spPr>
-        <p:txBody>
-          <a:bodyPr wrap="square" lIns="0" rIns="0" tIns="0" bIns="0" anchor="ctr">
-            <a:spAutoFit/>
-          </a:bodyPr>
-          <a:lstStyle/>
-          <a:p>
-            <a:pPr algn="l">
-              <a:lnSpc>
-                <a:spcPct val="125000"/>
-              </a:lnSpc>
-            </a:pPr>
-            <a:r>
-              <a:rPr sz="1300">
-                <a:solidFill>
-                  <a:srgbClr val="000000"/>
-                </a:solidFill>
-                <a:latin typeface="Calibri"/>
-              </a:rPr>
-              <a:t>Bring editable files and dependencies. Change a parameter live, predict the result and explain the nodes or the Mixtli analysis settings.</a:t>
-            </a:r>
-          </a:p>
-        </p:txBody>
-      </p:sp>
-      <p:sp>
-        <p:nvSpPr>
-          <p:cNvPr id="29" name="Rectangle 28"/>
-          <p:cNvSpPr/>
-          <p:nvPr/>
-        </p:nvSpPr>
-        <p:spPr>
-          <a:xfrm>
-            <a:off x="662940" y="5333695"/>
-            <a:ext cx="777240" cy="724204"/>
-          </a:xfrm>
-          <a:prstGeom prst="rect">
-            <a:avLst/>
-          </a:prstGeom>
-          <a:solidFill>
-            <a:srgbClr val="000000"/>
-          </a:solidFill>
-          <a:ln w="6350">
-            <a:solidFill>
-              <a:srgbClr val="000000"/>
-            </a:solidFill>
-          </a:ln>
-          <a:effectLst/>
-        </p:spPr>
-        <p:style>
-          <a:lnRef idx="1">
-            <a:schemeClr val="accent1"/>
-          </a:lnRef>
-          <a:fillRef idx="3">
-            <a:schemeClr val="accent1"/>
-          </a:fillRef>
-          <a:effectRef idx="2">
-            <a:schemeClr val="accent1"/>
-          </a:effectRef>
-          <a:fontRef idx="minor">
-            <a:schemeClr val="lt1"/>
-          </a:fontRef>
-        </p:style>
-        <p:txBody>
-          <a:bodyPr rtlCol="0" anchor="ctr"/>
-          <a:lstStyle/>
-          <a:p/>
-        </p:txBody>
-      </p:sp>
-      <p:sp>
-        <p:nvSpPr>
-          <p:cNvPr id="30" name="Rectangle 29"/>
-          <p:cNvSpPr/>
-          <p:nvPr/>
-        </p:nvSpPr>
-        <p:spPr>
-          <a:xfrm>
-            <a:off x="594360" y="5265115"/>
-            <a:ext cx="777240" cy="724204"/>
-          </a:xfrm>
-          <a:prstGeom prst="rect">
-            <a:avLst/>
-          </a:prstGeom>
-          <a:solidFill>
-            <a:srgbClr val="00D9E1"/>
-          </a:solidFill>
-          <a:ln w="34925">
-            <a:solidFill>
-              <a:srgbClr val="000000"/>
-            </a:solidFill>
-          </a:ln>
-          <a:effectLst/>
-        </p:spPr>
-        <p:style>
-          <a:lnRef idx="1">
-            <a:schemeClr val="accent1"/>
-          </a:lnRef>
-          <a:fillRef idx="3">
-            <a:schemeClr val="accent1"/>
-          </a:fillRef>
-          <a:effectRef idx="2">
-            <a:schemeClr val="accent1"/>
-          </a:effectRef>
-          <a:fontRef idx="minor">
-            <a:schemeClr val="lt1"/>
-          </a:fontRef>
-        </p:style>
-        <p:txBody>
-          <a:bodyPr rtlCol="0" anchor="ctr"/>
-          <a:lstStyle/>
-          <a:p/>
-        </p:txBody>
-      </p:sp>
-      <p:sp>
-        <p:nvSpPr>
-          <p:cNvPr id="31" name="TextBox 30"/>
-          <p:cNvSpPr txBox="1"/>
-          <p:nvPr/>
-        </p:nvSpPr>
-        <p:spPr>
-          <a:xfrm>
-            <a:off x="594360" y="5526633"/>
-            <a:ext cx="777240" cy="274320"/>
-          </a:xfrm>
-          <a:prstGeom prst="rect">
-            <a:avLst/>
-          </a:prstGeom>
-          <a:noFill/>
-        </p:spPr>
-        <p:txBody>
-          <a:bodyPr wrap="square" lIns="0" rIns="0" tIns="0" bIns="0" anchor="t">
-            <a:spAutoFit/>
-          </a:bodyPr>
-          <a:lstStyle/>
-          <a:p>
-            <a:pPr algn="ctr"/>
-            <a:r>
-              <a:rPr sz="1500" b="1">
-                <a:solidFill>
-                  <a:srgbClr val="000000"/>
-                </a:solidFill>
-                <a:latin typeface="Arial"/>
-              </a:rPr>
-              <a:t>05</a:t>
-            </a:r>
-          </a:p>
-        </p:txBody>
-      </p:sp>
-      <p:sp>
-        <p:nvSpPr>
-          <p:cNvPr id="32" name="Rectangle 31"/>
-          <p:cNvSpPr/>
-          <p:nvPr/>
-        </p:nvSpPr>
-        <p:spPr>
-          <a:xfrm>
-            <a:off x="1714499" y="5333695"/>
-            <a:ext cx="9921240" cy="724204"/>
-          </a:xfrm>
-          <a:prstGeom prst="rect">
-            <a:avLst/>
-          </a:prstGeom>
-          <a:solidFill>
-            <a:srgbClr val="000000"/>
-          </a:solidFill>
-          <a:ln w="6350">
-            <a:solidFill>
-              <a:srgbClr val="000000"/>
-            </a:solidFill>
-          </a:ln>
-          <a:effectLst/>
-        </p:spPr>
-        <p:style>
-          <a:lnRef idx="1">
-            <a:schemeClr val="accent1"/>
-          </a:lnRef>
-          <a:fillRef idx="3">
-            <a:schemeClr val="accent1"/>
-          </a:fillRef>
-          <a:effectRef idx="2">
-            <a:schemeClr val="accent1"/>
-          </a:effectRef>
-          <a:fontRef idx="minor">
-            <a:schemeClr val="lt1"/>
-          </a:fontRef>
-        </p:style>
-        <p:txBody>
-          <a:bodyPr rtlCol="0" anchor="ctr"/>
-          <a:lstStyle/>
-          <a:p/>
-        </p:txBody>
-      </p:sp>
-      <p:sp>
-        <p:nvSpPr>
-          <p:cNvPr id="33" name="Rectangle 32"/>
-          <p:cNvSpPr/>
-          <p:nvPr/>
-        </p:nvSpPr>
-        <p:spPr>
-          <a:xfrm>
-            <a:off x="1645919" y="5265115"/>
-            <a:ext cx="9921240" cy="724204"/>
-          </a:xfrm>
-          <a:prstGeom prst="rect">
-            <a:avLst/>
-          </a:prstGeom>
-          <a:solidFill>
-            <a:srgbClr val="FFFDF7"/>
-          </a:solidFill>
-          <a:ln w="34925">
-            <a:solidFill>
-              <a:srgbClr val="000000"/>
-            </a:solidFill>
-          </a:ln>
-          <a:effectLst/>
-        </p:spPr>
-        <p:style>
-          <a:lnRef idx="1">
-            <a:schemeClr val="accent1"/>
-          </a:lnRef>
-          <a:fillRef idx="3">
-            <a:schemeClr val="accent1"/>
-          </a:fillRef>
-          <a:effectRef idx="2">
-            <a:schemeClr val="accent1"/>
-          </a:effectRef>
-          <a:fontRef idx="minor">
-            <a:schemeClr val="lt1"/>
-          </a:fontRef>
-        </p:style>
-        <p:txBody>
-          <a:bodyPr rtlCol="0" anchor="ctr"/>
-          <a:lstStyle/>
-          <a:p/>
-        </p:txBody>
-      </p:sp>
-      <p:sp>
-        <p:nvSpPr>
-          <p:cNvPr id="34" name="TextBox 33"/>
-          <p:cNvSpPr txBox="1"/>
-          <p:nvPr/>
-        </p:nvSpPr>
-        <p:spPr>
-          <a:xfrm>
-            <a:off x="1920240" y="5356555"/>
-            <a:ext cx="9372600" cy="541324"/>
-          </a:xfrm>
-          <a:prstGeom prst="rect">
-            <a:avLst/>
-          </a:prstGeom>
-          <a:noFill/>
-        </p:spPr>
-        <p:txBody>
-          <a:bodyPr wrap="square" lIns="0" rIns="0" tIns="0" bIns="0" anchor="ctr">
-            <a:spAutoFit/>
-          </a:bodyPr>
-          <a:lstStyle/>
-          <a:p>
-            <a:pPr algn="l">
-              <a:lnSpc>
-                <a:spcPct val="125000"/>
-              </a:lnSpc>
-            </a:pPr>
-            <a:r>
-              <a:rPr sz="1300">
-                <a:solidFill>
-                  <a:srgbClr val="000000"/>
-                </a:solidFill>
-                <a:latin typeface="Calibri"/>
-              </a:rPr>
-              <a:t>The review assesses revision and coherence across Projects 1-3. Earlier assignment grades remain separate. Project 4 follows the review.</a:t>
-            </a:r>
-          </a:p>
-        </p:txBody>
-      </p:sp>
-    </p:spTree>
-  </p:cSld>
-  <p:clrMapOvr>
-    <a:masterClrMapping/>
-  </p:clrMapOvr>
-</p:sld>
-</file>
-
-<file path=ppt/slides/slide4.xml><?xml version="1.0" encoding="utf-8"?>
-<p:sld xmlns:a="http://schemas.openxmlformats.org/drawingml/2006/main" xmlns:p="http://schemas.openxmlformats.org/presentationml/2006/main" xmlns:r="http://schemas.openxmlformats.org/officeDocument/2006/relationships">
-  <p:cSld>
-    <p:bg>
-      <p:bgPr>
-        <a:solidFill>
-          <a:srgbClr val="FFFDF7"/>
-        </a:solidFill>
-        <a:effectLst/>
-      </p:bgPr>
-    </p:bg>
-    <p:spTree>
-      <p:nvGrpSpPr>
-        <p:cNvPr id="1" name=""/>
-        <p:cNvGrpSpPr/>
-        <p:nvPr/>
-      </p:nvGrpSpPr>
-      <p:grpSpPr/>
-      <p:sp>
-        <p:nvSpPr>
-          <p:cNvPr id="2" name="Rectangle 1"/>
-          <p:cNvSpPr/>
-          <p:nvPr/>
-        </p:nvSpPr>
-        <p:spPr>
-          <a:xfrm>
-            <a:off x="594360" y="566928"/>
-            <a:ext cx="10972800" cy="0"/>
-          </a:xfrm>
-          <a:prstGeom prst="rect">
-            <a:avLst/>
-          </a:prstGeom>
-          <a:noFill/>
-          <a:ln w="50800">
-            <a:solidFill>
-              <a:srgbClr val="000000"/>
-            </a:solidFill>
-          </a:ln>
-          <a:effectLst/>
-        </p:spPr>
-        <p:style>
-          <a:lnRef idx="1">
-            <a:schemeClr val="accent1"/>
-          </a:lnRef>
-          <a:fillRef idx="3">
-            <a:schemeClr val="accent1"/>
-          </a:fillRef>
-          <a:effectRef idx="2">
-            <a:schemeClr val="accent1"/>
-          </a:effectRef>
-          <a:fontRef idx="minor">
-            <a:schemeClr val="lt1"/>
-          </a:fontRef>
-        </p:style>
-        <p:txBody>
-          <a:bodyPr rtlCol="0" anchor="ctr"/>
-          <a:lstStyle/>
-          <a:p>
-            <a:pPr algn="ctr"/>
-          </a:p>
-        </p:txBody>
-      </p:sp>
-      <p:sp>
-        <p:nvSpPr>
-          <p:cNvPr id="3" name="TextBox 2"/>
-          <p:cNvSpPr txBox="1"/>
-          <p:nvPr/>
-        </p:nvSpPr>
-        <p:spPr>
-          <a:xfrm>
-            <a:off x="594360" y="676656"/>
-            <a:ext cx="10972800" cy="566928"/>
-          </a:xfrm>
-          <a:prstGeom prst="rect">
-            <a:avLst/>
-          </a:prstGeom>
-          <a:noFill/>
-        </p:spPr>
-        <p:txBody>
-          <a:bodyPr wrap="square" lIns="0" rIns="0" tIns="0" bIns="0" anchor="t">
-            <a:spAutoFit/>
-          </a:bodyPr>
-          <a:lstStyle/>
-          <a:p>
-            <a:pPr algn="l"/>
-            <a:r>
-              <a:rPr sz="3300" b="1">
-                <a:solidFill>
-                  <a:srgbClr val="000000"/>
-                </a:solidFill>
-                <a:latin typeface="Arial"/>
-              </a:rPr>
-              <a:t>PART 2 — A MESH OR A FIELD</a:t>
+              <a:t>A MESH OR A FIELD</a:t>
             </a:r>
           </a:p>
         </p:txBody>
@@ -12362,7 +9561,7 @@
 </p:sld>
 </file>
 
-<file path=ppt/slides/slide5.xml><?xml version="1.0" encoding="utf-8"?>
+<file path=ppt/slides/slide4.xml><?xml version="1.0" encoding="utf-8"?>
 <p:sld xmlns:a="http://schemas.openxmlformats.org/drawingml/2006/main" xmlns:p="http://schemas.openxmlformats.org/presentationml/2006/main" xmlns:r="http://schemas.openxmlformats.org/officeDocument/2006/relationships">
   <p:cSld>
     <p:bg>
@@ -17600,7 +14799,7 @@
 </p:sld>
 </file>
 
-<file path=ppt/slides/slide6.xml><?xml version="1.0" encoding="utf-8"?>
+<file path=ppt/slides/slide5.xml><?xml version="1.0" encoding="utf-8"?>
 <p:sld xmlns:a="http://schemas.openxmlformats.org/drawingml/2006/main" xmlns:p="http://schemas.openxmlformats.org/presentationml/2006/main" xmlns:r="http://schemas.openxmlformats.org/officeDocument/2006/relationships">
   <p:cSld>
     <p:bg>
@@ -20837,7 +18036,7 @@
 </p:sld>
 </file>
 
-<file path=ppt/slides/slide7.xml><?xml version="1.0" encoding="utf-8"?>
+<file path=ppt/slides/slide6.xml><?xml version="1.0" encoding="utf-8"?>
 <p:sld xmlns:a="http://schemas.openxmlformats.org/drawingml/2006/main" xmlns:p="http://schemas.openxmlformats.org/presentationml/2006/main" xmlns:r="http://schemas.openxmlformats.org/officeDocument/2006/relationships">
   <p:cSld>
     <p:bg>
@@ -30981,7 +28180,7 @@
 </p:sld>
 </file>
 
-<file path=ppt/slides/slide8.xml><?xml version="1.0" encoding="utf-8"?>
+<file path=ppt/slides/slide7.xml><?xml version="1.0" encoding="utf-8"?>
 <p:sld xmlns:a="http://schemas.openxmlformats.org/drawingml/2006/main" xmlns:p="http://schemas.openxmlformats.org/presentationml/2006/main" xmlns:r="http://schemas.openxmlformats.org/officeDocument/2006/relationships">
   <p:cSld>
     <p:bg>
@@ -32099,7 +29298,7 @@
 </p:sld>
 </file>
 
-<file path=ppt/slides/slide9.xml><?xml version="1.0" encoding="utf-8"?>
+<file path=ppt/slides/slide8.xml><?xml version="1.0" encoding="utf-8"?>
 <p:sld xmlns:a="http://schemas.openxmlformats.org/drawingml/2006/main" xmlns:p="http://schemas.openxmlformats.org/presentationml/2006/main" xmlns:r="http://schemas.openxmlformats.org/officeDocument/2006/relationships">
   <p:cSld>
     <p:bg>
@@ -33556,6 +30755,1163 @@
                 <a:latin typeface="Arial"/>
               </a:rPr>
               <a:t>FROM “def field” DOWN IS P4a: TWO FIELDS, ONE BLEND, ONE GRID, ONE SURFACE AT ZERO.</a:t>
+            </a:r>
+          </a:p>
+        </p:txBody>
+      </p:sp>
+    </p:spTree>
+  </p:cSld>
+  <p:clrMapOvr>
+    <a:masterClrMapping/>
+  </p:clrMapOvr>
+</p:sld>
+</file>
+
+<file path=ppt/slides/slide9.xml><?xml version="1.0" encoding="utf-8"?>
+<p:sld xmlns:a="http://schemas.openxmlformats.org/drawingml/2006/main" xmlns:p="http://schemas.openxmlformats.org/presentationml/2006/main" xmlns:r="http://schemas.openxmlformats.org/officeDocument/2006/relationships">
+  <p:cSld>
+    <p:bg>
+      <p:bgPr>
+        <a:solidFill>
+          <a:srgbClr val="000000"/>
+        </a:solidFill>
+        <a:effectLst/>
+      </p:bgPr>
+    </p:bg>
+    <p:spTree>
+      <p:nvGrpSpPr>
+        <p:cNvPr id="1" name=""/>
+        <p:cNvGrpSpPr/>
+        <p:nvPr/>
+      </p:nvGrpSpPr>
+      <p:grpSpPr/>
+      <p:sp>
+        <p:nvSpPr>
+          <p:cNvPr id="2" name="Rectangle 1"/>
+          <p:cNvSpPr/>
+          <p:nvPr/>
+        </p:nvSpPr>
+        <p:spPr>
+          <a:xfrm>
+            <a:off x="662940" y="635508"/>
+            <a:ext cx="2194560" cy="384048"/>
+          </a:xfrm>
+          <a:prstGeom prst="rect">
+            <a:avLst/>
+          </a:prstGeom>
+          <a:solidFill>
+            <a:srgbClr val="000000"/>
+          </a:solidFill>
+          <a:ln w="6350">
+            <a:solidFill>
+              <a:srgbClr val="000000"/>
+            </a:solidFill>
+          </a:ln>
+          <a:effectLst/>
+        </p:spPr>
+        <p:style>
+          <a:lnRef idx="1">
+            <a:schemeClr val="accent1"/>
+          </a:lnRef>
+          <a:fillRef idx="3">
+            <a:schemeClr val="accent1"/>
+          </a:fillRef>
+          <a:effectRef idx="2">
+            <a:schemeClr val="accent1"/>
+          </a:effectRef>
+          <a:fontRef idx="minor">
+            <a:schemeClr val="lt1"/>
+          </a:fontRef>
+        </p:style>
+        <p:txBody>
+          <a:bodyPr rtlCol="0" anchor="ctr"/>
+          <a:lstStyle/>
+          <a:p/>
+        </p:txBody>
+      </p:sp>
+      <p:sp>
+        <p:nvSpPr>
+          <p:cNvPr id="3" name="Rectangle 2"/>
+          <p:cNvSpPr/>
+          <p:nvPr/>
+        </p:nvSpPr>
+        <p:spPr>
+          <a:xfrm>
+            <a:off x="594360" y="566928"/>
+            <a:ext cx="2194560" cy="384048"/>
+          </a:xfrm>
+          <a:prstGeom prst="rect">
+            <a:avLst/>
+          </a:prstGeom>
+          <a:solidFill>
+            <a:srgbClr val="FFE500"/>
+          </a:solidFill>
+          <a:ln w="34925">
+            <a:solidFill>
+              <a:srgbClr val="000000"/>
+            </a:solidFill>
+          </a:ln>
+          <a:effectLst/>
+        </p:spPr>
+        <p:style>
+          <a:lnRef idx="1">
+            <a:schemeClr val="accent1"/>
+          </a:lnRef>
+          <a:fillRef idx="3">
+            <a:schemeClr val="accent1"/>
+          </a:fillRef>
+          <a:effectRef idx="2">
+            <a:schemeClr val="accent1"/>
+          </a:effectRef>
+          <a:fontRef idx="minor">
+            <a:schemeClr val="lt1"/>
+          </a:fontRef>
+        </p:style>
+        <p:txBody>
+          <a:bodyPr rtlCol="0" anchor="ctr"/>
+          <a:lstStyle/>
+          <a:p/>
+        </p:txBody>
+      </p:sp>
+      <p:sp>
+        <p:nvSpPr>
+          <p:cNvPr id="4" name="TextBox 3"/>
+          <p:cNvSpPr txBox="1"/>
+          <p:nvPr/>
+        </p:nvSpPr>
+        <p:spPr>
+          <a:xfrm>
+            <a:off x="594360" y="658368"/>
+            <a:ext cx="2194560" cy="274320"/>
+          </a:xfrm>
+          <a:prstGeom prst="rect">
+            <a:avLst/>
+          </a:prstGeom>
+          <a:noFill/>
+        </p:spPr>
+        <p:txBody>
+          <a:bodyPr wrap="square" lIns="0" rIns="0" tIns="0" bIns="0" anchor="t">
+            <a:spAutoFit/>
+          </a:bodyPr>
+          <a:lstStyle/>
+          <a:p>
+            <a:pPr algn="ctr"/>
+            <a:r>
+              <a:rPr sz="1100" b="1">
+                <a:solidFill>
+                  <a:srgbClr val="000000"/>
+                </a:solidFill>
+                <a:latin typeface="Arial"/>
+              </a:rPr>
+              <a:t>ISSUED TODAY</a:t>
+            </a:r>
+          </a:p>
+        </p:txBody>
+      </p:sp>
+      <p:sp>
+        <p:nvSpPr>
+          <p:cNvPr id="5" name="TextBox 4"/>
+          <p:cNvSpPr txBox="1"/>
+          <p:nvPr/>
+        </p:nvSpPr>
+        <p:spPr>
+          <a:xfrm>
+            <a:off x="594360" y="1152144"/>
+            <a:ext cx="10972800" cy="566928"/>
+          </a:xfrm>
+          <a:prstGeom prst="rect">
+            <a:avLst/>
+          </a:prstGeom>
+          <a:noFill/>
+        </p:spPr>
+        <p:txBody>
+          <a:bodyPr wrap="square" lIns="0" rIns="0" tIns="0" bIns="0" anchor="t">
+            <a:spAutoFit/>
+          </a:bodyPr>
+          <a:lstStyle/>
+          <a:p>
+            <a:pPr algn="l"/>
+            <a:r>
+              <a:rPr sz="3200" b="1">
+                <a:solidFill>
+                  <a:srgbClr val="FFFDF7"/>
+                </a:solidFill>
+                <a:latin typeface="Arial"/>
+              </a:rPr>
+              <a:t>P4a — SDF VOLUME</a:t>
+            </a:r>
+          </a:p>
+        </p:txBody>
+      </p:sp>
+      <p:sp>
+        <p:nvSpPr>
+          <p:cNvPr id="6" name="Rectangle 5"/>
+          <p:cNvSpPr/>
+          <p:nvPr/>
+        </p:nvSpPr>
+        <p:spPr>
+          <a:xfrm>
+            <a:off x="594360" y="1810512"/>
+            <a:ext cx="10972800" cy="0"/>
+          </a:xfrm>
+          <a:prstGeom prst="rect">
+            <a:avLst/>
+          </a:prstGeom>
+          <a:noFill/>
+          <a:ln w="50800">
+            <a:solidFill>
+              <a:srgbClr val="FFFDF7"/>
+            </a:solidFill>
+          </a:ln>
+          <a:effectLst/>
+        </p:spPr>
+        <p:style>
+          <a:lnRef idx="1">
+            <a:schemeClr val="accent1"/>
+          </a:lnRef>
+          <a:fillRef idx="3">
+            <a:schemeClr val="accent1"/>
+          </a:fillRef>
+          <a:effectRef idx="2">
+            <a:schemeClr val="accent1"/>
+          </a:effectRef>
+          <a:fontRef idx="minor">
+            <a:schemeClr val="lt1"/>
+          </a:fontRef>
+        </p:style>
+        <p:txBody>
+          <a:bodyPr rtlCol="0" anchor="ctr"/>
+          <a:lstStyle/>
+          <a:p>
+            <a:pPr algn="ctr"/>
+          </a:p>
+        </p:txBody>
+      </p:sp>
+      <p:sp>
+        <p:nvSpPr>
+          <p:cNvPr id="7" name="TextBox 6"/>
+          <p:cNvSpPr txBox="1"/>
+          <p:nvPr/>
+        </p:nvSpPr>
+        <p:spPr>
+          <a:xfrm>
+            <a:off x="594360" y="1929384"/>
+            <a:ext cx="10972800" cy="329184"/>
+          </a:xfrm>
+          <a:prstGeom prst="rect">
+            <a:avLst/>
+          </a:prstGeom>
+          <a:noFill/>
+        </p:spPr>
+        <p:txBody>
+          <a:bodyPr wrap="square" lIns="0" rIns="0" tIns="0" bIns="0" anchor="t">
+            <a:spAutoFit/>
+          </a:bodyPr>
+          <a:lstStyle/>
+          <a:p>
+            <a:pPr algn="l"/>
+            <a:r>
+              <a:rPr sz="1300" b="1">
+                <a:solidFill>
+                  <a:srgbClr val="FFE500"/>
+                </a:solidFill>
+                <a:latin typeface="Arial"/>
+              </a:rPr>
+              <a:t>DUE WEEK 12 — Nov 10   /   14%</a:t>
+            </a:r>
+          </a:p>
+        </p:txBody>
+      </p:sp>
+      <p:sp>
+        <p:nvSpPr>
+          <p:cNvPr id="8" name="TextBox 7"/>
+          <p:cNvSpPr txBox="1"/>
+          <p:nvPr/>
+        </p:nvSpPr>
+        <p:spPr>
+          <a:xfrm>
+            <a:off x="594360" y="2377440"/>
+            <a:ext cx="10607040" cy="914400"/>
+          </a:xfrm>
+          <a:prstGeom prst="rect">
+            <a:avLst/>
+          </a:prstGeom>
+          <a:noFill/>
+        </p:spPr>
+        <p:txBody>
+          <a:bodyPr wrap="square" lIns="0" rIns="0" tIns="0" bIns="0" anchor="t">
+            <a:spAutoFit/>
+          </a:bodyPr>
+          <a:lstStyle/>
+          <a:p>
+            <a:pPr algn="l">
+              <a:lnSpc>
+                <a:spcPct val="130000"/>
+              </a:lnSpc>
+            </a:pPr>
+            <a:r>
+              <a:rPr sz="1500">
+                <a:solidFill>
+                  <a:srgbClr val="FFFDF7"/>
+                </a:solidFill>
+                <a:latin typeface="Calibri"/>
+              </a:rPr>
+              <a:t>Project 4 begins. Build a volume from signed distance fields — the CSG logic from P2, applied to fields instead of meshes — and choose the one you will slice and laser-cut in P4b.</a:t>
+            </a:r>
+          </a:p>
+        </p:txBody>
+      </p:sp>
+      <p:sp>
+        <p:nvSpPr>
+          <p:cNvPr id="9" name="Rectangle 8"/>
+          <p:cNvSpPr/>
+          <p:nvPr/>
+        </p:nvSpPr>
+        <p:spPr>
+          <a:xfrm>
+            <a:off x="662940" y="3680460"/>
+            <a:ext cx="3517391" cy="411480"/>
+          </a:xfrm>
+          <a:prstGeom prst="rect">
+            <a:avLst/>
+          </a:prstGeom>
+          <a:solidFill>
+            <a:srgbClr val="000000"/>
+          </a:solidFill>
+          <a:ln w="6350">
+            <a:solidFill>
+              <a:srgbClr val="000000"/>
+            </a:solidFill>
+          </a:ln>
+          <a:effectLst/>
+        </p:spPr>
+        <p:style>
+          <a:lnRef idx="1">
+            <a:schemeClr val="accent1"/>
+          </a:lnRef>
+          <a:fillRef idx="3">
+            <a:schemeClr val="accent1"/>
+          </a:fillRef>
+          <a:effectRef idx="2">
+            <a:schemeClr val="accent1"/>
+          </a:effectRef>
+          <a:fontRef idx="minor">
+            <a:schemeClr val="lt1"/>
+          </a:fontRef>
+        </p:style>
+        <p:txBody>
+          <a:bodyPr rtlCol="0" anchor="ctr"/>
+          <a:lstStyle/>
+          <a:p/>
+        </p:txBody>
+      </p:sp>
+      <p:sp>
+        <p:nvSpPr>
+          <p:cNvPr id="10" name="Rectangle 9"/>
+          <p:cNvSpPr/>
+          <p:nvPr/>
+        </p:nvSpPr>
+        <p:spPr>
+          <a:xfrm>
+            <a:off x="594360" y="3611880"/>
+            <a:ext cx="3517391" cy="411480"/>
+          </a:xfrm>
+          <a:prstGeom prst="rect">
+            <a:avLst/>
+          </a:prstGeom>
+          <a:solidFill>
+            <a:srgbClr val="00D9E1"/>
+          </a:solidFill>
+          <a:ln w="34925">
+            <a:solidFill>
+              <a:srgbClr val="000000"/>
+            </a:solidFill>
+          </a:ln>
+          <a:effectLst/>
+        </p:spPr>
+        <p:style>
+          <a:lnRef idx="1">
+            <a:schemeClr val="accent1"/>
+          </a:lnRef>
+          <a:fillRef idx="3">
+            <a:schemeClr val="accent1"/>
+          </a:fillRef>
+          <a:effectRef idx="2">
+            <a:schemeClr val="accent1"/>
+          </a:effectRef>
+          <a:fontRef idx="minor">
+            <a:schemeClr val="lt1"/>
+          </a:fontRef>
+        </p:style>
+        <p:txBody>
+          <a:bodyPr rtlCol="0" anchor="ctr"/>
+          <a:lstStyle/>
+          <a:p/>
+        </p:txBody>
+      </p:sp>
+      <p:sp>
+        <p:nvSpPr>
+          <p:cNvPr id="11" name="TextBox 10"/>
+          <p:cNvSpPr txBox="1"/>
+          <p:nvPr/>
+        </p:nvSpPr>
+        <p:spPr>
+          <a:xfrm>
+            <a:off x="594360" y="3717036"/>
+            <a:ext cx="3517391" cy="274320"/>
+          </a:xfrm>
+          <a:prstGeom prst="rect">
+            <a:avLst/>
+          </a:prstGeom>
+          <a:noFill/>
+        </p:spPr>
+        <p:txBody>
+          <a:bodyPr wrap="square" lIns="0" rIns="0" tIns="0" bIns="0" anchor="t">
+            <a:spAutoFit/>
+          </a:bodyPr>
+          <a:lstStyle/>
+          <a:p>
+            <a:pPr algn="ctr"/>
+            <a:r>
+              <a:rPr sz="1100" b="1">
+                <a:solidFill>
+                  <a:srgbClr val="000000"/>
+                </a:solidFill>
+                <a:latin typeface="Arial"/>
+              </a:rPr>
+              <a:t>COMPARE</a:t>
+            </a:r>
+          </a:p>
+        </p:txBody>
+      </p:sp>
+      <p:sp>
+        <p:nvSpPr>
+          <p:cNvPr id="12" name="Rectangle 11"/>
+          <p:cNvSpPr/>
+          <p:nvPr/>
+        </p:nvSpPr>
+        <p:spPr>
+          <a:xfrm>
+            <a:off x="662940" y="4183380"/>
+            <a:ext cx="3517391" cy="1463040"/>
+          </a:xfrm>
+          <a:prstGeom prst="rect">
+            <a:avLst/>
+          </a:prstGeom>
+          <a:solidFill>
+            <a:srgbClr val="000000"/>
+          </a:solidFill>
+          <a:ln w="6350">
+            <a:solidFill>
+              <a:srgbClr val="000000"/>
+            </a:solidFill>
+          </a:ln>
+          <a:effectLst/>
+        </p:spPr>
+        <p:style>
+          <a:lnRef idx="1">
+            <a:schemeClr val="accent1"/>
+          </a:lnRef>
+          <a:fillRef idx="3">
+            <a:schemeClr val="accent1"/>
+          </a:fillRef>
+          <a:effectRef idx="2">
+            <a:schemeClr val="accent1"/>
+          </a:effectRef>
+          <a:fontRef idx="minor">
+            <a:schemeClr val="lt1"/>
+          </a:fontRef>
+        </p:style>
+        <p:txBody>
+          <a:bodyPr rtlCol="0" anchor="ctr"/>
+          <a:lstStyle/>
+          <a:p/>
+        </p:txBody>
+      </p:sp>
+      <p:sp>
+        <p:nvSpPr>
+          <p:cNvPr id="13" name="Rectangle 12"/>
+          <p:cNvSpPr/>
+          <p:nvPr/>
+        </p:nvSpPr>
+        <p:spPr>
+          <a:xfrm>
+            <a:off x="594360" y="4114800"/>
+            <a:ext cx="3517391" cy="1463040"/>
+          </a:xfrm>
+          <a:prstGeom prst="rect">
+            <a:avLst/>
+          </a:prstGeom>
+          <a:solidFill>
+            <a:srgbClr val="FFFDF7"/>
+          </a:solidFill>
+          <a:ln w="34925">
+            <a:solidFill>
+              <a:srgbClr val="000000"/>
+            </a:solidFill>
+          </a:ln>
+          <a:effectLst/>
+        </p:spPr>
+        <p:style>
+          <a:lnRef idx="1">
+            <a:schemeClr val="accent1"/>
+          </a:lnRef>
+          <a:fillRef idx="3">
+            <a:schemeClr val="accent1"/>
+          </a:fillRef>
+          <a:effectRef idx="2">
+            <a:schemeClr val="accent1"/>
+          </a:effectRef>
+          <a:fontRef idx="minor">
+            <a:schemeClr val="lt1"/>
+          </a:fontRef>
+        </p:style>
+        <p:txBody>
+          <a:bodyPr rtlCol="0" anchor="ctr"/>
+          <a:lstStyle/>
+          <a:p/>
+        </p:txBody>
+      </p:sp>
+      <p:sp>
+        <p:nvSpPr>
+          <p:cNvPr id="14" name="TextBox 13"/>
+          <p:cNvSpPr txBox="1"/>
+          <p:nvPr/>
+        </p:nvSpPr>
+        <p:spPr>
+          <a:xfrm>
+            <a:off x="850392" y="4279392"/>
+            <a:ext cx="3005327" cy="320040"/>
+          </a:xfrm>
+          <a:prstGeom prst="rect">
+            <a:avLst/>
+          </a:prstGeom>
+          <a:noFill/>
+        </p:spPr>
+        <p:txBody>
+          <a:bodyPr wrap="square" lIns="0" rIns="0" tIns="0" bIns="0" anchor="t">
+            <a:spAutoFit/>
+          </a:bodyPr>
+          <a:lstStyle/>
+          <a:p>
+            <a:pPr algn="l"/>
+            <a:r>
+              <a:rPr sz="1400" b="1">
+                <a:solidFill>
+                  <a:srgbClr val="000000"/>
+                </a:solidFill>
+                <a:latin typeface="Arial"/>
+              </a:rPr>
+              <a:t>SAME FIELDS</a:t>
+            </a:r>
+          </a:p>
+        </p:txBody>
+      </p:sp>
+      <p:sp>
+        <p:nvSpPr>
+          <p:cNvPr id="15" name="TextBox 14"/>
+          <p:cNvSpPr txBox="1"/>
+          <p:nvPr/>
+        </p:nvSpPr>
+        <p:spPr>
+          <a:xfrm>
+            <a:off x="850392" y="4663440"/>
+            <a:ext cx="3005327" cy="822960"/>
+          </a:xfrm>
+          <a:prstGeom prst="rect">
+            <a:avLst/>
+          </a:prstGeom>
+          <a:noFill/>
+        </p:spPr>
+        <p:txBody>
+          <a:bodyPr wrap="square" lIns="0" rIns="0" tIns="0" bIns="0" anchor="t">
+            <a:spAutoFit/>
+          </a:bodyPr>
+          <a:lstStyle/>
+          <a:p>
+            <a:pPr algn="l">
+              <a:lnSpc>
+                <a:spcPct val="125000"/>
+              </a:lnSpc>
+            </a:pPr>
+            <a:r>
+              <a:rPr sz="1250">
+                <a:solidFill>
+                  <a:srgbClr val="000000"/>
+                </a:solidFill>
+                <a:latin typeface="Calibri"/>
+              </a:rPr>
+              <a:t>Union, intersection and difference of the same sources.</a:t>
+            </a:r>
+          </a:p>
+        </p:txBody>
+      </p:sp>
+      <p:sp>
+        <p:nvSpPr>
+          <p:cNvPr id="16" name="Rectangle 15"/>
+          <p:cNvSpPr/>
+          <p:nvPr/>
+        </p:nvSpPr>
+        <p:spPr>
+          <a:xfrm>
+            <a:off x="4390644" y="3680460"/>
+            <a:ext cx="3517391" cy="411480"/>
+          </a:xfrm>
+          <a:prstGeom prst="rect">
+            <a:avLst/>
+          </a:prstGeom>
+          <a:solidFill>
+            <a:srgbClr val="000000"/>
+          </a:solidFill>
+          <a:ln w="6350">
+            <a:solidFill>
+              <a:srgbClr val="000000"/>
+            </a:solidFill>
+          </a:ln>
+          <a:effectLst/>
+        </p:spPr>
+        <p:style>
+          <a:lnRef idx="1">
+            <a:schemeClr val="accent1"/>
+          </a:lnRef>
+          <a:fillRef idx="3">
+            <a:schemeClr val="accent1"/>
+          </a:fillRef>
+          <a:effectRef idx="2">
+            <a:schemeClr val="accent1"/>
+          </a:effectRef>
+          <a:fontRef idx="minor">
+            <a:schemeClr val="lt1"/>
+          </a:fontRef>
+        </p:style>
+        <p:txBody>
+          <a:bodyPr rtlCol="0" anchor="ctr"/>
+          <a:lstStyle/>
+          <a:p/>
+        </p:txBody>
+      </p:sp>
+      <p:sp>
+        <p:nvSpPr>
+          <p:cNvPr id="17" name="Rectangle 16"/>
+          <p:cNvSpPr/>
+          <p:nvPr/>
+        </p:nvSpPr>
+        <p:spPr>
+          <a:xfrm>
+            <a:off x="4322064" y="3611880"/>
+            <a:ext cx="3517391" cy="411480"/>
+          </a:xfrm>
+          <a:prstGeom prst="rect">
+            <a:avLst/>
+          </a:prstGeom>
+          <a:solidFill>
+            <a:srgbClr val="C6F035"/>
+          </a:solidFill>
+          <a:ln w="34925">
+            <a:solidFill>
+              <a:srgbClr val="000000"/>
+            </a:solidFill>
+          </a:ln>
+          <a:effectLst/>
+        </p:spPr>
+        <p:style>
+          <a:lnRef idx="1">
+            <a:schemeClr val="accent1"/>
+          </a:lnRef>
+          <a:fillRef idx="3">
+            <a:schemeClr val="accent1"/>
+          </a:fillRef>
+          <a:effectRef idx="2">
+            <a:schemeClr val="accent1"/>
+          </a:effectRef>
+          <a:fontRef idx="minor">
+            <a:schemeClr val="lt1"/>
+          </a:fontRef>
+        </p:style>
+        <p:txBody>
+          <a:bodyPr rtlCol="0" anchor="ctr"/>
+          <a:lstStyle/>
+          <a:p/>
+        </p:txBody>
+      </p:sp>
+      <p:sp>
+        <p:nvSpPr>
+          <p:cNvPr id="18" name="TextBox 17"/>
+          <p:cNvSpPr txBox="1"/>
+          <p:nvPr/>
+        </p:nvSpPr>
+        <p:spPr>
+          <a:xfrm>
+            <a:off x="4322064" y="3717036"/>
+            <a:ext cx="3517391" cy="274320"/>
+          </a:xfrm>
+          <a:prstGeom prst="rect">
+            <a:avLst/>
+          </a:prstGeom>
+          <a:noFill/>
+        </p:spPr>
+        <p:txBody>
+          <a:bodyPr wrap="square" lIns="0" rIns="0" tIns="0" bIns="0" anchor="t">
+            <a:spAutoFit/>
+          </a:bodyPr>
+          <a:lstStyle/>
+          <a:p>
+            <a:pPr algn="ctr"/>
+            <a:r>
+              <a:rPr sz="1100" b="1">
+                <a:solidFill>
+                  <a:srgbClr val="000000"/>
+                </a:solidFill>
+                <a:latin typeface="Arial"/>
+              </a:rPr>
+              <a:t>VARY</a:t>
+            </a:r>
+          </a:p>
+        </p:txBody>
+      </p:sp>
+      <p:sp>
+        <p:nvSpPr>
+          <p:cNvPr id="19" name="Rectangle 18"/>
+          <p:cNvSpPr/>
+          <p:nvPr/>
+        </p:nvSpPr>
+        <p:spPr>
+          <a:xfrm>
+            <a:off x="4390644" y="4183380"/>
+            <a:ext cx="3517391" cy="1463040"/>
+          </a:xfrm>
+          <a:prstGeom prst="rect">
+            <a:avLst/>
+          </a:prstGeom>
+          <a:solidFill>
+            <a:srgbClr val="000000"/>
+          </a:solidFill>
+          <a:ln w="6350">
+            <a:solidFill>
+              <a:srgbClr val="000000"/>
+            </a:solidFill>
+          </a:ln>
+          <a:effectLst/>
+        </p:spPr>
+        <p:style>
+          <a:lnRef idx="1">
+            <a:schemeClr val="accent1"/>
+          </a:lnRef>
+          <a:fillRef idx="3">
+            <a:schemeClr val="accent1"/>
+          </a:fillRef>
+          <a:effectRef idx="2">
+            <a:schemeClr val="accent1"/>
+          </a:effectRef>
+          <a:fontRef idx="minor">
+            <a:schemeClr val="lt1"/>
+          </a:fontRef>
+        </p:style>
+        <p:txBody>
+          <a:bodyPr rtlCol="0" anchor="ctr"/>
+          <a:lstStyle/>
+          <a:p/>
+        </p:txBody>
+      </p:sp>
+      <p:sp>
+        <p:nvSpPr>
+          <p:cNvPr id="20" name="Rectangle 19"/>
+          <p:cNvSpPr/>
+          <p:nvPr/>
+        </p:nvSpPr>
+        <p:spPr>
+          <a:xfrm>
+            <a:off x="4322064" y="4114800"/>
+            <a:ext cx="3517391" cy="1463040"/>
+          </a:xfrm>
+          <a:prstGeom prst="rect">
+            <a:avLst/>
+          </a:prstGeom>
+          <a:solidFill>
+            <a:srgbClr val="FFFDF7"/>
+          </a:solidFill>
+          <a:ln w="34925">
+            <a:solidFill>
+              <a:srgbClr val="000000"/>
+            </a:solidFill>
+          </a:ln>
+          <a:effectLst/>
+        </p:spPr>
+        <p:style>
+          <a:lnRef idx="1">
+            <a:schemeClr val="accent1"/>
+          </a:lnRef>
+          <a:fillRef idx="3">
+            <a:schemeClr val="accent1"/>
+          </a:fillRef>
+          <a:effectRef idx="2">
+            <a:schemeClr val="accent1"/>
+          </a:effectRef>
+          <a:fontRef idx="minor">
+            <a:schemeClr val="lt1"/>
+          </a:fontRef>
+        </p:style>
+        <p:txBody>
+          <a:bodyPr rtlCol="0" anchor="ctr"/>
+          <a:lstStyle/>
+          <a:p/>
+        </p:txBody>
+      </p:sp>
+      <p:sp>
+        <p:nvSpPr>
+          <p:cNvPr id="21" name="TextBox 20"/>
+          <p:cNvSpPr txBox="1"/>
+          <p:nvPr/>
+        </p:nvSpPr>
+        <p:spPr>
+          <a:xfrm>
+            <a:off x="4578096" y="4279392"/>
+            <a:ext cx="3005327" cy="320040"/>
+          </a:xfrm>
+          <a:prstGeom prst="rect">
+            <a:avLst/>
+          </a:prstGeom>
+          <a:noFill/>
+        </p:spPr>
+        <p:txBody>
+          <a:bodyPr wrap="square" lIns="0" rIns="0" tIns="0" bIns="0" anchor="t">
+            <a:spAutoFit/>
+          </a:bodyPr>
+          <a:lstStyle/>
+          <a:p>
+            <a:pPr algn="l"/>
+            <a:r>
+              <a:rPr sz="1400" b="1">
+                <a:solidFill>
+                  <a:srgbClr val="000000"/>
+                </a:solidFill>
+                <a:latin typeface="Arial"/>
+              </a:rPr>
+              <a:t>THREE VARIANTS</a:t>
+            </a:r>
+          </a:p>
+        </p:txBody>
+      </p:sp>
+      <p:sp>
+        <p:nvSpPr>
+          <p:cNvPr id="22" name="TextBox 21"/>
+          <p:cNvSpPr txBox="1"/>
+          <p:nvPr/>
+        </p:nvSpPr>
+        <p:spPr>
+          <a:xfrm>
+            <a:off x="4578096" y="4663440"/>
+            <a:ext cx="3005327" cy="822960"/>
+          </a:xfrm>
+          <a:prstGeom prst="rect">
+            <a:avLst/>
+          </a:prstGeom>
+          <a:noFill/>
+        </p:spPr>
+        <p:txBody>
+          <a:bodyPr wrap="square" lIns="0" rIns="0" tIns="0" bIns="0" anchor="t">
+            <a:spAutoFit/>
+          </a:bodyPr>
+          <a:lstStyle/>
+          <a:p>
+            <a:pPr algn="l">
+              <a:lnSpc>
+                <a:spcPct val="125000"/>
+              </a:lnSpc>
+            </a:pPr>
+            <a:r>
+              <a:rPr sz="1250">
+                <a:solidFill>
+                  <a:srgbClr val="000000"/>
+                </a:solidFill>
+                <a:latin typeface="Calibri"/>
+              </a:rPr>
+              <a:t>Three controlled parameter changes on the chosen result.</a:t>
+            </a:r>
+          </a:p>
+        </p:txBody>
+      </p:sp>
+      <p:sp>
+        <p:nvSpPr>
+          <p:cNvPr id="23" name="Rectangle 22"/>
+          <p:cNvSpPr/>
+          <p:nvPr/>
+        </p:nvSpPr>
+        <p:spPr>
+          <a:xfrm>
+            <a:off x="8118347" y="3680460"/>
+            <a:ext cx="3517391" cy="411480"/>
+          </a:xfrm>
+          <a:prstGeom prst="rect">
+            <a:avLst/>
+          </a:prstGeom>
+          <a:solidFill>
+            <a:srgbClr val="000000"/>
+          </a:solidFill>
+          <a:ln w="6350">
+            <a:solidFill>
+              <a:srgbClr val="000000"/>
+            </a:solidFill>
+          </a:ln>
+          <a:effectLst/>
+        </p:spPr>
+        <p:style>
+          <a:lnRef idx="1">
+            <a:schemeClr val="accent1"/>
+          </a:lnRef>
+          <a:fillRef idx="3">
+            <a:schemeClr val="accent1"/>
+          </a:fillRef>
+          <a:effectRef idx="2">
+            <a:schemeClr val="accent1"/>
+          </a:effectRef>
+          <a:fontRef idx="minor">
+            <a:schemeClr val="lt1"/>
+          </a:fontRef>
+        </p:style>
+        <p:txBody>
+          <a:bodyPr rtlCol="0" anchor="ctr"/>
+          <a:lstStyle/>
+          <a:p/>
+        </p:txBody>
+      </p:sp>
+      <p:sp>
+        <p:nvSpPr>
+          <p:cNvPr id="24" name="Rectangle 23"/>
+          <p:cNvSpPr/>
+          <p:nvPr/>
+        </p:nvSpPr>
+        <p:spPr>
+          <a:xfrm>
+            <a:off x="8049767" y="3611880"/>
+            <a:ext cx="3517391" cy="411480"/>
+          </a:xfrm>
+          <a:prstGeom prst="rect">
+            <a:avLst/>
+          </a:prstGeom>
+          <a:solidFill>
+            <a:srgbClr val="FFE500"/>
+          </a:solidFill>
+          <a:ln w="34925">
+            <a:solidFill>
+              <a:srgbClr val="000000"/>
+            </a:solidFill>
+          </a:ln>
+          <a:effectLst/>
+        </p:spPr>
+        <p:style>
+          <a:lnRef idx="1">
+            <a:schemeClr val="accent1"/>
+          </a:lnRef>
+          <a:fillRef idx="3">
+            <a:schemeClr val="accent1"/>
+          </a:fillRef>
+          <a:effectRef idx="2">
+            <a:schemeClr val="accent1"/>
+          </a:effectRef>
+          <a:fontRef idx="minor">
+            <a:schemeClr val="lt1"/>
+          </a:fontRef>
+        </p:style>
+        <p:txBody>
+          <a:bodyPr rtlCol="0" anchor="ctr"/>
+          <a:lstStyle/>
+          <a:p/>
+        </p:txBody>
+      </p:sp>
+      <p:sp>
+        <p:nvSpPr>
+          <p:cNvPr id="25" name="TextBox 24"/>
+          <p:cNvSpPr txBox="1"/>
+          <p:nvPr/>
+        </p:nvSpPr>
+        <p:spPr>
+          <a:xfrm>
+            <a:off x="8049767" y="3717036"/>
+            <a:ext cx="3517391" cy="274320"/>
+          </a:xfrm>
+          <a:prstGeom prst="rect">
+            <a:avLst/>
+          </a:prstGeom>
+          <a:noFill/>
+        </p:spPr>
+        <p:txBody>
+          <a:bodyPr wrap="square" lIns="0" rIns="0" tIns="0" bIns="0" anchor="t">
+            <a:spAutoFit/>
+          </a:bodyPr>
+          <a:lstStyle/>
+          <a:p>
+            <a:pPr algn="ctr"/>
+            <a:r>
+              <a:rPr sz="1100" b="1">
+                <a:solidFill>
+                  <a:srgbClr val="000000"/>
+                </a:solidFill>
+                <a:latin typeface="Arial"/>
+              </a:rPr>
+              <a:t>STATE</a:t>
+            </a:r>
+          </a:p>
+        </p:txBody>
+      </p:sp>
+      <p:sp>
+        <p:nvSpPr>
+          <p:cNvPr id="26" name="Rectangle 25"/>
+          <p:cNvSpPr/>
+          <p:nvPr/>
+        </p:nvSpPr>
+        <p:spPr>
+          <a:xfrm>
+            <a:off x="8118347" y="4183380"/>
+            <a:ext cx="3517391" cy="1463040"/>
+          </a:xfrm>
+          <a:prstGeom prst="rect">
+            <a:avLst/>
+          </a:prstGeom>
+          <a:solidFill>
+            <a:srgbClr val="000000"/>
+          </a:solidFill>
+          <a:ln w="6350">
+            <a:solidFill>
+              <a:srgbClr val="000000"/>
+            </a:solidFill>
+          </a:ln>
+          <a:effectLst/>
+        </p:spPr>
+        <p:style>
+          <a:lnRef idx="1">
+            <a:schemeClr val="accent1"/>
+          </a:lnRef>
+          <a:fillRef idx="3">
+            <a:schemeClr val="accent1"/>
+          </a:fillRef>
+          <a:effectRef idx="2">
+            <a:schemeClr val="accent1"/>
+          </a:effectRef>
+          <a:fontRef idx="minor">
+            <a:schemeClr val="lt1"/>
+          </a:fontRef>
+        </p:style>
+        <p:txBody>
+          <a:bodyPr rtlCol="0" anchor="ctr"/>
+          <a:lstStyle/>
+          <a:p/>
+        </p:txBody>
+      </p:sp>
+      <p:sp>
+        <p:nvSpPr>
+          <p:cNvPr id="27" name="Rectangle 26"/>
+          <p:cNvSpPr/>
+          <p:nvPr/>
+        </p:nvSpPr>
+        <p:spPr>
+          <a:xfrm>
+            <a:off x="8049767" y="4114800"/>
+            <a:ext cx="3517391" cy="1463040"/>
+          </a:xfrm>
+          <a:prstGeom prst="rect">
+            <a:avLst/>
+          </a:prstGeom>
+          <a:solidFill>
+            <a:srgbClr val="FFFDF7"/>
+          </a:solidFill>
+          <a:ln w="34925">
+            <a:solidFill>
+              <a:srgbClr val="000000"/>
+            </a:solidFill>
+          </a:ln>
+          <a:effectLst/>
+        </p:spPr>
+        <p:style>
+          <a:lnRef idx="1">
+            <a:schemeClr val="accent1"/>
+          </a:lnRef>
+          <a:fillRef idx="3">
+            <a:schemeClr val="accent1"/>
+          </a:fillRef>
+          <a:effectRef idx="2">
+            <a:schemeClr val="accent1"/>
+          </a:effectRef>
+          <a:fontRef idx="minor">
+            <a:schemeClr val="lt1"/>
+          </a:fontRef>
+        </p:style>
+        <p:txBody>
+          <a:bodyPr rtlCol="0" anchor="ctr"/>
+          <a:lstStyle/>
+          <a:p/>
+        </p:txBody>
+      </p:sp>
+      <p:sp>
+        <p:nvSpPr>
+          <p:cNvPr id="28" name="TextBox 27"/>
+          <p:cNvSpPr txBox="1"/>
+          <p:nvPr/>
+        </p:nvSpPr>
+        <p:spPr>
+          <a:xfrm>
+            <a:off x="8305799" y="4279392"/>
+            <a:ext cx="3005327" cy="320040"/>
+          </a:xfrm>
+          <a:prstGeom prst="rect">
+            <a:avLst/>
+          </a:prstGeom>
+          <a:noFill/>
+        </p:spPr>
+        <p:txBody>
+          <a:bodyPr wrap="square" lIns="0" rIns="0" tIns="0" bIns="0" anchor="t">
+            <a:spAutoFit/>
+          </a:bodyPr>
+          <a:lstStyle/>
+          <a:p>
+            <a:pPr algn="l"/>
+            <a:r>
+              <a:rPr sz="1400" b="1">
+                <a:solidFill>
+                  <a:srgbClr val="000000"/>
+                </a:solidFill>
+                <a:latin typeface="Arial"/>
+              </a:rPr>
+              <a:t>HOW IT WAS READ</a:t>
+            </a:r>
+          </a:p>
+        </p:txBody>
+      </p:sp>
+      <p:sp>
+        <p:nvSpPr>
+          <p:cNvPr id="29" name="TextBox 28"/>
+          <p:cNvSpPr txBox="1"/>
+          <p:nvPr/>
+        </p:nvSpPr>
+        <p:spPr>
+          <a:xfrm>
+            <a:off x="8305799" y="4663440"/>
+            <a:ext cx="3005327" cy="822960"/>
+          </a:xfrm>
+          <a:prstGeom prst="rect">
+            <a:avLst/>
+          </a:prstGeom>
+          <a:noFill/>
+        </p:spPr>
+        <p:txBody>
+          <a:bodyPr wrap="square" lIns="0" rIns="0" tIns="0" bIns="0" anchor="t">
+            <a:spAutoFit/>
+          </a:bodyPr>
+          <a:lstStyle/>
+          <a:p>
+            <a:pPr algn="l">
+              <a:lnSpc>
+                <a:spcPct val="125000"/>
+              </a:lnSpc>
+            </a:pPr>
+            <a:r>
+              <a:rPr sz="1250">
+                <a:solidFill>
+                  <a:srgbClr val="000000"/>
+                </a:solidFill>
+                <a:latin typeface="Calibri"/>
+              </a:rPr>
+              <a:t>Resolution, extraction settings, and the spatial intention.</a:t>
             </a:r>
           </a:p>
         </p:txBody>
